--- a/Final Submission/Presentation.pptx
+++ b/Final Submission/Presentation.pptx
@@ -301,7 +301,7 @@
           <a:lstStyle/>
           <a:p>
             <a:pPr>
-              <a:defRPr sz="1200">
+              <a:defRPr sz="1500">
                 <a:latin typeface="Lato"/>
               </a:defRPr>
             </a:pPr>
@@ -319,7 +319,7 @@
         <a:lstStyle/>
         <a:p>
           <a:pPr>
-            <a:defRPr sz="1300">
+            <a:defRPr sz="1500">
               <a:latin typeface="Lato"/>
             </a:defRPr>
           </a:pPr>
@@ -456,7 +456,7 @@
           <a:lstStyle/>
           <a:p>
             <a:pPr>
-              <a:defRPr sz="1200">
+              <a:defRPr sz="1500">
                 <a:latin typeface="Lato"/>
               </a:defRPr>
             </a:pPr>
@@ -1067,7 +1067,7 @@
           <a:lstStyle/>
           <a:p>
             <a:pPr>
-              <a:defRPr sz="1200">
+              <a:defRPr sz="1500">
                 <a:latin typeface="Lato"/>
               </a:defRPr>
             </a:pPr>
@@ -1086,7 +1086,7 @@
         <a:lstStyle/>
         <a:p>
           <a:pPr>
-            <a:defRPr sz="1300">
+            <a:defRPr sz="1500">
               <a:latin typeface="Lato"/>
             </a:defRPr>
           </a:pPr>
@@ -1225,7 +1225,7 @@
           <a:lstStyle/>
           <a:p>
             <a:pPr>
-              <a:defRPr sz="1200">
+              <a:defRPr sz="1500">
                 <a:latin typeface="Lato"/>
               </a:defRPr>
             </a:pPr>
@@ -1420,7 +1420,7 @@
           <a:lstStyle/>
           <a:p>
             <a:pPr>
-              <a:defRPr sz="1200">
+              <a:defRPr sz="1500">
                 <a:latin typeface="Lato"/>
               </a:defRPr>
             </a:pPr>
@@ -1438,7 +1438,7 @@
         <a:lstStyle/>
         <a:p>
           <a:pPr>
-            <a:defRPr sz="1300">
+            <a:defRPr sz="1500">
               <a:latin typeface="Lato"/>
             </a:defRPr>
           </a:pPr>
@@ -1593,7 +1593,7 @@
           <a:lstStyle/>
           <a:p>
             <a:pPr>
-              <a:defRPr sz="1200">
+              <a:defRPr sz="1500">
                 <a:latin typeface="Lato"/>
               </a:defRPr>
             </a:pPr>
@@ -1733,7 +1733,7 @@
           <a:lstStyle/>
           <a:p>
             <a:pPr>
-              <a:defRPr sz="1200">
+              <a:defRPr sz="1500">
                 <a:latin typeface="Lato"/>
               </a:defRPr>
             </a:pPr>
@@ -1853,7 +1853,7 @@
         <a:lstStyle/>
         <a:p>
           <a:pPr>
-            <a:defRPr sz="1300">
+            <a:defRPr sz="1500">
               <a:latin typeface="Lato"/>
             </a:defRPr>
           </a:pPr>
@@ -2028,7 +2028,7 @@
           <a:lstStyle/>
           <a:p>
             <a:pPr>
-              <a:defRPr sz="1200">
+              <a:defRPr sz="1500">
                 <a:latin typeface="Lato"/>
               </a:defRPr>
             </a:pPr>
@@ -2222,7 +2222,7 @@
           <a:lstStyle/>
           <a:p>
             <a:pPr>
-              <a:defRPr sz="1200">
+              <a:defRPr sz="1500">
                 <a:latin typeface="Lato"/>
               </a:defRPr>
             </a:pPr>
@@ -2240,7 +2240,7 @@
         <a:lstStyle/>
         <a:p>
           <a:pPr>
-            <a:defRPr sz="1300">
+            <a:defRPr sz="1500">
               <a:latin typeface="Lato"/>
             </a:defRPr>
           </a:pPr>
@@ -2377,7 +2377,7 @@
           <a:lstStyle/>
           <a:p>
             <a:pPr>
-              <a:defRPr sz="1200">
+              <a:defRPr sz="1500">
                 <a:latin typeface="Lato"/>
               </a:defRPr>
             </a:pPr>
@@ -2523,7 +2523,7 @@
           <a:lstStyle/>
           <a:p>
             <a:pPr>
-              <a:defRPr sz="1200">
+              <a:defRPr sz="1500">
                 <a:latin typeface="Lato"/>
               </a:defRPr>
             </a:pPr>

--- a/Final Submission/Presentation.pptx
+++ b/Final Submission/Presentation.pptx
@@ -3296,7 +3296,7 @@
           <a:lstStyle/>
           <a:p>
             <a:r>
-              <a:t>Source and model notes: Actual archived Yahoo stock prices, 752 common dates, 36 month-end observations, 10bp initial fee, unchanged share quantities. Not observed whole-fund returns.</a:t>
+              <a:t>Source and model notes: Original frozen policy equity base $6,229,246.75, not revised principal $6,209,562.44. Actual archived Yahoo stock prices, 752 common dates, 36 month-end observations, 10bp initial fee, unchanged shares. Not observed whole-fund returns.</a:t>
             </a:r>
           </a:p>
         </p:txBody>
@@ -3436,7 +3436,7 @@
           <a:lstStyle/>
           <a:p>
             <a:r>
-              <a:t>Source and model notes: Trustee 12% warning and 15% review, rolling withdrawal-adjusted. Revised monitor uses case YTM modeled bonds, not historical traded bond prices.</a:t>
+              <a:t>Source and model notes: Group-proposed (not trustee-authorized) 12% early warning and 15% review based on rolling withdrawal-adjusted returns. Revised monitor uses case YTM modeled bonds, not historical traded bond prices.</a:t>
             </a:r>
           </a:p>
         </p:txBody>
@@ -12602,7 +12602,7 @@
               </a:defRPr>
             </a:pPr>
             <a:r>
-              <a:t>Buy-and-hold equity values over 36 months, January 2023 to December 2025.</a:t>
+              <a:t>Original $6.229m equity base, not revised $6.210m. Monthly returns, 2023–25.</a:t>
             </a:r>
           </a:p>
         </p:txBody>
@@ -13648,7 +13648,7 @@
               </a:defRPr>
             </a:pPr>
             <a:r>
-              <a:t>Cash obligations and rolling drawdowns must be read together.</a:t>
+              <a:t>Our proposed review rules still require trustee agreement.</a:t>
             </a:r>
           </a:p>
         </p:txBody>

--- a/Final Submission/Presentation.pptx
+++ b/Final Submission/Presentation.pptx
@@ -529,106 +529,106 @@
                   <c:v>2023-01</c:v>
                 </c:pt>
                 <c:pt idx="1">
-                  <c:v>2023-02</c:v>
+                  <c:v/>
                 </c:pt>
                 <c:pt idx="2">
-                  <c:v>2023-03</c:v>
+                  <c:v/>
                 </c:pt>
                 <c:pt idx="3">
-                  <c:v>2023-04</c:v>
+                  <c:v/>
                 </c:pt>
                 <c:pt idx="4">
-                  <c:v>2023-05</c:v>
+                  <c:v/>
                 </c:pt>
                 <c:pt idx="5">
-                  <c:v>2023-06</c:v>
+                  <c:v/>
                 </c:pt>
                 <c:pt idx="6">
                   <c:v>2023-07</c:v>
                 </c:pt>
                 <c:pt idx="7">
-                  <c:v>2023-08</c:v>
+                  <c:v/>
                 </c:pt>
                 <c:pt idx="8">
-                  <c:v>2023-09</c:v>
+                  <c:v/>
                 </c:pt>
                 <c:pt idx="9">
-                  <c:v>2023-10</c:v>
+                  <c:v/>
                 </c:pt>
                 <c:pt idx="10">
-                  <c:v>2023-11</c:v>
+                  <c:v/>
                 </c:pt>
                 <c:pt idx="11">
-                  <c:v>2023-12</c:v>
+                  <c:v/>
                 </c:pt>
                 <c:pt idx="12">
                   <c:v>2024-01</c:v>
                 </c:pt>
                 <c:pt idx="13">
-                  <c:v>2024-02</c:v>
+                  <c:v/>
                 </c:pt>
                 <c:pt idx="14">
-                  <c:v>2024-03</c:v>
+                  <c:v/>
                 </c:pt>
                 <c:pt idx="15">
-                  <c:v>2024-04</c:v>
+                  <c:v/>
                 </c:pt>
                 <c:pt idx="16">
-                  <c:v>2024-05</c:v>
+                  <c:v/>
                 </c:pt>
                 <c:pt idx="17">
-                  <c:v>2024-06</c:v>
+                  <c:v/>
                 </c:pt>
                 <c:pt idx="18">
                   <c:v>2024-07</c:v>
                 </c:pt>
                 <c:pt idx="19">
-                  <c:v>2024-08</c:v>
+                  <c:v/>
                 </c:pt>
                 <c:pt idx="20">
-                  <c:v>2024-09</c:v>
+                  <c:v/>
                 </c:pt>
                 <c:pt idx="21">
-                  <c:v>2024-10</c:v>
+                  <c:v/>
                 </c:pt>
                 <c:pt idx="22">
-                  <c:v>2024-11</c:v>
+                  <c:v/>
                 </c:pt>
                 <c:pt idx="23">
-                  <c:v>2024-12</c:v>
+                  <c:v/>
                 </c:pt>
                 <c:pt idx="24">
                   <c:v>2025-01</c:v>
                 </c:pt>
                 <c:pt idx="25">
-                  <c:v>2025-02</c:v>
+                  <c:v/>
                 </c:pt>
                 <c:pt idx="26">
-                  <c:v>2025-03</c:v>
+                  <c:v/>
                 </c:pt>
                 <c:pt idx="27">
-                  <c:v>2025-04</c:v>
+                  <c:v/>
                 </c:pt>
                 <c:pt idx="28">
-                  <c:v>2025-05</c:v>
+                  <c:v/>
                 </c:pt>
                 <c:pt idx="29">
-                  <c:v>2025-06</c:v>
+                  <c:v/>
                 </c:pt>
                 <c:pt idx="30">
                   <c:v>2025-07</c:v>
                 </c:pt>
                 <c:pt idx="31">
-                  <c:v>2025-08</c:v>
+                  <c:v/>
                 </c:pt>
                 <c:pt idx="32">
-                  <c:v>2025-09</c:v>
+                  <c:v/>
                 </c:pt>
                 <c:pt idx="33">
-                  <c:v>2025-10</c:v>
+                  <c:v/>
                 </c:pt>
                 <c:pt idx="34">
-                  <c:v>2025-11</c:v>
+                  <c:v/>
                 </c:pt>
                 <c:pt idx="35">
                   <c:v>2025-12</c:v>
@@ -791,106 +791,106 @@
                   <c:v>2023-01</c:v>
                 </c:pt>
                 <c:pt idx="1">
-                  <c:v>2023-02</c:v>
+                  <c:v/>
                 </c:pt>
                 <c:pt idx="2">
-                  <c:v>2023-03</c:v>
+                  <c:v/>
                 </c:pt>
                 <c:pt idx="3">
-                  <c:v>2023-04</c:v>
+                  <c:v/>
                 </c:pt>
                 <c:pt idx="4">
-                  <c:v>2023-05</c:v>
+                  <c:v/>
                 </c:pt>
                 <c:pt idx="5">
-                  <c:v>2023-06</c:v>
+                  <c:v/>
                 </c:pt>
                 <c:pt idx="6">
                   <c:v>2023-07</c:v>
                 </c:pt>
                 <c:pt idx="7">
-                  <c:v>2023-08</c:v>
+                  <c:v/>
                 </c:pt>
                 <c:pt idx="8">
-                  <c:v>2023-09</c:v>
+                  <c:v/>
                 </c:pt>
                 <c:pt idx="9">
-                  <c:v>2023-10</c:v>
+                  <c:v/>
                 </c:pt>
                 <c:pt idx="10">
-                  <c:v>2023-11</c:v>
+                  <c:v/>
                 </c:pt>
                 <c:pt idx="11">
-                  <c:v>2023-12</c:v>
+                  <c:v/>
                 </c:pt>
                 <c:pt idx="12">
                   <c:v>2024-01</c:v>
                 </c:pt>
                 <c:pt idx="13">
-                  <c:v>2024-02</c:v>
+                  <c:v/>
                 </c:pt>
                 <c:pt idx="14">
-                  <c:v>2024-03</c:v>
+                  <c:v/>
                 </c:pt>
                 <c:pt idx="15">
-                  <c:v>2024-04</c:v>
+                  <c:v/>
                 </c:pt>
                 <c:pt idx="16">
-                  <c:v>2024-05</c:v>
+                  <c:v/>
                 </c:pt>
                 <c:pt idx="17">
-                  <c:v>2024-06</c:v>
+                  <c:v/>
                 </c:pt>
                 <c:pt idx="18">
                   <c:v>2024-07</c:v>
                 </c:pt>
                 <c:pt idx="19">
-                  <c:v>2024-08</c:v>
+                  <c:v/>
                 </c:pt>
                 <c:pt idx="20">
-                  <c:v>2024-09</c:v>
+                  <c:v/>
                 </c:pt>
                 <c:pt idx="21">
-                  <c:v>2024-10</c:v>
+                  <c:v/>
                 </c:pt>
                 <c:pt idx="22">
-                  <c:v>2024-11</c:v>
+                  <c:v/>
                 </c:pt>
                 <c:pt idx="23">
-                  <c:v>2024-12</c:v>
+                  <c:v/>
                 </c:pt>
                 <c:pt idx="24">
                   <c:v>2025-01</c:v>
                 </c:pt>
                 <c:pt idx="25">
-                  <c:v>2025-02</c:v>
+                  <c:v/>
                 </c:pt>
                 <c:pt idx="26">
-                  <c:v>2025-03</c:v>
+                  <c:v/>
                 </c:pt>
                 <c:pt idx="27">
-                  <c:v>2025-04</c:v>
+                  <c:v/>
                 </c:pt>
                 <c:pt idx="28">
-                  <c:v>2025-05</c:v>
+                  <c:v/>
                 </c:pt>
                 <c:pt idx="29">
-                  <c:v>2025-06</c:v>
+                  <c:v/>
                 </c:pt>
                 <c:pt idx="30">
                   <c:v>2025-07</c:v>
                 </c:pt>
                 <c:pt idx="31">
-                  <c:v>2025-08</c:v>
+                  <c:v/>
                 </c:pt>
                 <c:pt idx="32">
-                  <c:v>2025-09</c:v>
+                  <c:v/>
                 </c:pt>
                 <c:pt idx="33">
-                  <c:v>2025-10</c:v>
+                  <c:v/>
                 </c:pt>
                 <c:pt idx="34">
-                  <c:v>2025-11</c:v>
+                  <c:v/>
                 </c:pt>
                 <c:pt idx="35">
                   <c:v>2025-12</c:v>
@@ -2091,29 +2091,35 @@
           </c:spPr>
           <c:cat>
             <c:strRef>
-              <c:f>Sheet1!$A$2:$A$3</c:f>
+              <c:f>Sheet1!$A$2:$A$4</c:f>
               <c:strCache>
-                <c:ptCount val="2"/>
+                <c:ptCount val="3"/>
                 <c:pt idx="0">
                   <c:v>Sample MV</c:v>
                 </c:pt>
                 <c:pt idx="1">
-                  <c:v>Minimum Variance</c:v>
+                  <c:v>Single Index</c:v>
+                </c:pt>
+                <c:pt idx="2">
+                  <c:v>Min. Variance</c:v>
                 </c:pt>
               </c:strCache>
             </c:strRef>
           </c:cat>
           <c:val>
             <c:numRef>
-              <c:f>Sheet1!$B$2:$B$3</c:f>
+              <c:f>Sheet1!$B$2:$B$4</c:f>
               <c:numCache>
                 <c:formatCode>General</c:formatCode>
-                <c:ptCount val="2"/>
+                <c:ptCount val="3"/>
                 <c:pt idx="0">
-                  <c:v>12.0466</c:v>
+                  <c:v>12.046581187371338</c:v>
                 </c:pt>
                 <c:pt idx="1">
-                  <c:v>10.8572</c:v>
+                  <c:v>11.905535603931195</c:v>
+                </c:pt>
+                <c:pt idx="2">
+                  <c:v>10.857185131194342</c:v>
                 </c:pt>
               </c:numCache>
             </c:numRef>
@@ -2145,29 +2151,35 @@
           </c:spPr>
           <c:cat>
             <c:strRef>
-              <c:f>Sheet1!$A$2:$A$3</c:f>
+              <c:f>Sheet1!$A$2:$A$4</c:f>
               <c:strCache>
-                <c:ptCount val="2"/>
+                <c:ptCount val="3"/>
                 <c:pt idx="0">
                   <c:v>Sample MV</c:v>
                 </c:pt>
                 <c:pt idx="1">
-                  <c:v>Minimum Variance</c:v>
+                  <c:v>Single Index</c:v>
+                </c:pt>
+                <c:pt idx="2">
+                  <c:v>Min. Variance</c:v>
                 </c:pt>
               </c:strCache>
             </c:strRef>
           </c:cat>
           <c:val>
             <c:numRef>
-              <c:f>Sheet1!$C$2:$C$3</c:f>
+              <c:f>Sheet1!$C$2:$C$4</c:f>
               <c:numCache>
                 <c:formatCode>General</c:formatCode>
-                <c:ptCount val="2"/>
+                <c:ptCount val="3"/>
                 <c:pt idx="0">
-                  <c:v>14.9757</c:v>
+                  <c:v>14.97572487681616</c:v>
                 </c:pt>
                 <c:pt idx="1">
-                  <c:v>13.147</c:v>
+                  <c:v>14.462438864444218</c:v>
+                </c:pt>
+                <c:pt idx="2">
+                  <c:v>13.147012521086127</c:v>
                 </c:pt>
               </c:numCache>
             </c:numRef>
@@ -3086,7 +3098,7 @@
           <a:lstStyle/>
           <a:p>
             <a:r>
-              <a:t>Source and model notes: Utility frozen 0.0533287046122; revised reoptimized 0.053328718. A*=8.938687 is pairwise fixed comparison.</a:t>
+              <a:t>Source and model notes: Source-derived utility frozen 0.053328704612, reoptimized 0.053328717792, gain 1.31799698794e-08. Bars cannot communicate this tiny utility difference faithfully. A*=8.938687 is a pairwise fixed-policy comparison.</a:t>
             </a:r>
           </a:p>
         </p:txBody>
@@ -3506,7 +3518,7 @@
           <a:lstStyle/>
           <a:p>
             <a:r>
-              <a:t>Source and model notes: Approved principal funding and original Sample MV weights; source and acceptance limitations preserved.</a:t>
+              <a:t>Source and model notes: Group-recommended principal matching with preserved Sample MV weights; proposed policy is not trustee-approved. University acceptance and actual personal confirmations remain separate evidence.</a:t>
             </a:r>
           </a:p>
         </p:txBody>
@@ -3576,7 +3588,7 @@
           <a:lstStyle/>
           <a:p>
             <a:r>
-              <a:t>Source and model notes: M1 selected principal 2,400 Beta, 1,200 Gamma, 2,400 Delta, after-fee net equity 6,209,562.44, hurdle 4.7951%, 2025 retained cash 396k.</a:t>
+              <a:t>Source and model notes: Group-selected principal 2,400 Beta, 1,200 Gamma, 2,400 Delta. Net equity after fee 6,209,562.44; hurdle 4.7951%; 2025 cash 396k.</a:t>
             </a:r>
           </a:p>
         </p:txBody>
@@ -4066,7 +4078,7 @@
           <a:lstStyle/>
           <a:p>
             <a:r>
-              <a:t>Source and model notes: Original model return and sigma: Sample MV 12.0466%, 14.9757%; Minimum Variance 10.8572%,13.1470%. Third method Single Index.</a:t>
+              <a:t>Source and model notes: All three models use the common sample covariance for displayed risk: Sample MV 12.0466%/14.9757%; Single Index 11.9055%/14.4624%; Minimum Variance 10.8572%/13.1470%. Single Index is optimized with its own covariance assumption.</a:t>
             </a:r>
           </a:p>
         </p:txBody>
@@ -10512,8 +10524,8 @@
         </p:nvSpPr>
         <p:spPr>
           <a:xfrm>
-            <a:off x="1179576" y="6409944"/>
-            <a:ext cx="2871216" cy="475488"/>
+            <a:off x="1179576" y="6300216"/>
+            <a:ext cx="4050791" cy="475488"/>
           </a:xfrm>
           <a:prstGeom prst="rect">
             <a:avLst/>
@@ -10535,66 +10547,21 @@
               </a:defRPr>
             </a:pPr>
             <a:r>
-              <a:t>Frozen</a:t>
-            </a:r>
-          </a:p>
-        </p:txBody>
-      </p:sp>
-      <p:sp>
-        <p:nvSpPr>
-          <p:cNvPr id="15" name="Rounded Rectangle 14"/>
-          <p:cNvSpPr/>
-          <p:nvPr/>
-        </p:nvSpPr>
-        <p:spPr>
-          <a:xfrm>
-            <a:off x="4187952" y="6446520"/>
-            <a:ext cx="3507569" cy="420624"/>
-          </a:xfrm>
-          <a:prstGeom prst="roundRect">
-            <a:avLst>
-              <a:gd name="adj" fmla="val 7000"/>
-            </a:avLst>
-          </a:prstGeom>
-          <a:solidFill>
-            <a:srgbClr val="125449"/>
-          </a:solidFill>
-          <a:ln>
-            <a:noFill/>
-          </a:ln>
-        </p:spPr>
-        <p:style>
-          <a:lnRef idx="1">
-            <a:schemeClr val="accent1"/>
-          </a:lnRef>
-          <a:fillRef idx="3">
-            <a:schemeClr val="accent1"/>
-          </a:fillRef>
-          <a:effectRef idx="2">
-            <a:schemeClr val="accent1"/>
-          </a:effectRef>
-          <a:fontRef idx="minor">
-            <a:schemeClr val="lt1"/>
-          </a:fontRef>
-        </p:style>
-        <p:txBody>
-          <a:bodyPr rtlCol="0" anchor="ctr"/>
-          <a:lstStyle/>
-          <a:p>
-            <a:pPr algn="ctr"/>
-          </a:p>
-        </p:txBody>
-      </p:sp>
-      <p:sp>
-        <p:nvSpPr>
-          <p:cNvPr id="16" name="TextBox 15"/>
+              <a:t>Frozen weights</a:t>
+            </a:r>
+          </a:p>
+        </p:txBody>
+      </p:sp>
+      <p:sp>
+        <p:nvSpPr>
+          <p:cNvPr id="15" name="TextBox 14"/>
           <p:cNvSpPr txBox="1"/>
           <p:nvPr/>
         </p:nvSpPr>
         <p:spPr>
           <a:xfrm>
-            <a:off x="8238744" y="6400800"/>
-            <a:ext cx="2532888" cy="512064"/>
+            <a:off x="5650992" y="6291072"/>
+            <a:ext cx="4654296" cy="512064"/>
           </a:xfrm>
           <a:prstGeom prst="rect">
             <a:avLst/>
@@ -10608,7 +10575,7 @@
           <a:lstStyle/>
           <a:p>
             <a:pPr algn="r">
-              <a:defRPr sz="2000" b="1">
+              <a:defRPr sz="2300" b="1">
                 <a:solidFill>
                   <a:srgbClr val="125449"/>
                 </a:solidFill>
@@ -10623,14 +10590,14 @@
       </p:sp>
       <p:sp>
         <p:nvSpPr>
-          <p:cNvPr id="17" name="TextBox 16"/>
+          <p:cNvPr id="16" name="TextBox 15"/>
           <p:cNvSpPr txBox="1"/>
           <p:nvPr/>
         </p:nvSpPr>
         <p:spPr>
           <a:xfrm>
-            <a:off x="1179576" y="7269480"/>
-            <a:ext cx="2871216" cy="475488"/>
+            <a:off x="1179576" y="7086600"/>
+            <a:ext cx="4050791" cy="475488"/>
           </a:xfrm>
           <a:prstGeom prst="rect">
             <a:avLst/>
@@ -10659,59 +10626,14 @@
       </p:sp>
       <p:sp>
         <p:nvSpPr>
-          <p:cNvPr id="18" name="Rounded Rectangle 17"/>
-          <p:cNvSpPr/>
-          <p:nvPr/>
-        </p:nvSpPr>
-        <p:spPr>
-          <a:xfrm>
-            <a:off x="4187952" y="7306056"/>
-            <a:ext cx="3507570" cy="420624"/>
-          </a:xfrm>
-          <a:prstGeom prst="roundRect">
-            <a:avLst>
-              <a:gd name="adj" fmla="val 7000"/>
-            </a:avLst>
-          </a:prstGeom>
-          <a:solidFill>
-            <a:srgbClr val="C28E52"/>
-          </a:solidFill>
-          <a:ln>
-            <a:noFill/>
-          </a:ln>
-        </p:spPr>
-        <p:style>
-          <a:lnRef idx="1">
-            <a:schemeClr val="accent1"/>
-          </a:lnRef>
-          <a:fillRef idx="3">
-            <a:schemeClr val="accent1"/>
-          </a:fillRef>
-          <a:effectRef idx="2">
-            <a:schemeClr val="accent1"/>
-          </a:effectRef>
-          <a:fontRef idx="minor">
-            <a:schemeClr val="lt1"/>
-          </a:fontRef>
-        </p:style>
-        <p:txBody>
-          <a:bodyPr rtlCol="0" anchor="ctr"/>
-          <a:lstStyle/>
-          <a:p>
-            <a:pPr algn="ctr"/>
-          </a:p>
-        </p:txBody>
-      </p:sp>
-      <p:sp>
-        <p:nvSpPr>
-          <p:cNvPr id="19" name="TextBox 18"/>
+          <p:cNvPr id="17" name="TextBox 16"/>
           <p:cNvSpPr txBox="1"/>
           <p:nvPr/>
         </p:nvSpPr>
         <p:spPr>
           <a:xfrm>
-            <a:off x="8238744" y="7260336"/>
-            <a:ext cx="2532888" cy="512064"/>
+            <a:off x="5650992" y="7077456"/>
+            <a:ext cx="4654296" cy="512064"/>
           </a:xfrm>
           <a:prstGeom prst="rect">
             <a:avLst/>
@@ -10725,7 +10647,7 @@
           <a:lstStyle/>
           <a:p>
             <a:pPr algn="r">
-              <a:defRPr sz="2000" b="1">
+              <a:defRPr sz="2300" b="1">
                 <a:solidFill>
                   <a:srgbClr val="C28E52"/>
                 </a:solidFill>
@@ -10734,6 +10656,77 @@
             </a:pPr>
             <a:r>
               <a:t>0.053328718</a:t>
+            </a:r>
+          </a:p>
+        </p:txBody>
+      </p:sp>
+      <p:cxnSp>
+        <p:nvCxnSpPr>
+          <p:cNvPr id="18" name="Connector 17"/>
+          <p:cNvCxnSpPr/>
+          <p:nvPr/>
+        </p:nvCxnSpPr>
+        <p:spPr>
+          <a:xfrm>
+            <a:off x="1243584" y="7863840"/>
+            <a:ext cx="9089136" cy="0"/>
+          </a:xfrm>
+          <a:prstGeom prst="line">
+            <a:avLst/>
+          </a:prstGeom>
+          <a:ln w="15240">
+            <a:solidFill>
+              <a:srgbClr val="D4DCD3"/>
+            </a:solidFill>
+          </a:ln>
+        </p:spPr>
+        <p:style>
+          <a:lnRef idx="2">
+            <a:schemeClr val="accent1"/>
+          </a:lnRef>
+          <a:fillRef idx="0">
+            <a:schemeClr val="accent1"/>
+          </a:fillRef>
+          <a:effectRef idx="1">
+            <a:schemeClr val="accent1"/>
+          </a:effectRef>
+          <a:fontRef idx="minor">
+            <a:schemeClr val="tx1"/>
+          </a:fontRef>
+        </p:style>
+      </p:cxnSp>
+      <p:sp>
+        <p:nvSpPr>
+          <p:cNvPr id="19" name="TextBox 18"/>
+          <p:cNvSpPr txBox="1"/>
+          <p:nvPr/>
+        </p:nvSpPr>
+        <p:spPr>
+          <a:xfrm>
+            <a:off x="1325880" y="8092440"/>
+            <a:ext cx="9162288" cy="566928"/>
+          </a:xfrm>
+          <a:prstGeom prst="rect">
+            <a:avLst/>
+          </a:prstGeom>
+          <a:noFill/>
+        </p:spPr>
+        <p:txBody>
+          <a:bodyPr wrap="square" anchor="ctr" lIns="36576" rIns="36576" tIns="0" bIns="0">
+            <a:spAutoFit/>
+          </a:bodyPr>
+          <a:lstStyle/>
+          <a:p>
+            <a:pPr algn="ctr">
+              <a:defRPr sz="2200" b="1">
+                <a:solidFill>
+                  <a:srgbClr val="125449"/>
+                </a:solidFill>
+                <a:latin typeface="Lato"/>
+              </a:defRPr>
+            </a:pPr>
+            <a:r>
+              <a:t>Gain: +0.00000001318 in utility</a:t>
             </a:r>
           </a:p>
         </p:txBody>

--- a/Final Submission/Presentation.pptx
+++ b/Final Submission/Presentation.pptx
@@ -2958,7 +2958,7 @@
           <a:lstStyle/>
           <a:p>
             <a:r>
-              <a:t>Source and model notes: Original case, trustee revised mandate and all three analytical workstreams. Architecture is an illustrative vector graphic.</a:t>
+              <a:t>Source and model notes: Source: original case and revised mandate. Campus photograph: Tomwsulcer (Cornell University), Wikimedia Commons CC0, illustrative only; not a Kappa-owned building. Details and SHA-256 are in assets/Sources.json.</a:t>
             </a:r>
           </a:p>
         </p:txBody>
@@ -3518,7 +3518,7 @@
           <a:lstStyle/>
           <a:p>
             <a:r>
-              <a:t>Source and model notes: Group-recommended principal matching with preserved Sample MV weights; proposed policy is not trustee-approved. University acceptance and actual personal confirmations remain separate evidence.</a:t>
+              <a:t>Source and model notes: Group-recommended principal matching and frozen Sample MV. No trustee endorsement, LMS confirmation or individual signature is implied. Seminar-library photograph by Morshedhasan12, CC0, illustrative only. See assets/Sources.json.</a:t>
             </a:r>
           </a:p>
         </p:txBody>
@@ -3588,7 +3588,7 @@
           <a:lstStyle/>
           <a:p>
             <a:r>
-              <a:t>Source and model notes: Group-selected principal 2,400 Beta, 1,200 Gamma, 2,400 Delta. Net equity after fee 6,209,562.44; hurdle 4.7951%; 2025 cash 396k.</a:t>
+              <a:t>Source and model notes: Group-selected principal bonds: 2,400 Beta, 1,200 Gamma, 2,400 Delta; net equity 6,209,562.44; 4.7951% hurdle; 2025 cash 396k. Campus photograph: Tomwsulcer, CC0, illustrative only.</a:t>
             </a:r>
           </a:p>
         </p:txBody>
@@ -3798,7 +3798,7 @@
           <a:lstStyle/>
           <a:p>
             <a:r>
-              <a:t>Source and model notes: Principal cash retained after 2023 132k; 2024 264k; 2025 396k; 2026 480k; 2027 564k.</a:t>
+              <a:t>Source and model notes: Retained principal-plan cash: 2023 132k, 2024 264k, 2025 396k, 2026 480k, 2027 564k. Seminar-library image: Morshedhasan12, Wikimedia Commons CC0; illustrative only.</a:t>
             </a:r>
           </a:p>
         </p:txBody>
@@ -7379,1602 +7379,33 @@
           </a:p>
         </p:txBody>
       </p:sp>
-      <p:sp>
-        <p:nvSpPr>
-          <p:cNvPr id="10" name="Rounded Rectangle 9"/>
-          <p:cNvSpPr/>
-          <p:nvPr/>
-        </p:nvSpPr>
+      <p:pic>
+        <p:nvPicPr>
+          <p:cNvPr id="10" name="Picture 9" descr="image.jpg"/>
+          <p:cNvPicPr>
+            <a:picLocks noChangeAspect="1"/>
+          </p:cNvPicPr>
+          <p:nvPr/>
+        </p:nvPicPr>
+        <p:blipFill>
+          <a:blip r:embed="rId2"/>
+          <a:stretch>
+            <a:fillRect/>
+          </a:stretch>
+        </p:blipFill>
         <p:spPr>
           <a:xfrm>
             <a:off x="11795760" y="1380744"/>
             <a:ext cx="5660136" cy="8147304"/>
           </a:xfrm>
-          <a:prstGeom prst="roundRect">
-            <a:avLst>
-              <a:gd name="adj" fmla="val 7000"/>
-            </a:avLst>
-          </a:prstGeom>
-          <a:solidFill>
-            <a:srgbClr val="EAF0E9"/>
-          </a:solidFill>
-          <a:ln>
-            <a:noFill/>
-          </a:ln>
-        </p:spPr>
-        <p:style>
-          <a:lnRef idx="1">
-            <a:schemeClr val="accent1"/>
-          </a:lnRef>
-          <a:fillRef idx="3">
-            <a:schemeClr val="accent1"/>
-          </a:fillRef>
-          <a:effectRef idx="2">
-            <a:schemeClr val="accent1"/>
-          </a:effectRef>
-          <a:fontRef idx="minor">
-            <a:schemeClr val="lt1"/>
-          </a:fontRef>
-        </p:style>
-        <p:txBody>
-          <a:bodyPr rtlCol="0" anchor="ctr"/>
-          <a:lstStyle/>
-          <a:p>
-            <a:pPr algn="ctr"/>
-          </a:p>
-        </p:txBody>
-      </p:sp>
-      <p:sp>
-        <p:nvSpPr>
-          <p:cNvPr id="11" name="Rectangle 10"/>
-          <p:cNvSpPr/>
-          <p:nvPr/>
-        </p:nvSpPr>
-        <p:spPr>
-          <a:xfrm>
-            <a:off x="12022165" y="4313773"/>
-            <a:ext cx="962223" cy="5214274"/>
-          </a:xfrm>
-          <a:prstGeom prst="rect">
-            <a:avLst/>
-          </a:prstGeom>
-          <a:solidFill>
-            <a:srgbClr val="8DAE9D"/>
-          </a:solidFill>
-          <a:ln>
-            <a:noFill/>
-          </a:ln>
-        </p:spPr>
-        <p:style>
-          <a:lnRef idx="1">
-            <a:schemeClr val="accent1"/>
-          </a:lnRef>
-          <a:fillRef idx="3">
-            <a:schemeClr val="accent1"/>
-          </a:fillRef>
-          <a:effectRef idx="2">
-            <a:schemeClr val="accent1"/>
-          </a:effectRef>
-          <a:fontRef idx="minor">
-            <a:schemeClr val="lt1"/>
-          </a:fontRef>
-        </p:style>
-        <p:txBody>
-          <a:bodyPr rtlCol="0" anchor="ctr"/>
-          <a:lstStyle/>
-          <a:p>
-            <a:pPr algn="ctr"/>
-          </a:p>
-        </p:txBody>
-      </p:sp>
-      <p:sp>
-        <p:nvSpPr>
-          <p:cNvPr id="12" name="Rectangle 11"/>
-          <p:cNvSpPr/>
-          <p:nvPr/>
-        </p:nvSpPr>
-        <p:spPr>
-          <a:xfrm>
-            <a:off x="12185743" y="5356628"/>
-            <a:ext cx="163577" cy="338927"/>
-          </a:xfrm>
-          <a:prstGeom prst="rect">
-            <a:avLst/>
-          </a:prstGeom>
-          <a:solidFill>
-            <a:srgbClr val="F8F5EF"/>
-          </a:solidFill>
-          <a:ln>
-            <a:noFill/>
-          </a:ln>
-        </p:spPr>
-        <p:style>
-          <a:lnRef idx="1">
-            <a:schemeClr val="accent1"/>
-          </a:lnRef>
-          <a:fillRef idx="3">
-            <a:schemeClr val="accent1"/>
-          </a:fillRef>
-          <a:effectRef idx="2">
-            <a:schemeClr val="accent1"/>
-          </a:effectRef>
-          <a:fontRef idx="minor">
-            <a:schemeClr val="lt1"/>
-          </a:fontRef>
-        </p:style>
-        <p:txBody>
-          <a:bodyPr rtlCol="0" anchor="ctr"/>
-          <a:lstStyle/>
-          <a:p>
-            <a:pPr algn="ctr"/>
-          </a:p>
-        </p:txBody>
-      </p:sp>
-      <p:sp>
-        <p:nvSpPr>
-          <p:cNvPr id="13" name="Rectangle 12"/>
-          <p:cNvSpPr/>
-          <p:nvPr/>
-        </p:nvSpPr>
-        <p:spPr>
-          <a:xfrm>
-            <a:off x="12628366" y="5356628"/>
-            <a:ext cx="163577" cy="338927"/>
-          </a:xfrm>
-          <a:prstGeom prst="rect">
-            <a:avLst/>
-          </a:prstGeom>
-          <a:solidFill>
-            <a:srgbClr val="F8F5EF"/>
-          </a:solidFill>
-          <a:ln>
-            <a:noFill/>
-          </a:ln>
-        </p:spPr>
-        <p:style>
-          <a:lnRef idx="1">
-            <a:schemeClr val="accent1"/>
-          </a:lnRef>
-          <a:fillRef idx="3">
-            <a:schemeClr val="accent1"/>
-          </a:fillRef>
-          <a:effectRef idx="2">
-            <a:schemeClr val="accent1"/>
-          </a:effectRef>
-          <a:fontRef idx="minor">
-            <a:schemeClr val="lt1"/>
-          </a:fontRef>
-        </p:style>
-        <p:txBody>
-          <a:bodyPr rtlCol="0" anchor="ctr"/>
-          <a:lstStyle/>
-          <a:p>
-            <a:pPr algn="ctr"/>
-          </a:p>
-        </p:txBody>
-      </p:sp>
-      <p:sp>
-        <p:nvSpPr>
-          <p:cNvPr id="14" name="Rectangle 13"/>
-          <p:cNvSpPr/>
-          <p:nvPr/>
-        </p:nvSpPr>
-        <p:spPr>
-          <a:xfrm>
-            <a:off x="12185743" y="6503768"/>
-            <a:ext cx="163577" cy="338927"/>
-          </a:xfrm>
-          <a:prstGeom prst="rect">
-            <a:avLst/>
-          </a:prstGeom>
-          <a:solidFill>
-            <a:srgbClr val="F8F5EF"/>
-          </a:solidFill>
-          <a:ln>
-            <a:noFill/>
-          </a:ln>
-        </p:spPr>
-        <p:style>
-          <a:lnRef idx="1">
-            <a:schemeClr val="accent1"/>
-          </a:lnRef>
-          <a:fillRef idx="3">
-            <a:schemeClr val="accent1"/>
-          </a:fillRef>
-          <a:effectRef idx="2">
-            <a:schemeClr val="accent1"/>
-          </a:effectRef>
-          <a:fontRef idx="minor">
-            <a:schemeClr val="lt1"/>
-          </a:fontRef>
-        </p:style>
-        <p:txBody>
-          <a:bodyPr rtlCol="0" anchor="ctr"/>
-          <a:lstStyle/>
-          <a:p>
-            <a:pPr algn="ctr"/>
-          </a:p>
-        </p:txBody>
-      </p:sp>
-      <p:sp>
-        <p:nvSpPr>
-          <p:cNvPr id="15" name="Rectangle 14"/>
-          <p:cNvSpPr/>
-          <p:nvPr/>
-        </p:nvSpPr>
-        <p:spPr>
-          <a:xfrm>
-            <a:off x="12628366" y="6503768"/>
-            <a:ext cx="163577" cy="338927"/>
-          </a:xfrm>
-          <a:prstGeom prst="rect">
-            <a:avLst/>
-          </a:prstGeom>
-          <a:solidFill>
-            <a:srgbClr val="F8F5EF"/>
-          </a:solidFill>
-          <a:ln>
-            <a:noFill/>
-          </a:ln>
-        </p:spPr>
-        <p:style>
-          <a:lnRef idx="1">
-            <a:schemeClr val="accent1"/>
-          </a:lnRef>
-          <a:fillRef idx="3">
-            <a:schemeClr val="accent1"/>
-          </a:fillRef>
-          <a:effectRef idx="2">
-            <a:schemeClr val="accent1"/>
-          </a:effectRef>
-          <a:fontRef idx="minor">
-            <a:schemeClr val="lt1"/>
-          </a:fontRef>
-        </p:style>
-        <p:txBody>
-          <a:bodyPr rtlCol="0" anchor="ctr"/>
-          <a:lstStyle/>
-          <a:p>
-            <a:pPr algn="ctr"/>
-          </a:p>
-        </p:txBody>
-      </p:sp>
-      <p:sp>
-        <p:nvSpPr>
-          <p:cNvPr id="16" name="Rectangle 15"/>
-          <p:cNvSpPr/>
-          <p:nvPr/>
-        </p:nvSpPr>
-        <p:spPr>
-          <a:xfrm>
-            <a:off x="12185743" y="7650909"/>
-            <a:ext cx="163577" cy="338927"/>
-          </a:xfrm>
-          <a:prstGeom prst="rect">
-            <a:avLst/>
-          </a:prstGeom>
-          <a:solidFill>
-            <a:srgbClr val="F8F5EF"/>
-          </a:solidFill>
-          <a:ln>
-            <a:noFill/>
-          </a:ln>
-        </p:spPr>
-        <p:style>
-          <a:lnRef idx="1">
-            <a:schemeClr val="accent1"/>
-          </a:lnRef>
-          <a:fillRef idx="3">
-            <a:schemeClr val="accent1"/>
-          </a:fillRef>
-          <a:effectRef idx="2">
-            <a:schemeClr val="accent1"/>
-          </a:effectRef>
-          <a:fontRef idx="minor">
-            <a:schemeClr val="lt1"/>
-          </a:fontRef>
-        </p:style>
-        <p:txBody>
-          <a:bodyPr rtlCol="0" anchor="ctr"/>
-          <a:lstStyle/>
-          <a:p>
-            <a:pPr algn="ctr"/>
-          </a:p>
-        </p:txBody>
-      </p:sp>
-      <p:sp>
-        <p:nvSpPr>
-          <p:cNvPr id="17" name="Rectangle 16"/>
-          <p:cNvSpPr/>
-          <p:nvPr/>
-        </p:nvSpPr>
-        <p:spPr>
-          <a:xfrm>
-            <a:off x="12628366" y="7650909"/>
-            <a:ext cx="163577" cy="338927"/>
-          </a:xfrm>
-          <a:prstGeom prst="rect">
-            <a:avLst/>
-          </a:prstGeom>
-          <a:solidFill>
-            <a:srgbClr val="F8F5EF"/>
-          </a:solidFill>
-          <a:ln>
-            <a:noFill/>
-          </a:ln>
-        </p:spPr>
-        <p:style>
-          <a:lnRef idx="1">
-            <a:schemeClr val="accent1"/>
-          </a:lnRef>
-          <a:fillRef idx="3">
-            <a:schemeClr val="accent1"/>
-          </a:fillRef>
-          <a:effectRef idx="2">
-            <a:schemeClr val="accent1"/>
-          </a:effectRef>
-          <a:fontRef idx="minor">
-            <a:schemeClr val="lt1"/>
-          </a:fontRef>
-        </p:style>
-        <p:txBody>
-          <a:bodyPr rtlCol="0" anchor="ctr"/>
-          <a:lstStyle/>
-          <a:p>
-            <a:pPr algn="ctr"/>
-          </a:p>
-        </p:txBody>
-      </p:sp>
-      <p:sp>
-        <p:nvSpPr>
-          <p:cNvPr id="18" name="Rectangle 17"/>
-          <p:cNvSpPr/>
-          <p:nvPr/>
-        </p:nvSpPr>
-        <p:spPr>
-          <a:xfrm>
-            <a:off x="12984388" y="2114001"/>
-            <a:ext cx="962223" cy="7414046"/>
-          </a:xfrm>
-          <a:prstGeom prst="rect">
-            <a:avLst/>
-          </a:prstGeom>
-          <a:solidFill>
-            <a:srgbClr val="125449"/>
-          </a:solidFill>
-          <a:ln>
-            <a:noFill/>
-          </a:ln>
-        </p:spPr>
-        <p:style>
-          <a:lnRef idx="1">
-            <a:schemeClr val="accent1"/>
-          </a:lnRef>
-          <a:fillRef idx="3">
-            <a:schemeClr val="accent1"/>
-          </a:fillRef>
-          <a:effectRef idx="2">
-            <a:schemeClr val="accent1"/>
-          </a:effectRef>
-          <a:fontRef idx="minor">
-            <a:schemeClr val="lt1"/>
-          </a:fontRef>
-        </p:style>
-        <p:txBody>
-          <a:bodyPr rtlCol="0" anchor="ctr"/>
-          <a:lstStyle/>
-          <a:p>
-            <a:pPr algn="ctr"/>
-          </a:p>
-        </p:txBody>
-      </p:sp>
-      <p:sp>
-        <p:nvSpPr>
-          <p:cNvPr id="19" name="Rectangle 18"/>
-          <p:cNvSpPr/>
-          <p:nvPr/>
-        </p:nvSpPr>
-        <p:spPr>
-          <a:xfrm>
-            <a:off x="13147966" y="3596810"/>
-            <a:ext cx="163577" cy="481913"/>
-          </a:xfrm>
-          <a:prstGeom prst="rect">
-            <a:avLst/>
-          </a:prstGeom>
-          <a:solidFill>
-            <a:srgbClr val="F8F5EF"/>
-          </a:solidFill>
-          <a:ln>
-            <a:noFill/>
-          </a:ln>
-        </p:spPr>
-        <p:style>
-          <a:lnRef idx="1">
-            <a:schemeClr val="accent1"/>
-          </a:lnRef>
-          <a:fillRef idx="3">
-            <a:schemeClr val="accent1"/>
-          </a:fillRef>
-          <a:effectRef idx="2">
-            <a:schemeClr val="accent1"/>
-          </a:effectRef>
-          <a:fontRef idx="minor">
-            <a:schemeClr val="lt1"/>
-          </a:fontRef>
-        </p:style>
-        <p:txBody>
-          <a:bodyPr rtlCol="0" anchor="ctr"/>
-          <a:lstStyle/>
-          <a:p>
-            <a:pPr algn="ctr"/>
-          </a:p>
-        </p:txBody>
-      </p:sp>
-      <p:sp>
-        <p:nvSpPr>
-          <p:cNvPr id="20" name="Rectangle 19"/>
-          <p:cNvSpPr/>
-          <p:nvPr/>
-        </p:nvSpPr>
-        <p:spPr>
-          <a:xfrm>
-            <a:off x="13590589" y="3596810"/>
-            <a:ext cx="163577" cy="481913"/>
-          </a:xfrm>
-          <a:prstGeom prst="rect">
-            <a:avLst/>
-          </a:prstGeom>
-          <a:solidFill>
-            <a:srgbClr val="F8F5EF"/>
-          </a:solidFill>
-          <a:ln>
-            <a:noFill/>
-          </a:ln>
-        </p:spPr>
-        <p:style>
-          <a:lnRef idx="1">
-            <a:schemeClr val="accent1"/>
-          </a:lnRef>
-          <a:fillRef idx="3">
-            <a:schemeClr val="accent1"/>
-          </a:fillRef>
-          <a:effectRef idx="2">
-            <a:schemeClr val="accent1"/>
-          </a:effectRef>
-          <a:fontRef idx="minor">
-            <a:schemeClr val="lt1"/>
-          </a:fontRef>
-        </p:style>
-        <p:txBody>
-          <a:bodyPr rtlCol="0" anchor="ctr"/>
-          <a:lstStyle/>
-          <a:p>
-            <a:pPr algn="ctr"/>
-          </a:p>
-        </p:txBody>
-      </p:sp>
-      <p:sp>
-        <p:nvSpPr>
-          <p:cNvPr id="21" name="Rectangle 20"/>
-          <p:cNvSpPr/>
-          <p:nvPr/>
-        </p:nvSpPr>
-        <p:spPr>
-          <a:xfrm>
-            <a:off x="13147966" y="5227900"/>
-            <a:ext cx="163577" cy="481913"/>
-          </a:xfrm>
-          <a:prstGeom prst="rect">
-            <a:avLst/>
-          </a:prstGeom>
-          <a:solidFill>
-            <a:srgbClr val="F8F5EF"/>
-          </a:solidFill>
-          <a:ln>
-            <a:noFill/>
-          </a:ln>
-        </p:spPr>
-        <p:style>
-          <a:lnRef idx="1">
-            <a:schemeClr val="accent1"/>
-          </a:lnRef>
-          <a:fillRef idx="3">
-            <a:schemeClr val="accent1"/>
-          </a:fillRef>
-          <a:effectRef idx="2">
-            <a:schemeClr val="accent1"/>
-          </a:effectRef>
-          <a:fontRef idx="minor">
-            <a:schemeClr val="lt1"/>
-          </a:fontRef>
-        </p:style>
-        <p:txBody>
-          <a:bodyPr rtlCol="0" anchor="ctr"/>
-          <a:lstStyle/>
-          <a:p>
-            <a:pPr algn="ctr"/>
-          </a:p>
-        </p:txBody>
-      </p:sp>
-      <p:sp>
-        <p:nvSpPr>
-          <p:cNvPr id="22" name="Rectangle 21"/>
-          <p:cNvSpPr/>
-          <p:nvPr/>
-        </p:nvSpPr>
-        <p:spPr>
-          <a:xfrm>
-            <a:off x="13590589" y="5227900"/>
-            <a:ext cx="163577" cy="481913"/>
-          </a:xfrm>
-          <a:prstGeom prst="rect">
-            <a:avLst/>
-          </a:prstGeom>
-          <a:solidFill>
-            <a:srgbClr val="F8F5EF"/>
-          </a:solidFill>
-          <a:ln>
-            <a:noFill/>
-          </a:ln>
-        </p:spPr>
-        <p:style>
-          <a:lnRef idx="1">
-            <a:schemeClr val="accent1"/>
-          </a:lnRef>
-          <a:fillRef idx="3">
-            <a:schemeClr val="accent1"/>
-          </a:fillRef>
-          <a:effectRef idx="2">
-            <a:schemeClr val="accent1"/>
-          </a:effectRef>
-          <a:fontRef idx="minor">
-            <a:schemeClr val="lt1"/>
-          </a:fontRef>
-        </p:style>
-        <p:txBody>
-          <a:bodyPr rtlCol="0" anchor="ctr"/>
-          <a:lstStyle/>
-          <a:p>
-            <a:pPr algn="ctr"/>
-          </a:p>
-        </p:txBody>
-      </p:sp>
-      <p:sp>
-        <p:nvSpPr>
-          <p:cNvPr id="23" name="Rectangle 22"/>
-          <p:cNvSpPr/>
-          <p:nvPr/>
-        </p:nvSpPr>
-        <p:spPr>
-          <a:xfrm>
-            <a:off x="13147966" y="6858991"/>
-            <a:ext cx="163577" cy="481913"/>
-          </a:xfrm>
-          <a:prstGeom prst="rect">
-            <a:avLst/>
-          </a:prstGeom>
-          <a:solidFill>
-            <a:srgbClr val="F8F5EF"/>
-          </a:solidFill>
-          <a:ln>
-            <a:noFill/>
-          </a:ln>
-        </p:spPr>
-        <p:style>
-          <a:lnRef idx="1">
-            <a:schemeClr val="accent1"/>
-          </a:lnRef>
-          <a:fillRef idx="3">
-            <a:schemeClr val="accent1"/>
-          </a:fillRef>
-          <a:effectRef idx="2">
-            <a:schemeClr val="accent1"/>
-          </a:effectRef>
-          <a:fontRef idx="minor">
-            <a:schemeClr val="lt1"/>
-          </a:fontRef>
-        </p:style>
-        <p:txBody>
-          <a:bodyPr rtlCol="0" anchor="ctr"/>
-          <a:lstStyle/>
-          <a:p>
-            <a:pPr algn="ctr"/>
-          </a:p>
-        </p:txBody>
-      </p:sp>
-      <p:sp>
-        <p:nvSpPr>
-          <p:cNvPr id="24" name="Rectangle 23"/>
-          <p:cNvSpPr/>
-          <p:nvPr/>
-        </p:nvSpPr>
-        <p:spPr>
-          <a:xfrm>
-            <a:off x="13590589" y="6858991"/>
-            <a:ext cx="163577" cy="481913"/>
-          </a:xfrm>
-          <a:prstGeom prst="rect">
-            <a:avLst/>
-          </a:prstGeom>
-          <a:solidFill>
-            <a:srgbClr val="F8F5EF"/>
-          </a:solidFill>
-          <a:ln>
-            <a:noFill/>
-          </a:ln>
-        </p:spPr>
-        <p:style>
-          <a:lnRef idx="1">
-            <a:schemeClr val="accent1"/>
-          </a:lnRef>
-          <a:fillRef idx="3">
-            <a:schemeClr val="accent1"/>
-          </a:fillRef>
-          <a:effectRef idx="2">
-            <a:schemeClr val="accent1"/>
-          </a:effectRef>
-          <a:fontRef idx="minor">
-            <a:schemeClr val="lt1"/>
-          </a:fontRef>
-        </p:style>
-        <p:txBody>
-          <a:bodyPr rtlCol="0" anchor="ctr"/>
-          <a:lstStyle/>
-          <a:p>
-            <a:pPr algn="ctr"/>
-          </a:p>
-        </p:txBody>
-      </p:sp>
-      <p:sp>
-        <p:nvSpPr>
-          <p:cNvPr id="25" name="Rectangle 24"/>
-          <p:cNvSpPr/>
-          <p:nvPr/>
-        </p:nvSpPr>
-        <p:spPr>
-          <a:xfrm>
-            <a:off x="14059814" y="3417570"/>
-            <a:ext cx="962223" cy="6110478"/>
-          </a:xfrm>
-          <a:prstGeom prst="rect">
-            <a:avLst/>
-          </a:prstGeom>
-          <a:solidFill>
-            <a:srgbClr val="C28E52"/>
-          </a:solidFill>
-          <a:ln>
-            <a:noFill/>
-          </a:ln>
-        </p:spPr>
-        <p:style>
-          <a:lnRef idx="1">
-            <a:schemeClr val="accent1"/>
-          </a:lnRef>
-          <a:fillRef idx="3">
-            <a:schemeClr val="accent1"/>
-          </a:fillRef>
-          <a:effectRef idx="2">
-            <a:schemeClr val="accent1"/>
-          </a:effectRef>
-          <a:fontRef idx="minor">
-            <a:schemeClr val="lt1"/>
-          </a:fontRef>
-        </p:style>
-        <p:txBody>
-          <a:bodyPr rtlCol="0" anchor="ctr"/>
-          <a:lstStyle/>
-          <a:p>
-            <a:pPr algn="ctr"/>
-          </a:p>
-        </p:txBody>
-      </p:sp>
-      <p:sp>
-        <p:nvSpPr>
-          <p:cNvPr id="26" name="Rectangle 25"/>
-          <p:cNvSpPr/>
-          <p:nvPr/>
-        </p:nvSpPr>
-        <p:spPr>
-          <a:xfrm>
-            <a:off x="14223392" y="4639665"/>
-            <a:ext cx="163577" cy="397181"/>
-          </a:xfrm>
-          <a:prstGeom prst="rect">
-            <a:avLst/>
-          </a:prstGeom>
-          <a:solidFill>
-            <a:srgbClr val="F8F5EF"/>
-          </a:solidFill>
-          <a:ln>
-            <a:noFill/>
-          </a:ln>
-        </p:spPr>
-        <p:style>
-          <a:lnRef idx="1">
-            <a:schemeClr val="accent1"/>
-          </a:lnRef>
-          <a:fillRef idx="3">
-            <a:schemeClr val="accent1"/>
-          </a:fillRef>
-          <a:effectRef idx="2">
-            <a:schemeClr val="accent1"/>
-          </a:effectRef>
-          <a:fontRef idx="minor">
-            <a:schemeClr val="lt1"/>
-          </a:fontRef>
-        </p:style>
-        <p:txBody>
-          <a:bodyPr rtlCol="0" anchor="ctr"/>
-          <a:lstStyle/>
-          <a:p>
-            <a:pPr algn="ctr"/>
-          </a:p>
-        </p:txBody>
-      </p:sp>
-      <p:sp>
-        <p:nvSpPr>
-          <p:cNvPr id="27" name="Rectangle 26"/>
-          <p:cNvSpPr/>
-          <p:nvPr/>
-        </p:nvSpPr>
-        <p:spPr>
-          <a:xfrm>
-            <a:off x="14666014" y="4639665"/>
-            <a:ext cx="163577" cy="397181"/>
-          </a:xfrm>
-          <a:prstGeom prst="rect">
-            <a:avLst/>
-          </a:prstGeom>
-          <a:solidFill>
-            <a:srgbClr val="F8F5EF"/>
-          </a:solidFill>
-          <a:ln>
-            <a:noFill/>
-          </a:ln>
-        </p:spPr>
-        <p:style>
-          <a:lnRef idx="1">
-            <a:schemeClr val="accent1"/>
-          </a:lnRef>
-          <a:fillRef idx="3">
-            <a:schemeClr val="accent1"/>
-          </a:fillRef>
-          <a:effectRef idx="2">
-            <a:schemeClr val="accent1"/>
-          </a:effectRef>
-          <a:fontRef idx="minor">
-            <a:schemeClr val="lt1"/>
-          </a:fontRef>
-        </p:style>
-        <p:txBody>
-          <a:bodyPr rtlCol="0" anchor="ctr"/>
-          <a:lstStyle/>
-          <a:p>
-            <a:pPr algn="ctr"/>
-          </a:p>
-        </p:txBody>
-      </p:sp>
-      <p:sp>
-        <p:nvSpPr>
-          <p:cNvPr id="28" name="Rectangle 27"/>
-          <p:cNvSpPr/>
-          <p:nvPr/>
-        </p:nvSpPr>
-        <p:spPr>
-          <a:xfrm>
-            <a:off x="14223392" y="5983970"/>
-            <a:ext cx="163577" cy="397181"/>
-          </a:xfrm>
-          <a:prstGeom prst="rect">
-            <a:avLst/>
-          </a:prstGeom>
-          <a:solidFill>
-            <a:srgbClr val="F8F5EF"/>
-          </a:solidFill>
-          <a:ln>
-            <a:noFill/>
-          </a:ln>
-        </p:spPr>
-        <p:style>
-          <a:lnRef idx="1">
-            <a:schemeClr val="accent1"/>
-          </a:lnRef>
-          <a:fillRef idx="3">
-            <a:schemeClr val="accent1"/>
-          </a:fillRef>
-          <a:effectRef idx="2">
-            <a:schemeClr val="accent1"/>
-          </a:effectRef>
-          <a:fontRef idx="minor">
-            <a:schemeClr val="lt1"/>
-          </a:fontRef>
-        </p:style>
-        <p:txBody>
-          <a:bodyPr rtlCol="0" anchor="ctr"/>
-          <a:lstStyle/>
-          <a:p>
-            <a:pPr algn="ctr"/>
-          </a:p>
-        </p:txBody>
-      </p:sp>
-      <p:sp>
-        <p:nvSpPr>
-          <p:cNvPr id="29" name="Rectangle 28"/>
-          <p:cNvSpPr/>
-          <p:nvPr/>
-        </p:nvSpPr>
-        <p:spPr>
-          <a:xfrm>
-            <a:off x="14666014" y="5983970"/>
-            <a:ext cx="163577" cy="397181"/>
-          </a:xfrm>
-          <a:prstGeom prst="rect">
-            <a:avLst/>
-          </a:prstGeom>
-          <a:solidFill>
-            <a:srgbClr val="F8F5EF"/>
-          </a:solidFill>
-          <a:ln>
-            <a:noFill/>
-          </a:ln>
-        </p:spPr>
-        <p:style>
-          <a:lnRef idx="1">
-            <a:schemeClr val="accent1"/>
-          </a:lnRef>
-          <a:fillRef idx="3">
-            <a:schemeClr val="accent1"/>
-          </a:fillRef>
-          <a:effectRef idx="2">
-            <a:schemeClr val="accent1"/>
-          </a:effectRef>
-          <a:fontRef idx="minor">
-            <a:schemeClr val="lt1"/>
-          </a:fontRef>
-        </p:style>
-        <p:txBody>
-          <a:bodyPr rtlCol="0" anchor="ctr"/>
-          <a:lstStyle/>
-          <a:p>
-            <a:pPr algn="ctr"/>
-          </a:p>
-        </p:txBody>
-      </p:sp>
-      <p:sp>
-        <p:nvSpPr>
-          <p:cNvPr id="30" name="Rectangle 29"/>
-          <p:cNvSpPr/>
-          <p:nvPr/>
-        </p:nvSpPr>
-        <p:spPr>
-          <a:xfrm>
-            <a:off x="14223392" y="7328275"/>
-            <a:ext cx="163577" cy="397181"/>
-          </a:xfrm>
-          <a:prstGeom prst="rect">
-            <a:avLst/>
-          </a:prstGeom>
-          <a:solidFill>
-            <a:srgbClr val="F8F5EF"/>
-          </a:solidFill>
-          <a:ln>
-            <a:noFill/>
-          </a:ln>
-        </p:spPr>
-        <p:style>
-          <a:lnRef idx="1">
-            <a:schemeClr val="accent1"/>
-          </a:lnRef>
-          <a:fillRef idx="3">
-            <a:schemeClr val="accent1"/>
-          </a:fillRef>
-          <a:effectRef idx="2">
-            <a:schemeClr val="accent1"/>
-          </a:effectRef>
-          <a:fontRef idx="minor">
-            <a:schemeClr val="lt1"/>
-          </a:fontRef>
-        </p:style>
-        <p:txBody>
-          <a:bodyPr rtlCol="0" anchor="ctr"/>
-          <a:lstStyle/>
-          <a:p>
-            <a:pPr algn="ctr"/>
-          </a:p>
-        </p:txBody>
-      </p:sp>
-      <p:sp>
-        <p:nvSpPr>
-          <p:cNvPr id="31" name="Rectangle 30"/>
-          <p:cNvSpPr/>
-          <p:nvPr/>
-        </p:nvSpPr>
-        <p:spPr>
-          <a:xfrm>
-            <a:off x="14666014" y="7328275"/>
-            <a:ext cx="163577" cy="397181"/>
-          </a:xfrm>
-          <a:prstGeom prst="rect">
-            <a:avLst/>
-          </a:prstGeom>
-          <a:solidFill>
-            <a:srgbClr val="F8F5EF"/>
-          </a:solidFill>
-          <a:ln>
-            <a:noFill/>
-          </a:ln>
-        </p:spPr>
-        <p:style>
-          <a:lnRef idx="1">
-            <a:schemeClr val="accent1"/>
-          </a:lnRef>
-          <a:fillRef idx="3">
-            <a:schemeClr val="accent1"/>
-          </a:fillRef>
-          <a:effectRef idx="2">
-            <a:schemeClr val="accent1"/>
-          </a:effectRef>
-          <a:fontRef idx="minor">
-            <a:schemeClr val="lt1"/>
-          </a:fontRef>
-        </p:style>
-        <p:txBody>
-          <a:bodyPr rtlCol="0" anchor="ctr"/>
-          <a:lstStyle/>
-          <a:p>
-            <a:pPr algn="ctr"/>
-          </a:p>
-        </p:txBody>
-      </p:sp>
-      <p:sp>
-        <p:nvSpPr>
-          <p:cNvPr id="32" name="Rectangle 31"/>
-          <p:cNvSpPr/>
-          <p:nvPr/>
-        </p:nvSpPr>
-        <p:spPr>
-          <a:xfrm>
-            <a:off x="15135240" y="1706636"/>
-            <a:ext cx="962223" cy="7821411"/>
-          </a:xfrm>
-          <a:prstGeom prst="rect">
-            <a:avLst/>
-          </a:prstGeom>
-          <a:solidFill>
-            <a:srgbClr val="317D74"/>
-          </a:solidFill>
-          <a:ln>
-            <a:noFill/>
-          </a:ln>
-        </p:spPr>
-        <p:style>
-          <a:lnRef idx="1">
-            <a:schemeClr val="accent1"/>
-          </a:lnRef>
-          <a:fillRef idx="3">
-            <a:schemeClr val="accent1"/>
-          </a:fillRef>
-          <a:effectRef idx="2">
-            <a:schemeClr val="accent1"/>
-          </a:effectRef>
-          <a:fontRef idx="minor">
-            <a:schemeClr val="lt1"/>
-          </a:fontRef>
-        </p:style>
-        <p:txBody>
-          <a:bodyPr rtlCol="0" anchor="ctr"/>
-          <a:lstStyle/>
-          <a:p>
-            <a:pPr algn="ctr"/>
-          </a:p>
-        </p:txBody>
-      </p:sp>
-      <p:sp>
-        <p:nvSpPr>
-          <p:cNvPr id="33" name="Rectangle 32"/>
-          <p:cNvSpPr/>
-          <p:nvPr/>
-        </p:nvSpPr>
-        <p:spPr>
-          <a:xfrm>
-            <a:off x="15298818" y="3270918"/>
-            <a:ext cx="163577" cy="508391"/>
-          </a:xfrm>
-          <a:prstGeom prst="rect">
-            <a:avLst/>
-          </a:prstGeom>
-          <a:solidFill>
-            <a:srgbClr val="F8F5EF"/>
-          </a:solidFill>
-          <a:ln>
-            <a:noFill/>
-          </a:ln>
-        </p:spPr>
-        <p:style>
-          <a:lnRef idx="1">
-            <a:schemeClr val="accent1"/>
-          </a:lnRef>
-          <a:fillRef idx="3">
-            <a:schemeClr val="accent1"/>
-          </a:fillRef>
-          <a:effectRef idx="2">
-            <a:schemeClr val="accent1"/>
-          </a:effectRef>
-          <a:fontRef idx="minor">
-            <a:schemeClr val="lt1"/>
-          </a:fontRef>
-        </p:style>
-        <p:txBody>
-          <a:bodyPr rtlCol="0" anchor="ctr"/>
-          <a:lstStyle/>
-          <a:p>
-            <a:pPr algn="ctr"/>
-          </a:p>
-        </p:txBody>
-      </p:sp>
-      <p:sp>
-        <p:nvSpPr>
-          <p:cNvPr id="34" name="Rectangle 33"/>
-          <p:cNvSpPr/>
-          <p:nvPr/>
-        </p:nvSpPr>
-        <p:spPr>
-          <a:xfrm>
-            <a:off x="15741440" y="3270918"/>
-            <a:ext cx="163577" cy="508391"/>
-          </a:xfrm>
-          <a:prstGeom prst="rect">
-            <a:avLst/>
-          </a:prstGeom>
-          <a:solidFill>
-            <a:srgbClr val="F8F5EF"/>
-          </a:solidFill>
-          <a:ln>
-            <a:noFill/>
-          </a:ln>
-        </p:spPr>
-        <p:style>
-          <a:lnRef idx="1">
-            <a:schemeClr val="accent1"/>
-          </a:lnRef>
-          <a:fillRef idx="3">
-            <a:schemeClr val="accent1"/>
-          </a:fillRef>
-          <a:effectRef idx="2">
-            <a:schemeClr val="accent1"/>
-          </a:effectRef>
-          <a:fontRef idx="minor">
-            <a:schemeClr val="lt1"/>
-          </a:fontRef>
-        </p:style>
-        <p:txBody>
-          <a:bodyPr rtlCol="0" anchor="ctr"/>
-          <a:lstStyle/>
-          <a:p>
-            <a:pPr algn="ctr"/>
-          </a:p>
-        </p:txBody>
-      </p:sp>
-      <p:sp>
-        <p:nvSpPr>
-          <p:cNvPr id="35" name="Rectangle 34"/>
-          <p:cNvSpPr/>
-          <p:nvPr/>
-        </p:nvSpPr>
-        <p:spPr>
-          <a:xfrm>
-            <a:off x="15298818" y="4991629"/>
-            <a:ext cx="163577" cy="508391"/>
-          </a:xfrm>
-          <a:prstGeom prst="rect">
-            <a:avLst/>
-          </a:prstGeom>
-          <a:solidFill>
-            <a:srgbClr val="F8F5EF"/>
-          </a:solidFill>
-          <a:ln>
-            <a:noFill/>
-          </a:ln>
-        </p:spPr>
-        <p:style>
-          <a:lnRef idx="1">
-            <a:schemeClr val="accent1"/>
-          </a:lnRef>
-          <a:fillRef idx="3">
-            <a:schemeClr val="accent1"/>
-          </a:fillRef>
-          <a:effectRef idx="2">
-            <a:schemeClr val="accent1"/>
-          </a:effectRef>
-          <a:fontRef idx="minor">
-            <a:schemeClr val="lt1"/>
-          </a:fontRef>
-        </p:style>
-        <p:txBody>
-          <a:bodyPr rtlCol="0" anchor="ctr"/>
-          <a:lstStyle/>
-          <a:p>
-            <a:pPr algn="ctr"/>
-          </a:p>
-        </p:txBody>
-      </p:sp>
-      <p:sp>
-        <p:nvSpPr>
-          <p:cNvPr id="36" name="Rectangle 35"/>
-          <p:cNvSpPr/>
-          <p:nvPr/>
-        </p:nvSpPr>
-        <p:spPr>
-          <a:xfrm>
-            <a:off x="15741440" y="4991629"/>
-            <a:ext cx="163577" cy="508391"/>
-          </a:xfrm>
-          <a:prstGeom prst="rect">
-            <a:avLst/>
-          </a:prstGeom>
-          <a:solidFill>
-            <a:srgbClr val="F8F5EF"/>
-          </a:solidFill>
-          <a:ln>
-            <a:noFill/>
-          </a:ln>
-        </p:spPr>
-        <p:style>
-          <a:lnRef idx="1">
-            <a:schemeClr val="accent1"/>
-          </a:lnRef>
-          <a:fillRef idx="3">
-            <a:schemeClr val="accent1"/>
-          </a:fillRef>
-          <a:effectRef idx="2">
-            <a:schemeClr val="accent1"/>
-          </a:effectRef>
-          <a:fontRef idx="minor">
-            <a:schemeClr val="lt1"/>
-          </a:fontRef>
-        </p:style>
-        <p:txBody>
-          <a:bodyPr rtlCol="0" anchor="ctr"/>
-          <a:lstStyle/>
-          <a:p>
-            <a:pPr algn="ctr"/>
-          </a:p>
-        </p:txBody>
-      </p:sp>
-      <p:sp>
-        <p:nvSpPr>
-          <p:cNvPr id="37" name="Rectangle 36"/>
-          <p:cNvSpPr/>
-          <p:nvPr/>
-        </p:nvSpPr>
-        <p:spPr>
-          <a:xfrm>
-            <a:off x="15298818" y="6712339"/>
-            <a:ext cx="163577" cy="508391"/>
-          </a:xfrm>
-          <a:prstGeom prst="rect">
-            <a:avLst/>
-          </a:prstGeom>
-          <a:solidFill>
-            <a:srgbClr val="F8F5EF"/>
-          </a:solidFill>
-          <a:ln>
-            <a:noFill/>
-          </a:ln>
-        </p:spPr>
-        <p:style>
-          <a:lnRef idx="1">
-            <a:schemeClr val="accent1"/>
-          </a:lnRef>
-          <a:fillRef idx="3">
-            <a:schemeClr val="accent1"/>
-          </a:fillRef>
-          <a:effectRef idx="2">
-            <a:schemeClr val="accent1"/>
-          </a:effectRef>
-          <a:fontRef idx="minor">
-            <a:schemeClr val="lt1"/>
-          </a:fontRef>
-        </p:style>
-        <p:txBody>
-          <a:bodyPr rtlCol="0" anchor="ctr"/>
-          <a:lstStyle/>
-          <a:p>
-            <a:pPr algn="ctr"/>
-          </a:p>
-        </p:txBody>
-      </p:sp>
-      <p:sp>
-        <p:nvSpPr>
-          <p:cNvPr id="38" name="Rectangle 37"/>
-          <p:cNvSpPr/>
-          <p:nvPr/>
-        </p:nvSpPr>
-        <p:spPr>
-          <a:xfrm>
-            <a:off x="15741440" y="6712339"/>
-            <a:ext cx="163577" cy="508391"/>
-          </a:xfrm>
-          <a:prstGeom prst="rect">
-            <a:avLst/>
-          </a:prstGeom>
-          <a:solidFill>
-            <a:srgbClr val="F8F5EF"/>
-          </a:solidFill>
-          <a:ln>
-            <a:noFill/>
-          </a:ln>
-        </p:spPr>
-        <p:style>
-          <a:lnRef idx="1">
-            <a:schemeClr val="accent1"/>
-          </a:lnRef>
-          <a:fillRef idx="3">
-            <a:schemeClr val="accent1"/>
-          </a:fillRef>
-          <a:effectRef idx="2">
-            <a:schemeClr val="accent1"/>
-          </a:effectRef>
-          <a:fontRef idx="minor">
-            <a:schemeClr val="lt1"/>
-          </a:fontRef>
-        </p:style>
-        <p:txBody>
-          <a:bodyPr rtlCol="0" anchor="ctr"/>
-          <a:lstStyle/>
-          <a:p>
-            <a:pPr algn="ctr"/>
-          </a:p>
-        </p:txBody>
-      </p:sp>
-      <p:sp>
-        <p:nvSpPr>
-          <p:cNvPr id="39" name="Rectangle 38"/>
-          <p:cNvSpPr/>
-          <p:nvPr/>
-        </p:nvSpPr>
-        <p:spPr>
-          <a:xfrm>
-            <a:off x="16267267" y="4069354"/>
-            <a:ext cx="962223" cy="5458693"/>
-          </a:xfrm>
-          <a:prstGeom prst="rect">
-            <a:avLst/>
-          </a:prstGeom>
-          <a:solidFill>
-            <a:srgbClr val="276D61"/>
-          </a:solidFill>
-          <a:ln>
-            <a:noFill/>
-          </a:ln>
-        </p:spPr>
-        <p:style>
-          <a:lnRef idx="1">
-            <a:schemeClr val="accent1"/>
-          </a:lnRef>
-          <a:fillRef idx="3">
-            <a:schemeClr val="accent1"/>
-          </a:fillRef>
-          <a:effectRef idx="2">
-            <a:schemeClr val="accent1"/>
-          </a:effectRef>
-          <a:fontRef idx="minor">
-            <a:schemeClr val="lt1"/>
-          </a:fontRef>
-        </p:style>
-        <p:txBody>
-          <a:bodyPr rtlCol="0" anchor="ctr"/>
-          <a:lstStyle/>
-          <a:p>
-            <a:pPr algn="ctr"/>
-          </a:p>
-        </p:txBody>
-      </p:sp>
-      <p:sp>
-        <p:nvSpPr>
-          <p:cNvPr id="40" name="Rectangle 39"/>
-          <p:cNvSpPr/>
-          <p:nvPr/>
-        </p:nvSpPr>
-        <p:spPr>
-          <a:xfrm>
-            <a:off x="16430845" y="5161093"/>
-            <a:ext cx="163577" cy="354815"/>
-          </a:xfrm>
-          <a:prstGeom prst="rect">
-            <a:avLst/>
-          </a:prstGeom>
-          <a:solidFill>
-            <a:srgbClr val="F8F5EF"/>
-          </a:solidFill>
-          <a:ln>
-            <a:noFill/>
-          </a:ln>
-        </p:spPr>
-        <p:style>
-          <a:lnRef idx="1">
-            <a:schemeClr val="accent1"/>
-          </a:lnRef>
-          <a:fillRef idx="3">
-            <a:schemeClr val="accent1"/>
-          </a:fillRef>
-          <a:effectRef idx="2">
-            <a:schemeClr val="accent1"/>
-          </a:effectRef>
-          <a:fontRef idx="minor">
-            <a:schemeClr val="lt1"/>
-          </a:fontRef>
-        </p:style>
-        <p:txBody>
-          <a:bodyPr rtlCol="0" anchor="ctr"/>
-          <a:lstStyle/>
-          <a:p>
-            <a:pPr algn="ctr"/>
-          </a:p>
-        </p:txBody>
-      </p:sp>
-      <p:sp>
-        <p:nvSpPr>
-          <p:cNvPr id="41" name="Rectangle 40"/>
-          <p:cNvSpPr/>
-          <p:nvPr/>
-        </p:nvSpPr>
-        <p:spPr>
-          <a:xfrm>
-            <a:off x="16873468" y="5161093"/>
-            <a:ext cx="163577" cy="354815"/>
-          </a:xfrm>
-          <a:prstGeom prst="rect">
-            <a:avLst/>
-          </a:prstGeom>
-          <a:solidFill>
-            <a:srgbClr val="F8F5EF"/>
-          </a:solidFill>
-          <a:ln>
-            <a:noFill/>
-          </a:ln>
-        </p:spPr>
-        <p:style>
-          <a:lnRef idx="1">
-            <a:schemeClr val="accent1"/>
-          </a:lnRef>
-          <a:fillRef idx="3">
-            <a:schemeClr val="accent1"/>
-          </a:fillRef>
-          <a:effectRef idx="2">
-            <a:schemeClr val="accent1"/>
-          </a:effectRef>
-          <a:fontRef idx="minor">
-            <a:schemeClr val="lt1"/>
-          </a:fontRef>
-        </p:style>
-        <p:txBody>
-          <a:bodyPr rtlCol="0" anchor="ctr"/>
-          <a:lstStyle/>
-          <a:p>
-            <a:pPr algn="ctr"/>
-          </a:p>
-        </p:txBody>
-      </p:sp>
-      <p:sp>
-        <p:nvSpPr>
-          <p:cNvPr id="42" name="Rectangle 41"/>
-          <p:cNvSpPr/>
-          <p:nvPr/>
-        </p:nvSpPr>
-        <p:spPr>
-          <a:xfrm>
-            <a:off x="16430845" y="6362005"/>
-            <a:ext cx="163577" cy="354815"/>
-          </a:xfrm>
-          <a:prstGeom prst="rect">
-            <a:avLst/>
-          </a:prstGeom>
-          <a:solidFill>
-            <a:srgbClr val="F8F5EF"/>
-          </a:solidFill>
-          <a:ln>
-            <a:noFill/>
-          </a:ln>
-        </p:spPr>
-        <p:style>
-          <a:lnRef idx="1">
-            <a:schemeClr val="accent1"/>
-          </a:lnRef>
-          <a:fillRef idx="3">
-            <a:schemeClr val="accent1"/>
-          </a:fillRef>
-          <a:effectRef idx="2">
-            <a:schemeClr val="accent1"/>
-          </a:effectRef>
-          <a:fontRef idx="minor">
-            <a:schemeClr val="lt1"/>
-          </a:fontRef>
-        </p:style>
-        <p:txBody>
-          <a:bodyPr rtlCol="0" anchor="ctr"/>
-          <a:lstStyle/>
-          <a:p>
-            <a:pPr algn="ctr"/>
-          </a:p>
-        </p:txBody>
-      </p:sp>
-      <p:sp>
-        <p:nvSpPr>
-          <p:cNvPr id="43" name="Rectangle 42"/>
-          <p:cNvSpPr/>
-          <p:nvPr/>
-        </p:nvSpPr>
-        <p:spPr>
-          <a:xfrm>
-            <a:off x="16873468" y="6362005"/>
-            <a:ext cx="163577" cy="354815"/>
-          </a:xfrm>
-          <a:prstGeom prst="rect">
-            <a:avLst/>
-          </a:prstGeom>
-          <a:solidFill>
-            <a:srgbClr val="F8F5EF"/>
-          </a:solidFill>
-          <a:ln>
-            <a:noFill/>
-          </a:ln>
-        </p:spPr>
-        <p:style>
-          <a:lnRef idx="1">
-            <a:schemeClr val="accent1"/>
-          </a:lnRef>
-          <a:fillRef idx="3">
-            <a:schemeClr val="accent1"/>
-          </a:fillRef>
-          <a:effectRef idx="2">
-            <a:schemeClr val="accent1"/>
-          </a:effectRef>
-          <a:fontRef idx="minor">
-            <a:schemeClr val="lt1"/>
-          </a:fontRef>
-        </p:style>
-        <p:txBody>
-          <a:bodyPr rtlCol="0" anchor="ctr"/>
-          <a:lstStyle/>
-          <a:p>
-            <a:pPr algn="ctr"/>
-          </a:p>
-        </p:txBody>
-      </p:sp>
-      <p:sp>
-        <p:nvSpPr>
-          <p:cNvPr id="44" name="Rectangle 43"/>
-          <p:cNvSpPr/>
-          <p:nvPr/>
-        </p:nvSpPr>
-        <p:spPr>
-          <a:xfrm>
-            <a:off x="16430845" y="7562918"/>
-            <a:ext cx="163577" cy="354815"/>
-          </a:xfrm>
-          <a:prstGeom prst="rect">
-            <a:avLst/>
-          </a:prstGeom>
-          <a:solidFill>
-            <a:srgbClr val="F8F5EF"/>
-          </a:solidFill>
-          <a:ln>
-            <a:noFill/>
-          </a:ln>
-        </p:spPr>
-        <p:style>
-          <a:lnRef idx="1">
-            <a:schemeClr val="accent1"/>
-          </a:lnRef>
-          <a:fillRef idx="3">
-            <a:schemeClr val="accent1"/>
-          </a:fillRef>
-          <a:effectRef idx="2">
-            <a:schemeClr val="accent1"/>
-          </a:effectRef>
-          <a:fontRef idx="minor">
-            <a:schemeClr val="lt1"/>
-          </a:fontRef>
-        </p:style>
-        <p:txBody>
-          <a:bodyPr rtlCol="0" anchor="ctr"/>
-          <a:lstStyle/>
-          <a:p>
-            <a:pPr algn="ctr"/>
-          </a:p>
-        </p:txBody>
-      </p:sp>
-      <p:sp>
-        <p:nvSpPr>
-          <p:cNvPr id="45" name="Rectangle 44"/>
-          <p:cNvSpPr/>
-          <p:nvPr/>
-        </p:nvSpPr>
-        <p:spPr>
-          <a:xfrm>
-            <a:off x="16873468" y="7562918"/>
-            <a:ext cx="163577" cy="354815"/>
-          </a:xfrm>
-          <a:prstGeom prst="rect">
-            <a:avLst/>
-          </a:prstGeom>
-          <a:solidFill>
-            <a:srgbClr val="F8F5EF"/>
-          </a:solidFill>
-          <a:ln>
-            <a:noFill/>
-          </a:ln>
-        </p:spPr>
-        <p:style>
-          <a:lnRef idx="1">
-            <a:schemeClr val="accent1"/>
-          </a:lnRef>
-          <a:fillRef idx="3">
-            <a:schemeClr val="accent1"/>
-          </a:fillRef>
-          <a:effectRef idx="2">
-            <a:schemeClr val="accent1"/>
-          </a:effectRef>
-          <a:fontRef idx="minor">
-            <a:schemeClr val="lt1"/>
-          </a:fontRef>
-        </p:style>
-        <p:txBody>
-          <a:bodyPr rtlCol="0" anchor="ctr"/>
-          <a:lstStyle/>
-          <a:p>
-            <a:pPr algn="ctr"/>
-          </a:p>
-        </p:txBody>
-      </p:sp>
-      <p:sp>
-        <p:nvSpPr>
-          <p:cNvPr id="46" name="Rectangle 45"/>
-          <p:cNvSpPr/>
-          <p:nvPr/>
-        </p:nvSpPr>
-        <p:spPr>
-          <a:xfrm>
-            <a:off x="11795760" y="9039209"/>
-            <a:ext cx="5660136" cy="488838"/>
-          </a:xfrm>
-          <a:prstGeom prst="rect">
-            <a:avLst/>
-          </a:prstGeom>
-          <a:solidFill>
-            <a:srgbClr val="125449"/>
-          </a:solidFill>
-          <a:ln>
-            <a:noFill/>
-          </a:ln>
-        </p:spPr>
-        <p:style>
-          <a:lnRef idx="1">
-            <a:schemeClr val="accent1"/>
-          </a:lnRef>
-          <a:fillRef idx="3">
-            <a:schemeClr val="accent1"/>
-          </a:fillRef>
-          <a:effectRef idx="2">
-            <a:schemeClr val="accent1"/>
-          </a:effectRef>
-          <a:fontRef idx="minor">
-            <a:schemeClr val="lt1"/>
-          </a:fontRef>
-        </p:style>
-        <p:txBody>
-          <a:bodyPr rtlCol="0" anchor="ctr"/>
-          <a:lstStyle/>
-          <a:p>
-            <a:pPr algn="ctr"/>
-          </a:p>
-        </p:txBody>
-      </p:sp>
-      <p:sp>
-        <p:nvSpPr>
-          <p:cNvPr id="47" name="TextBox 46"/>
+          <a:prstGeom prst="rect">
+            <a:avLst/>
+          </a:prstGeom>
+        </p:spPr>
+      </p:pic>
+      <p:sp>
+        <p:nvSpPr>
+          <p:cNvPr id="11" name="TextBox 10"/>
           <p:cNvSpPr txBox="1"/>
           <p:nvPr/>
         </p:nvSpPr>
@@ -9023,7 +7454,7 @@
       </p:sp>
       <p:sp>
         <p:nvSpPr>
-          <p:cNvPr id="48" name="TextBox 47"/>
+          <p:cNvPr id="12" name="TextBox 11"/>
           <p:cNvSpPr txBox="1"/>
           <p:nvPr/>
         </p:nvSpPr>
@@ -9072,7 +7503,7 @@
       </p:sp>
       <p:sp>
         <p:nvSpPr>
-          <p:cNvPr id="49" name="TextBox 48"/>
+          <p:cNvPr id="13" name="TextBox 12"/>
           <p:cNvSpPr txBox="1"/>
           <p:nvPr/>
         </p:nvSpPr>
@@ -14730,16 +13161,40 @@
           </a:p>
         </p:txBody>
       </p:sp>
-      <p:sp>
-        <p:nvSpPr>
-          <p:cNvPr id="9" name="Rounded Rectangle 8"/>
-          <p:cNvSpPr/>
-          <p:nvPr/>
-        </p:nvSpPr>
+      <p:pic>
+        <p:nvPicPr>
+          <p:cNvPr id="9" name="Picture 8" descr="image.jpg"/>
+          <p:cNvPicPr>
+            <a:picLocks noChangeAspect="1"/>
+          </p:cNvPicPr>
+          <p:nvPr/>
+        </p:nvPicPr>
+        <p:blipFill>
+          <a:blip r:embed="rId2"/>
+          <a:stretch>
+            <a:fillRect/>
+          </a:stretch>
+        </p:blipFill>
         <p:spPr>
           <a:xfrm>
             <a:off x="722376" y="2862072"/>
             <a:ext cx="7607808" cy="6345936"/>
+          </a:xfrm>
+          <a:prstGeom prst="rect">
+            <a:avLst/>
+          </a:prstGeom>
+        </p:spPr>
+      </p:pic>
+      <p:sp>
+        <p:nvSpPr>
+          <p:cNvPr id="10" name="Rounded Rectangle 9"/>
+          <p:cNvSpPr/>
+          <p:nvPr/>
+        </p:nvSpPr>
+        <p:spPr>
+          <a:xfrm>
+            <a:off x="8695944" y="2862072"/>
+            <a:ext cx="8851392" cy="6345936"/>
           </a:xfrm>
           <a:prstGeom prst="roundRect">
             <a:avLst>
@@ -14777,318 +13232,19 @@
       </p:sp>
       <p:sp>
         <p:nvSpPr>
-          <p:cNvPr id="10" name="Rectangle 9"/>
+          <p:cNvPr id="11" name="Rounded Rectangle 10"/>
           <p:cNvSpPr/>
           <p:nvPr/>
         </p:nvSpPr>
         <p:spPr>
           <a:xfrm>
-            <a:off x="1026688" y="5146608"/>
-            <a:ext cx="1293327" cy="4061399"/>
-          </a:xfrm>
-          <a:prstGeom prst="rect">
-            <a:avLst/>
-          </a:prstGeom>
-          <a:solidFill>
-            <a:srgbClr val="8DAE9D"/>
-          </a:solidFill>
-          <a:ln>
-            <a:noFill/>
-          </a:ln>
-        </p:spPr>
-        <p:style>
-          <a:lnRef idx="1">
-            <a:schemeClr val="accent1"/>
-          </a:lnRef>
-          <a:fillRef idx="3">
-            <a:schemeClr val="accent1"/>
-          </a:fillRef>
-          <a:effectRef idx="2">
-            <a:schemeClr val="accent1"/>
-          </a:effectRef>
-          <a:fontRef idx="minor">
-            <a:schemeClr val="lt1"/>
-          </a:fontRef>
-        </p:style>
-        <p:txBody>
-          <a:bodyPr rtlCol="0" anchor="ctr"/>
-          <a:lstStyle/>
-          <a:p>
-            <a:pPr algn="ctr"/>
-          </a:p>
-        </p:txBody>
-      </p:sp>
-      <p:sp>
-        <p:nvSpPr>
-          <p:cNvPr id="11" name="Rectangle 10"/>
-          <p:cNvSpPr/>
-          <p:nvPr/>
-        </p:nvSpPr>
-        <p:spPr>
-          <a:xfrm>
-            <a:off x="1246553" y="5958888"/>
-            <a:ext cx="219865" cy="263990"/>
-          </a:xfrm>
-          <a:prstGeom prst="rect">
-            <a:avLst/>
-          </a:prstGeom>
-          <a:solidFill>
-            <a:srgbClr val="F8F5EF"/>
-          </a:solidFill>
-          <a:ln>
-            <a:noFill/>
-          </a:ln>
-        </p:spPr>
-        <p:style>
-          <a:lnRef idx="1">
-            <a:schemeClr val="accent1"/>
-          </a:lnRef>
-          <a:fillRef idx="3">
-            <a:schemeClr val="accent1"/>
-          </a:fillRef>
-          <a:effectRef idx="2">
-            <a:schemeClr val="accent1"/>
-          </a:effectRef>
-          <a:fontRef idx="minor">
-            <a:schemeClr val="lt1"/>
-          </a:fontRef>
-        </p:style>
-        <p:txBody>
-          <a:bodyPr rtlCol="0" anchor="ctr"/>
-          <a:lstStyle/>
-          <a:p>
-            <a:pPr algn="ctr"/>
-          </a:p>
-        </p:txBody>
-      </p:sp>
-      <p:sp>
-        <p:nvSpPr>
-          <p:cNvPr id="12" name="Rectangle 11"/>
-          <p:cNvSpPr/>
-          <p:nvPr/>
-        </p:nvSpPr>
-        <p:spPr>
-          <a:xfrm>
-            <a:off x="1841484" y="5958888"/>
-            <a:ext cx="219865" cy="263990"/>
-          </a:xfrm>
-          <a:prstGeom prst="rect">
-            <a:avLst/>
-          </a:prstGeom>
-          <a:solidFill>
-            <a:srgbClr val="F8F5EF"/>
-          </a:solidFill>
-          <a:ln>
-            <a:noFill/>
-          </a:ln>
-        </p:spPr>
-        <p:style>
-          <a:lnRef idx="1">
-            <a:schemeClr val="accent1"/>
-          </a:lnRef>
-          <a:fillRef idx="3">
-            <a:schemeClr val="accent1"/>
-          </a:fillRef>
-          <a:effectRef idx="2">
-            <a:schemeClr val="accent1"/>
-          </a:effectRef>
-          <a:fontRef idx="minor">
-            <a:schemeClr val="lt1"/>
-          </a:fontRef>
-        </p:style>
-        <p:txBody>
-          <a:bodyPr rtlCol="0" anchor="ctr"/>
-          <a:lstStyle/>
-          <a:p>
-            <a:pPr algn="ctr"/>
-          </a:p>
-        </p:txBody>
-      </p:sp>
-      <p:sp>
-        <p:nvSpPr>
-          <p:cNvPr id="13" name="Rectangle 12"/>
-          <p:cNvSpPr/>
-          <p:nvPr/>
-        </p:nvSpPr>
-        <p:spPr>
-          <a:xfrm>
-            <a:off x="1246553" y="6852396"/>
-            <a:ext cx="219865" cy="263990"/>
-          </a:xfrm>
-          <a:prstGeom prst="rect">
-            <a:avLst/>
-          </a:prstGeom>
-          <a:solidFill>
-            <a:srgbClr val="F8F5EF"/>
-          </a:solidFill>
-          <a:ln>
-            <a:noFill/>
-          </a:ln>
-        </p:spPr>
-        <p:style>
-          <a:lnRef idx="1">
-            <a:schemeClr val="accent1"/>
-          </a:lnRef>
-          <a:fillRef idx="3">
-            <a:schemeClr val="accent1"/>
-          </a:fillRef>
-          <a:effectRef idx="2">
-            <a:schemeClr val="accent1"/>
-          </a:effectRef>
-          <a:fontRef idx="minor">
-            <a:schemeClr val="lt1"/>
-          </a:fontRef>
-        </p:style>
-        <p:txBody>
-          <a:bodyPr rtlCol="0" anchor="ctr"/>
-          <a:lstStyle/>
-          <a:p>
-            <a:pPr algn="ctr"/>
-          </a:p>
-        </p:txBody>
-      </p:sp>
-      <p:sp>
-        <p:nvSpPr>
-          <p:cNvPr id="14" name="Rectangle 13"/>
-          <p:cNvSpPr/>
-          <p:nvPr/>
-        </p:nvSpPr>
-        <p:spPr>
-          <a:xfrm>
-            <a:off x="1841484" y="6852396"/>
-            <a:ext cx="219865" cy="263990"/>
-          </a:xfrm>
-          <a:prstGeom prst="rect">
-            <a:avLst/>
-          </a:prstGeom>
-          <a:solidFill>
-            <a:srgbClr val="F8F5EF"/>
-          </a:solidFill>
-          <a:ln>
-            <a:noFill/>
-          </a:ln>
-        </p:spPr>
-        <p:style>
-          <a:lnRef idx="1">
-            <a:schemeClr val="accent1"/>
-          </a:lnRef>
-          <a:fillRef idx="3">
-            <a:schemeClr val="accent1"/>
-          </a:fillRef>
-          <a:effectRef idx="2">
-            <a:schemeClr val="accent1"/>
-          </a:effectRef>
-          <a:fontRef idx="minor">
-            <a:schemeClr val="lt1"/>
-          </a:fontRef>
-        </p:style>
-        <p:txBody>
-          <a:bodyPr rtlCol="0" anchor="ctr"/>
-          <a:lstStyle/>
-          <a:p>
-            <a:pPr algn="ctr"/>
-          </a:p>
-        </p:txBody>
-      </p:sp>
-      <p:sp>
-        <p:nvSpPr>
-          <p:cNvPr id="15" name="Rectangle 14"/>
-          <p:cNvSpPr/>
-          <p:nvPr/>
-        </p:nvSpPr>
-        <p:spPr>
-          <a:xfrm>
-            <a:off x="1246553" y="7745904"/>
-            <a:ext cx="219865" cy="263990"/>
-          </a:xfrm>
-          <a:prstGeom prst="rect">
-            <a:avLst/>
-          </a:prstGeom>
-          <a:solidFill>
-            <a:srgbClr val="F8F5EF"/>
-          </a:solidFill>
-          <a:ln>
-            <a:noFill/>
-          </a:ln>
-        </p:spPr>
-        <p:style>
-          <a:lnRef idx="1">
-            <a:schemeClr val="accent1"/>
-          </a:lnRef>
-          <a:fillRef idx="3">
-            <a:schemeClr val="accent1"/>
-          </a:fillRef>
-          <a:effectRef idx="2">
-            <a:schemeClr val="accent1"/>
-          </a:effectRef>
-          <a:fontRef idx="minor">
-            <a:schemeClr val="lt1"/>
-          </a:fontRef>
-        </p:style>
-        <p:txBody>
-          <a:bodyPr rtlCol="0" anchor="ctr"/>
-          <a:lstStyle/>
-          <a:p>
-            <a:pPr algn="ctr"/>
-          </a:p>
-        </p:txBody>
-      </p:sp>
-      <p:sp>
-        <p:nvSpPr>
-          <p:cNvPr id="16" name="Rectangle 15"/>
-          <p:cNvSpPr/>
-          <p:nvPr/>
-        </p:nvSpPr>
-        <p:spPr>
-          <a:xfrm>
-            <a:off x="1841484" y="7745904"/>
-            <a:ext cx="219865" cy="263990"/>
-          </a:xfrm>
-          <a:prstGeom prst="rect">
-            <a:avLst/>
-          </a:prstGeom>
-          <a:solidFill>
-            <a:srgbClr val="F8F5EF"/>
-          </a:solidFill>
-          <a:ln>
-            <a:noFill/>
-          </a:ln>
-        </p:spPr>
-        <p:style>
-          <a:lnRef idx="1">
-            <a:schemeClr val="accent1"/>
-          </a:lnRef>
-          <a:fillRef idx="3">
-            <a:schemeClr val="accent1"/>
-          </a:fillRef>
-          <a:effectRef idx="2">
-            <a:schemeClr val="accent1"/>
-          </a:effectRef>
-          <a:fontRef idx="minor">
-            <a:schemeClr val="lt1"/>
-          </a:fontRef>
-        </p:style>
-        <p:txBody>
-          <a:bodyPr rtlCol="0" anchor="ctr"/>
-          <a:lstStyle/>
-          <a:p>
-            <a:pPr algn="ctr"/>
-          </a:p>
-        </p:txBody>
-      </p:sp>
-      <p:sp>
-        <p:nvSpPr>
-          <p:cNvPr id="17" name="Rectangle 16"/>
-          <p:cNvSpPr/>
-          <p:nvPr/>
-        </p:nvSpPr>
-        <p:spPr>
-          <a:xfrm>
-            <a:off x="2320015" y="3433206"/>
-            <a:ext cx="1293327" cy="5774801"/>
-          </a:xfrm>
-          <a:prstGeom prst="rect">
-            <a:avLst/>
+            <a:off x="9171432" y="3328416"/>
+            <a:ext cx="658368" cy="658368"/>
+          </a:xfrm>
+          <a:prstGeom prst="roundRect">
+            <a:avLst>
+              <a:gd name="adj" fmla="val 7000"/>
+            </a:avLst>
           </a:prstGeom>
           <a:solidFill>
             <a:srgbClr val="125449"/>
@@ -15121,20 +13277,165 @@
       </p:sp>
       <p:sp>
         <p:nvSpPr>
-          <p:cNvPr id="18" name="Rectangle 17"/>
+          <p:cNvPr id="12" name="TextBox 11"/>
+          <p:cNvSpPr txBox="1"/>
+          <p:nvPr/>
+        </p:nvSpPr>
+        <p:spPr>
+          <a:xfrm>
+            <a:off x="9226296" y="3383280"/>
+            <a:ext cx="548640" cy="539496"/>
+          </a:xfrm>
+          <a:prstGeom prst="rect">
+            <a:avLst/>
+          </a:prstGeom>
+          <a:noFill/>
+        </p:spPr>
+        <p:txBody>
+          <a:bodyPr wrap="square" anchor="ctr" lIns="36576" rIns="36576" tIns="0" bIns="0">
+            <a:spAutoFit/>
+          </a:bodyPr>
+          <a:lstStyle/>
+          <a:p>
+            <a:pPr algn="ctr">
+              <a:defRPr sz="2000" b="1">
+                <a:solidFill>
+                  <a:srgbClr val="FFFFFF"/>
+                </a:solidFill>
+                <a:latin typeface="Lato"/>
+              </a:defRPr>
+            </a:pPr>
+            <a:r>
+              <a:t>01</a:t>
+            </a:r>
+          </a:p>
+        </p:txBody>
+      </p:sp>
+      <p:sp>
+        <p:nvSpPr>
+          <p:cNvPr id="13" name="TextBox 12"/>
+          <p:cNvSpPr txBox="1"/>
+          <p:nvPr/>
+        </p:nvSpPr>
+        <p:spPr>
+          <a:xfrm>
+            <a:off x="10030968" y="3300984"/>
+            <a:ext cx="6839712" cy="493776"/>
+          </a:xfrm>
+          <a:prstGeom prst="rect">
+            <a:avLst/>
+          </a:prstGeom>
+          <a:noFill/>
+        </p:spPr>
+        <p:txBody>
+          <a:bodyPr wrap="square" anchor="ctr" lIns="36576" rIns="36576" tIns="0" bIns="0">
+            <a:spAutoFit/>
+          </a:bodyPr>
+          <a:lstStyle/>
+          <a:p>
+            <a:pPr algn="l">
+              <a:defRPr sz="2500" b="1">
+                <a:solidFill>
+                  <a:srgbClr val="125449"/>
+                </a:solidFill>
+                <a:latin typeface="Lato"/>
+              </a:defRPr>
+            </a:pPr>
+            <a:r>
+              <a:t>Fund the promises</a:t>
+            </a:r>
+          </a:p>
+        </p:txBody>
+      </p:sp>
+      <p:sp>
+        <p:nvSpPr>
+          <p:cNvPr id="14" name="TextBox 13"/>
+          <p:cNvSpPr txBox="1"/>
+          <p:nvPr/>
+        </p:nvSpPr>
+        <p:spPr>
+          <a:xfrm>
+            <a:off x="10040112" y="3959352"/>
+            <a:ext cx="6867144" cy="594360"/>
+          </a:xfrm>
+          <a:prstGeom prst="rect">
+            <a:avLst/>
+          </a:prstGeom>
+          <a:noFill/>
+        </p:spPr>
+        <p:txBody>
+          <a:bodyPr wrap="square" anchor="ctr" lIns="36576" rIns="36576" tIns="0" bIns="0">
+            <a:spAutoFit/>
+          </a:bodyPr>
+          <a:lstStyle/>
+          <a:p>
+            <a:pPr algn="l">
+              <a:defRPr sz="1800" b="0">
+                <a:solidFill>
+                  <a:srgbClr val="2D4038"/>
+                </a:solidFill>
+                <a:latin typeface="Lato"/>
+              </a:defRPr>
+            </a:pPr>
+            <a:r>
+              <a:t>Principal-match every revised payment.</a:t>
+            </a:r>
+          </a:p>
+        </p:txBody>
+      </p:sp>
+      <p:cxnSp>
+        <p:nvCxnSpPr>
+          <p:cNvPr id="15" name="Connector 14"/>
+          <p:cNvCxnSpPr/>
+          <p:nvPr/>
+        </p:nvCxnSpPr>
+        <p:spPr>
+          <a:xfrm>
+            <a:off x="9162288" y="4672584"/>
+            <a:ext cx="7891272" cy="0"/>
+          </a:xfrm>
+          <a:prstGeom prst="line">
+            <a:avLst/>
+          </a:prstGeom>
+          <a:ln w="15240">
+            <a:solidFill>
+              <a:srgbClr val="D4DCD3"/>
+            </a:solidFill>
+          </a:ln>
+        </p:spPr>
+        <p:style>
+          <a:lnRef idx="2">
+            <a:schemeClr val="accent1"/>
+          </a:lnRef>
+          <a:fillRef idx="0">
+            <a:schemeClr val="accent1"/>
+          </a:fillRef>
+          <a:effectRef idx="1">
+            <a:schemeClr val="accent1"/>
+          </a:effectRef>
+          <a:fontRef idx="minor">
+            <a:schemeClr val="tx1"/>
+          </a:fontRef>
+        </p:style>
+      </p:cxnSp>
+      <p:sp>
+        <p:nvSpPr>
+          <p:cNvPr id="16" name="Rounded Rectangle 15"/>
           <p:cNvSpPr/>
           <p:nvPr/>
         </p:nvSpPr>
         <p:spPr>
           <a:xfrm>
-            <a:off x="2539881" y="4588166"/>
-            <a:ext cx="219865" cy="375362"/>
-          </a:xfrm>
-          <a:prstGeom prst="rect">
-            <a:avLst/>
+            <a:off x="9171432" y="5029200"/>
+            <a:ext cx="658368" cy="658368"/>
+          </a:xfrm>
+          <a:prstGeom prst="roundRect">
+            <a:avLst>
+              <a:gd name="adj" fmla="val 7000"/>
+            </a:avLst>
           </a:prstGeom>
           <a:solidFill>
-            <a:srgbClr val="F8F5EF"/>
+            <a:srgbClr val="125449"/>
           </a:solidFill>
           <a:ln>
             <a:noFill/>
@@ -15164,232 +13465,162 @@
       </p:sp>
       <p:sp>
         <p:nvSpPr>
-          <p:cNvPr id="19" name="Rectangle 18"/>
-          <p:cNvSpPr/>
-          <p:nvPr/>
-        </p:nvSpPr>
-        <p:spPr>
-          <a:xfrm>
-            <a:off x="3134811" y="4588166"/>
-            <a:ext cx="219865" cy="375362"/>
-          </a:xfrm>
-          <a:prstGeom prst="rect">
-            <a:avLst/>
-          </a:prstGeom>
-          <a:solidFill>
-            <a:srgbClr val="F8F5EF"/>
-          </a:solidFill>
-          <a:ln>
-            <a:noFill/>
+          <p:cNvPr id="17" name="TextBox 16"/>
+          <p:cNvSpPr txBox="1"/>
+          <p:nvPr/>
+        </p:nvSpPr>
+        <p:spPr>
+          <a:xfrm>
+            <a:off x="9226296" y="5084064"/>
+            <a:ext cx="548640" cy="539496"/>
+          </a:xfrm>
+          <a:prstGeom prst="rect">
+            <a:avLst/>
+          </a:prstGeom>
+          <a:noFill/>
+        </p:spPr>
+        <p:txBody>
+          <a:bodyPr wrap="square" anchor="ctr" lIns="36576" rIns="36576" tIns="0" bIns="0">
+            <a:spAutoFit/>
+          </a:bodyPr>
+          <a:lstStyle/>
+          <a:p>
+            <a:pPr algn="ctr">
+              <a:defRPr sz="2000" b="1">
+                <a:solidFill>
+                  <a:srgbClr val="FFFFFF"/>
+                </a:solidFill>
+                <a:latin typeface="Lato"/>
+              </a:defRPr>
+            </a:pPr>
+            <a:r>
+              <a:t>02</a:t>
+            </a:r>
+          </a:p>
+        </p:txBody>
+      </p:sp>
+      <p:sp>
+        <p:nvSpPr>
+          <p:cNvPr id="18" name="TextBox 17"/>
+          <p:cNvSpPr txBox="1"/>
+          <p:nvPr/>
+        </p:nvSpPr>
+        <p:spPr>
+          <a:xfrm>
+            <a:off x="10030968" y="5001768"/>
+            <a:ext cx="6839712" cy="493776"/>
+          </a:xfrm>
+          <a:prstGeom prst="rect">
+            <a:avLst/>
+          </a:prstGeom>
+          <a:noFill/>
+        </p:spPr>
+        <p:txBody>
+          <a:bodyPr wrap="square" anchor="ctr" lIns="36576" rIns="36576" tIns="0" bIns="0">
+            <a:spAutoFit/>
+          </a:bodyPr>
+          <a:lstStyle/>
+          <a:p>
+            <a:pPr algn="l">
+              <a:defRPr sz="2500" b="1">
+                <a:solidFill>
+                  <a:srgbClr val="125449"/>
+                </a:solidFill>
+                <a:latin typeface="Lato"/>
+              </a:defRPr>
+            </a:pPr>
+            <a:r>
+              <a:t>Keep the original equity choice</a:t>
+            </a:r>
+          </a:p>
+        </p:txBody>
+      </p:sp>
+      <p:sp>
+        <p:nvSpPr>
+          <p:cNvPr id="19" name="TextBox 18"/>
+          <p:cNvSpPr txBox="1"/>
+          <p:nvPr/>
+        </p:nvSpPr>
+        <p:spPr>
+          <a:xfrm>
+            <a:off x="10040112" y="5660136"/>
+            <a:ext cx="6867144" cy="594360"/>
+          </a:xfrm>
+          <a:prstGeom prst="rect">
+            <a:avLst/>
+          </a:prstGeom>
+          <a:noFill/>
+        </p:spPr>
+        <p:txBody>
+          <a:bodyPr wrap="square" anchor="ctr" lIns="36576" rIns="36576" tIns="0" bIns="0">
+            <a:spAutoFit/>
+          </a:bodyPr>
+          <a:lstStyle/>
+          <a:p>
+            <a:pPr algn="l">
+              <a:defRPr sz="1800" b="0">
+                <a:solidFill>
+                  <a:srgbClr val="2D4038"/>
+                </a:solidFill>
+                <a:latin typeface="Lato"/>
+              </a:defRPr>
+            </a:pPr>
+            <a:r>
+              <a:t>Retain Sample MV weights without hindsight.</a:t>
+            </a:r>
+          </a:p>
+        </p:txBody>
+      </p:sp>
+      <p:cxnSp>
+        <p:nvCxnSpPr>
+          <p:cNvPr id="20" name="Connector 19"/>
+          <p:cNvCxnSpPr/>
+          <p:nvPr/>
+        </p:nvCxnSpPr>
+        <p:spPr>
+          <a:xfrm>
+            <a:off x="9162288" y="6373368"/>
+            <a:ext cx="7891272" cy="0"/>
+          </a:xfrm>
+          <a:prstGeom prst="line">
+            <a:avLst/>
+          </a:prstGeom>
+          <a:ln w="15240">
+            <a:solidFill>
+              <a:srgbClr val="D4DCD3"/>
+            </a:solidFill>
           </a:ln>
         </p:spPr>
         <p:style>
-          <a:lnRef idx="1">
+          <a:lnRef idx="2">
             <a:schemeClr val="accent1"/>
           </a:lnRef>
-          <a:fillRef idx="3">
+          <a:fillRef idx="0">
             <a:schemeClr val="accent1"/>
           </a:fillRef>
-          <a:effectRef idx="2">
+          <a:effectRef idx="1">
             <a:schemeClr val="accent1"/>
           </a:effectRef>
           <a:fontRef idx="minor">
-            <a:schemeClr val="lt1"/>
+            <a:schemeClr val="tx1"/>
           </a:fontRef>
         </p:style>
-        <p:txBody>
-          <a:bodyPr rtlCol="0" anchor="ctr"/>
-          <a:lstStyle/>
-          <a:p>
-            <a:pPr algn="ctr"/>
-          </a:p>
-        </p:txBody>
-      </p:sp>
-      <p:sp>
-        <p:nvSpPr>
-          <p:cNvPr id="20" name="Rectangle 19"/>
+      </p:cxnSp>
+      <p:sp>
+        <p:nvSpPr>
+          <p:cNvPr id="21" name="Rounded Rectangle 20"/>
           <p:cNvSpPr/>
           <p:nvPr/>
         </p:nvSpPr>
         <p:spPr>
           <a:xfrm>
-            <a:off x="2539881" y="5858622"/>
-            <a:ext cx="219865" cy="375362"/>
-          </a:xfrm>
-          <a:prstGeom prst="rect">
-            <a:avLst/>
-          </a:prstGeom>
-          <a:solidFill>
-            <a:srgbClr val="F8F5EF"/>
-          </a:solidFill>
-          <a:ln>
-            <a:noFill/>
-          </a:ln>
-        </p:spPr>
-        <p:style>
-          <a:lnRef idx="1">
-            <a:schemeClr val="accent1"/>
-          </a:lnRef>
-          <a:fillRef idx="3">
-            <a:schemeClr val="accent1"/>
-          </a:fillRef>
-          <a:effectRef idx="2">
-            <a:schemeClr val="accent1"/>
-          </a:effectRef>
-          <a:fontRef idx="minor">
-            <a:schemeClr val="lt1"/>
-          </a:fontRef>
-        </p:style>
-        <p:txBody>
-          <a:bodyPr rtlCol="0" anchor="ctr"/>
-          <a:lstStyle/>
-          <a:p>
-            <a:pPr algn="ctr"/>
-          </a:p>
-        </p:txBody>
-      </p:sp>
-      <p:sp>
-        <p:nvSpPr>
-          <p:cNvPr id="21" name="Rectangle 20"/>
-          <p:cNvSpPr/>
-          <p:nvPr/>
-        </p:nvSpPr>
-        <p:spPr>
-          <a:xfrm>
-            <a:off x="3134811" y="5858622"/>
-            <a:ext cx="219865" cy="375362"/>
-          </a:xfrm>
-          <a:prstGeom prst="rect">
-            <a:avLst/>
-          </a:prstGeom>
-          <a:solidFill>
-            <a:srgbClr val="F8F5EF"/>
-          </a:solidFill>
-          <a:ln>
-            <a:noFill/>
-          </a:ln>
-        </p:spPr>
-        <p:style>
-          <a:lnRef idx="1">
-            <a:schemeClr val="accent1"/>
-          </a:lnRef>
-          <a:fillRef idx="3">
-            <a:schemeClr val="accent1"/>
-          </a:fillRef>
-          <a:effectRef idx="2">
-            <a:schemeClr val="accent1"/>
-          </a:effectRef>
-          <a:fontRef idx="minor">
-            <a:schemeClr val="lt1"/>
-          </a:fontRef>
-        </p:style>
-        <p:txBody>
-          <a:bodyPr rtlCol="0" anchor="ctr"/>
-          <a:lstStyle/>
-          <a:p>
-            <a:pPr algn="ctr"/>
-          </a:p>
-        </p:txBody>
-      </p:sp>
-      <p:sp>
-        <p:nvSpPr>
-          <p:cNvPr id="22" name="Rectangle 21"/>
-          <p:cNvSpPr/>
-          <p:nvPr/>
-        </p:nvSpPr>
-        <p:spPr>
-          <a:xfrm>
-            <a:off x="2539881" y="7129079"/>
-            <a:ext cx="219865" cy="375362"/>
-          </a:xfrm>
-          <a:prstGeom prst="rect">
-            <a:avLst/>
-          </a:prstGeom>
-          <a:solidFill>
-            <a:srgbClr val="F8F5EF"/>
-          </a:solidFill>
-          <a:ln>
-            <a:noFill/>
-          </a:ln>
-        </p:spPr>
-        <p:style>
-          <a:lnRef idx="1">
-            <a:schemeClr val="accent1"/>
-          </a:lnRef>
-          <a:fillRef idx="3">
-            <a:schemeClr val="accent1"/>
-          </a:fillRef>
-          <a:effectRef idx="2">
-            <a:schemeClr val="accent1"/>
-          </a:effectRef>
-          <a:fontRef idx="minor">
-            <a:schemeClr val="lt1"/>
-          </a:fontRef>
-        </p:style>
-        <p:txBody>
-          <a:bodyPr rtlCol="0" anchor="ctr"/>
-          <a:lstStyle/>
-          <a:p>
-            <a:pPr algn="ctr"/>
-          </a:p>
-        </p:txBody>
-      </p:sp>
-      <p:sp>
-        <p:nvSpPr>
-          <p:cNvPr id="23" name="Rectangle 22"/>
-          <p:cNvSpPr/>
-          <p:nvPr/>
-        </p:nvSpPr>
-        <p:spPr>
-          <a:xfrm>
-            <a:off x="3134811" y="7129079"/>
-            <a:ext cx="219865" cy="375362"/>
-          </a:xfrm>
-          <a:prstGeom prst="rect">
-            <a:avLst/>
-          </a:prstGeom>
-          <a:solidFill>
-            <a:srgbClr val="F8F5EF"/>
-          </a:solidFill>
-          <a:ln>
-            <a:noFill/>
-          </a:ln>
-        </p:spPr>
-        <p:style>
-          <a:lnRef idx="1">
-            <a:schemeClr val="accent1"/>
-          </a:lnRef>
-          <a:fillRef idx="3">
-            <a:schemeClr val="accent1"/>
-          </a:fillRef>
-          <a:effectRef idx="2">
-            <a:schemeClr val="accent1"/>
-          </a:effectRef>
-          <a:fontRef idx="minor">
-            <a:schemeClr val="lt1"/>
-          </a:fontRef>
-        </p:style>
-        <p:txBody>
-          <a:bodyPr rtlCol="0" anchor="ctr"/>
-          <a:lstStyle/>
-          <a:p>
-            <a:pPr algn="ctr"/>
-          </a:p>
-        </p:txBody>
-      </p:sp>
-      <p:sp>
-        <p:nvSpPr>
-          <p:cNvPr id="24" name="Rectangle 23"/>
-          <p:cNvSpPr/>
-          <p:nvPr/>
-        </p:nvSpPr>
-        <p:spPr>
-          <a:xfrm>
-            <a:off x="3765499" y="4448556"/>
-            <a:ext cx="1293327" cy="4759452"/>
-          </a:xfrm>
-          <a:prstGeom prst="rect">
-            <a:avLst/>
+            <a:off x="9171432" y="6729984"/>
+            <a:ext cx="658368" cy="658368"/>
+          </a:xfrm>
+          <a:prstGeom prst="roundRect">
+            <a:avLst>
+              <a:gd name="adj" fmla="val 7000"/>
+            </a:avLst>
           </a:prstGeom>
           <a:solidFill>
             <a:srgbClr val="C28E52"/>
@@ -15422,1006 +13653,13 @@
       </p:sp>
       <p:sp>
         <p:nvSpPr>
-          <p:cNvPr id="25" name="Rectangle 24"/>
-          <p:cNvSpPr/>
-          <p:nvPr/>
-        </p:nvSpPr>
-        <p:spPr>
-          <a:xfrm>
-            <a:off x="3985364" y="5400446"/>
-            <a:ext cx="219865" cy="309364"/>
-          </a:xfrm>
-          <a:prstGeom prst="rect">
-            <a:avLst/>
-          </a:prstGeom>
-          <a:solidFill>
-            <a:srgbClr val="F8F5EF"/>
-          </a:solidFill>
-          <a:ln>
-            <a:noFill/>
-          </a:ln>
-        </p:spPr>
-        <p:style>
-          <a:lnRef idx="1">
-            <a:schemeClr val="accent1"/>
-          </a:lnRef>
-          <a:fillRef idx="3">
-            <a:schemeClr val="accent1"/>
-          </a:fillRef>
-          <a:effectRef idx="2">
-            <a:schemeClr val="accent1"/>
-          </a:effectRef>
-          <a:fontRef idx="minor">
-            <a:schemeClr val="lt1"/>
-          </a:fontRef>
-        </p:style>
-        <p:txBody>
-          <a:bodyPr rtlCol="0" anchor="ctr"/>
-          <a:lstStyle/>
-          <a:p>
-            <a:pPr algn="ctr"/>
-          </a:p>
-        </p:txBody>
-      </p:sp>
-      <p:sp>
-        <p:nvSpPr>
-          <p:cNvPr id="26" name="Rectangle 25"/>
-          <p:cNvSpPr/>
-          <p:nvPr/>
-        </p:nvSpPr>
-        <p:spPr>
-          <a:xfrm>
-            <a:off x="4580295" y="5400446"/>
-            <a:ext cx="219865" cy="309364"/>
-          </a:xfrm>
-          <a:prstGeom prst="rect">
-            <a:avLst/>
-          </a:prstGeom>
-          <a:solidFill>
-            <a:srgbClr val="F8F5EF"/>
-          </a:solidFill>
-          <a:ln>
-            <a:noFill/>
-          </a:ln>
-        </p:spPr>
-        <p:style>
-          <a:lnRef idx="1">
-            <a:schemeClr val="accent1"/>
-          </a:lnRef>
-          <a:fillRef idx="3">
-            <a:schemeClr val="accent1"/>
-          </a:fillRef>
-          <a:effectRef idx="2">
-            <a:schemeClr val="accent1"/>
-          </a:effectRef>
-          <a:fontRef idx="minor">
-            <a:schemeClr val="lt1"/>
-          </a:fontRef>
-        </p:style>
-        <p:txBody>
-          <a:bodyPr rtlCol="0" anchor="ctr"/>
-          <a:lstStyle/>
-          <a:p>
-            <a:pPr algn="ctr"/>
-          </a:p>
-        </p:txBody>
-      </p:sp>
-      <p:sp>
-        <p:nvSpPr>
-          <p:cNvPr id="27" name="Rectangle 26"/>
-          <p:cNvSpPr/>
-          <p:nvPr/>
-        </p:nvSpPr>
-        <p:spPr>
-          <a:xfrm>
-            <a:off x="3985364" y="6447525"/>
-            <a:ext cx="219865" cy="309364"/>
-          </a:xfrm>
-          <a:prstGeom prst="rect">
-            <a:avLst/>
-          </a:prstGeom>
-          <a:solidFill>
-            <a:srgbClr val="F8F5EF"/>
-          </a:solidFill>
-          <a:ln>
-            <a:noFill/>
-          </a:ln>
-        </p:spPr>
-        <p:style>
-          <a:lnRef idx="1">
-            <a:schemeClr val="accent1"/>
-          </a:lnRef>
-          <a:fillRef idx="3">
-            <a:schemeClr val="accent1"/>
-          </a:fillRef>
-          <a:effectRef idx="2">
-            <a:schemeClr val="accent1"/>
-          </a:effectRef>
-          <a:fontRef idx="minor">
-            <a:schemeClr val="lt1"/>
-          </a:fontRef>
-        </p:style>
-        <p:txBody>
-          <a:bodyPr rtlCol="0" anchor="ctr"/>
-          <a:lstStyle/>
-          <a:p>
-            <a:pPr algn="ctr"/>
-          </a:p>
-        </p:txBody>
-      </p:sp>
-      <p:sp>
-        <p:nvSpPr>
-          <p:cNvPr id="28" name="Rectangle 27"/>
-          <p:cNvSpPr/>
-          <p:nvPr/>
-        </p:nvSpPr>
-        <p:spPr>
-          <a:xfrm>
-            <a:off x="4580295" y="6447525"/>
-            <a:ext cx="219865" cy="309364"/>
-          </a:xfrm>
-          <a:prstGeom prst="rect">
-            <a:avLst/>
-          </a:prstGeom>
-          <a:solidFill>
-            <a:srgbClr val="F8F5EF"/>
-          </a:solidFill>
-          <a:ln>
-            <a:noFill/>
-          </a:ln>
-        </p:spPr>
-        <p:style>
-          <a:lnRef idx="1">
-            <a:schemeClr val="accent1"/>
-          </a:lnRef>
-          <a:fillRef idx="3">
-            <a:schemeClr val="accent1"/>
-          </a:fillRef>
-          <a:effectRef idx="2">
-            <a:schemeClr val="accent1"/>
-          </a:effectRef>
-          <a:fontRef idx="minor">
-            <a:schemeClr val="lt1"/>
-          </a:fontRef>
-        </p:style>
-        <p:txBody>
-          <a:bodyPr rtlCol="0" anchor="ctr"/>
-          <a:lstStyle/>
-          <a:p>
-            <a:pPr algn="ctr"/>
-          </a:p>
-        </p:txBody>
-      </p:sp>
-      <p:sp>
-        <p:nvSpPr>
-          <p:cNvPr id="29" name="Rectangle 28"/>
-          <p:cNvSpPr/>
-          <p:nvPr/>
-        </p:nvSpPr>
-        <p:spPr>
-          <a:xfrm>
-            <a:off x="3985364" y="7494605"/>
-            <a:ext cx="219865" cy="309364"/>
-          </a:xfrm>
-          <a:prstGeom prst="rect">
-            <a:avLst/>
-          </a:prstGeom>
-          <a:solidFill>
-            <a:srgbClr val="F8F5EF"/>
-          </a:solidFill>
-          <a:ln>
-            <a:noFill/>
-          </a:ln>
-        </p:spPr>
-        <p:style>
-          <a:lnRef idx="1">
-            <a:schemeClr val="accent1"/>
-          </a:lnRef>
-          <a:fillRef idx="3">
-            <a:schemeClr val="accent1"/>
-          </a:fillRef>
-          <a:effectRef idx="2">
-            <a:schemeClr val="accent1"/>
-          </a:effectRef>
-          <a:fontRef idx="minor">
-            <a:schemeClr val="lt1"/>
-          </a:fontRef>
-        </p:style>
-        <p:txBody>
-          <a:bodyPr rtlCol="0" anchor="ctr"/>
-          <a:lstStyle/>
-          <a:p>
-            <a:pPr algn="ctr"/>
-          </a:p>
-        </p:txBody>
-      </p:sp>
-      <p:sp>
-        <p:nvSpPr>
-          <p:cNvPr id="30" name="Rectangle 29"/>
-          <p:cNvSpPr/>
-          <p:nvPr/>
-        </p:nvSpPr>
-        <p:spPr>
-          <a:xfrm>
-            <a:off x="4580295" y="7494605"/>
-            <a:ext cx="219865" cy="309364"/>
-          </a:xfrm>
-          <a:prstGeom prst="rect">
-            <a:avLst/>
-          </a:prstGeom>
-          <a:solidFill>
-            <a:srgbClr val="F8F5EF"/>
-          </a:solidFill>
-          <a:ln>
-            <a:noFill/>
-          </a:ln>
-        </p:spPr>
-        <p:style>
-          <a:lnRef idx="1">
-            <a:schemeClr val="accent1"/>
-          </a:lnRef>
-          <a:fillRef idx="3">
-            <a:schemeClr val="accent1"/>
-          </a:fillRef>
-          <a:effectRef idx="2">
-            <a:schemeClr val="accent1"/>
-          </a:effectRef>
-          <a:fontRef idx="minor">
-            <a:schemeClr val="lt1"/>
-          </a:fontRef>
-        </p:style>
-        <p:txBody>
-          <a:bodyPr rtlCol="0" anchor="ctr"/>
-          <a:lstStyle/>
-          <a:p>
-            <a:pPr algn="ctr"/>
-          </a:p>
-        </p:txBody>
-      </p:sp>
-      <p:sp>
-        <p:nvSpPr>
-          <p:cNvPr id="31" name="Rectangle 30"/>
-          <p:cNvSpPr/>
-          <p:nvPr/>
-        </p:nvSpPr>
-        <p:spPr>
-          <a:xfrm>
-            <a:off x="5210982" y="3115909"/>
-            <a:ext cx="1293327" cy="6092098"/>
-          </a:xfrm>
-          <a:prstGeom prst="rect">
-            <a:avLst/>
-          </a:prstGeom>
-          <a:solidFill>
-            <a:srgbClr val="317D74"/>
-          </a:solidFill>
-          <a:ln>
-            <a:noFill/>
-          </a:ln>
-        </p:spPr>
-        <p:style>
-          <a:lnRef idx="1">
-            <a:schemeClr val="accent1"/>
-          </a:lnRef>
-          <a:fillRef idx="3">
-            <a:schemeClr val="accent1"/>
-          </a:fillRef>
-          <a:effectRef idx="2">
-            <a:schemeClr val="accent1"/>
-          </a:effectRef>
-          <a:fontRef idx="minor">
-            <a:schemeClr val="lt1"/>
-          </a:fontRef>
-        </p:style>
-        <p:txBody>
-          <a:bodyPr rtlCol="0" anchor="ctr"/>
-          <a:lstStyle/>
-          <a:p>
-            <a:pPr algn="ctr"/>
-          </a:p>
-        </p:txBody>
-      </p:sp>
-      <p:sp>
-        <p:nvSpPr>
-          <p:cNvPr id="32" name="Rectangle 31"/>
-          <p:cNvSpPr/>
-          <p:nvPr/>
-        </p:nvSpPr>
-        <p:spPr>
-          <a:xfrm>
-            <a:off x="5430848" y="4334329"/>
-            <a:ext cx="219865" cy="395986"/>
-          </a:xfrm>
-          <a:prstGeom prst="rect">
-            <a:avLst/>
-          </a:prstGeom>
-          <a:solidFill>
-            <a:srgbClr val="F8F5EF"/>
-          </a:solidFill>
-          <a:ln>
-            <a:noFill/>
-          </a:ln>
-        </p:spPr>
-        <p:style>
-          <a:lnRef idx="1">
-            <a:schemeClr val="accent1"/>
-          </a:lnRef>
-          <a:fillRef idx="3">
-            <a:schemeClr val="accent1"/>
-          </a:fillRef>
-          <a:effectRef idx="2">
-            <a:schemeClr val="accent1"/>
-          </a:effectRef>
-          <a:fontRef idx="minor">
-            <a:schemeClr val="lt1"/>
-          </a:fontRef>
-        </p:style>
-        <p:txBody>
-          <a:bodyPr rtlCol="0" anchor="ctr"/>
-          <a:lstStyle/>
-          <a:p>
-            <a:pPr algn="ctr"/>
-          </a:p>
-        </p:txBody>
-      </p:sp>
-      <p:sp>
-        <p:nvSpPr>
-          <p:cNvPr id="33" name="Rectangle 32"/>
-          <p:cNvSpPr/>
-          <p:nvPr/>
-        </p:nvSpPr>
-        <p:spPr>
-          <a:xfrm>
-            <a:off x="6025778" y="4334329"/>
-            <a:ext cx="219865" cy="395986"/>
-          </a:xfrm>
-          <a:prstGeom prst="rect">
-            <a:avLst/>
-          </a:prstGeom>
-          <a:solidFill>
-            <a:srgbClr val="F8F5EF"/>
-          </a:solidFill>
-          <a:ln>
-            <a:noFill/>
-          </a:ln>
-        </p:spPr>
-        <p:style>
-          <a:lnRef idx="1">
-            <a:schemeClr val="accent1"/>
-          </a:lnRef>
-          <a:fillRef idx="3">
-            <a:schemeClr val="accent1"/>
-          </a:fillRef>
-          <a:effectRef idx="2">
-            <a:schemeClr val="accent1"/>
-          </a:effectRef>
-          <a:fontRef idx="minor">
-            <a:schemeClr val="lt1"/>
-          </a:fontRef>
-        </p:style>
-        <p:txBody>
-          <a:bodyPr rtlCol="0" anchor="ctr"/>
-          <a:lstStyle/>
-          <a:p>
-            <a:pPr algn="ctr"/>
-          </a:p>
-        </p:txBody>
-      </p:sp>
-      <p:sp>
-        <p:nvSpPr>
-          <p:cNvPr id="34" name="Rectangle 33"/>
-          <p:cNvSpPr/>
-          <p:nvPr/>
-        </p:nvSpPr>
-        <p:spPr>
-          <a:xfrm>
-            <a:off x="5430848" y="5674590"/>
-            <a:ext cx="219865" cy="395986"/>
-          </a:xfrm>
-          <a:prstGeom prst="rect">
-            <a:avLst/>
-          </a:prstGeom>
-          <a:solidFill>
-            <a:srgbClr val="F8F5EF"/>
-          </a:solidFill>
-          <a:ln>
-            <a:noFill/>
-          </a:ln>
-        </p:spPr>
-        <p:style>
-          <a:lnRef idx="1">
-            <a:schemeClr val="accent1"/>
-          </a:lnRef>
-          <a:fillRef idx="3">
-            <a:schemeClr val="accent1"/>
-          </a:fillRef>
-          <a:effectRef idx="2">
-            <a:schemeClr val="accent1"/>
-          </a:effectRef>
-          <a:fontRef idx="minor">
-            <a:schemeClr val="lt1"/>
-          </a:fontRef>
-        </p:style>
-        <p:txBody>
-          <a:bodyPr rtlCol="0" anchor="ctr"/>
-          <a:lstStyle/>
-          <a:p>
-            <a:pPr algn="ctr"/>
-          </a:p>
-        </p:txBody>
-      </p:sp>
-      <p:sp>
-        <p:nvSpPr>
-          <p:cNvPr id="35" name="Rectangle 34"/>
-          <p:cNvSpPr/>
-          <p:nvPr/>
-        </p:nvSpPr>
-        <p:spPr>
-          <a:xfrm>
-            <a:off x="6025778" y="5674590"/>
-            <a:ext cx="219865" cy="395986"/>
-          </a:xfrm>
-          <a:prstGeom prst="rect">
-            <a:avLst/>
-          </a:prstGeom>
-          <a:solidFill>
-            <a:srgbClr val="F8F5EF"/>
-          </a:solidFill>
-          <a:ln>
-            <a:noFill/>
-          </a:ln>
-        </p:spPr>
-        <p:style>
-          <a:lnRef idx="1">
-            <a:schemeClr val="accent1"/>
-          </a:lnRef>
-          <a:fillRef idx="3">
-            <a:schemeClr val="accent1"/>
-          </a:fillRef>
-          <a:effectRef idx="2">
-            <a:schemeClr val="accent1"/>
-          </a:effectRef>
-          <a:fontRef idx="minor">
-            <a:schemeClr val="lt1"/>
-          </a:fontRef>
-        </p:style>
-        <p:txBody>
-          <a:bodyPr rtlCol="0" anchor="ctr"/>
-          <a:lstStyle/>
-          <a:p>
-            <a:pPr algn="ctr"/>
-          </a:p>
-        </p:txBody>
-      </p:sp>
-      <p:sp>
-        <p:nvSpPr>
-          <p:cNvPr id="36" name="Rectangle 35"/>
-          <p:cNvSpPr/>
-          <p:nvPr/>
-        </p:nvSpPr>
-        <p:spPr>
-          <a:xfrm>
-            <a:off x="5430848" y="7014852"/>
-            <a:ext cx="219865" cy="395986"/>
-          </a:xfrm>
-          <a:prstGeom prst="rect">
-            <a:avLst/>
-          </a:prstGeom>
-          <a:solidFill>
-            <a:srgbClr val="F8F5EF"/>
-          </a:solidFill>
-          <a:ln>
-            <a:noFill/>
-          </a:ln>
-        </p:spPr>
-        <p:style>
-          <a:lnRef idx="1">
-            <a:schemeClr val="accent1"/>
-          </a:lnRef>
-          <a:fillRef idx="3">
-            <a:schemeClr val="accent1"/>
-          </a:fillRef>
-          <a:effectRef idx="2">
-            <a:schemeClr val="accent1"/>
-          </a:effectRef>
-          <a:fontRef idx="minor">
-            <a:schemeClr val="lt1"/>
-          </a:fontRef>
-        </p:style>
-        <p:txBody>
-          <a:bodyPr rtlCol="0" anchor="ctr"/>
-          <a:lstStyle/>
-          <a:p>
-            <a:pPr algn="ctr"/>
-          </a:p>
-        </p:txBody>
-      </p:sp>
-      <p:sp>
-        <p:nvSpPr>
-          <p:cNvPr id="37" name="Rectangle 36"/>
-          <p:cNvSpPr/>
-          <p:nvPr/>
-        </p:nvSpPr>
-        <p:spPr>
-          <a:xfrm>
-            <a:off x="6025778" y="7014852"/>
-            <a:ext cx="219865" cy="395986"/>
-          </a:xfrm>
-          <a:prstGeom prst="rect">
-            <a:avLst/>
-          </a:prstGeom>
-          <a:solidFill>
-            <a:srgbClr val="F8F5EF"/>
-          </a:solidFill>
-          <a:ln>
-            <a:noFill/>
-          </a:ln>
-        </p:spPr>
-        <p:style>
-          <a:lnRef idx="1">
-            <a:schemeClr val="accent1"/>
-          </a:lnRef>
-          <a:fillRef idx="3">
-            <a:schemeClr val="accent1"/>
-          </a:fillRef>
-          <a:effectRef idx="2">
-            <a:schemeClr val="accent1"/>
-          </a:effectRef>
-          <a:fontRef idx="minor">
-            <a:schemeClr val="lt1"/>
-          </a:fontRef>
-        </p:style>
-        <p:txBody>
-          <a:bodyPr rtlCol="0" anchor="ctr"/>
-          <a:lstStyle/>
-          <a:p>
-            <a:pPr algn="ctr"/>
-          </a:p>
-        </p:txBody>
-      </p:sp>
-      <p:sp>
-        <p:nvSpPr>
-          <p:cNvPr id="38" name="Rectangle 37"/>
-          <p:cNvSpPr/>
-          <p:nvPr/>
-        </p:nvSpPr>
-        <p:spPr>
-          <a:xfrm>
-            <a:off x="6732544" y="4956230"/>
-            <a:ext cx="1293327" cy="4251777"/>
-          </a:xfrm>
-          <a:prstGeom prst="rect">
-            <a:avLst/>
-          </a:prstGeom>
-          <a:solidFill>
-            <a:srgbClr val="276D61"/>
-          </a:solidFill>
-          <a:ln>
-            <a:noFill/>
-          </a:ln>
-        </p:spPr>
-        <p:style>
-          <a:lnRef idx="1">
-            <a:schemeClr val="accent1"/>
-          </a:lnRef>
-          <a:fillRef idx="3">
-            <a:schemeClr val="accent1"/>
-          </a:fillRef>
-          <a:effectRef idx="2">
-            <a:schemeClr val="accent1"/>
-          </a:effectRef>
-          <a:fontRef idx="minor">
-            <a:schemeClr val="lt1"/>
-          </a:fontRef>
-        </p:style>
-        <p:txBody>
-          <a:bodyPr rtlCol="0" anchor="ctr"/>
-          <a:lstStyle/>
-          <a:p>
-            <a:pPr algn="ctr"/>
-          </a:p>
-        </p:txBody>
-      </p:sp>
-      <p:sp>
-        <p:nvSpPr>
-          <p:cNvPr id="39" name="Rectangle 38"/>
-          <p:cNvSpPr/>
-          <p:nvPr/>
-        </p:nvSpPr>
-        <p:spPr>
-          <a:xfrm>
-            <a:off x="6952409" y="5806586"/>
-            <a:ext cx="219865" cy="276365"/>
-          </a:xfrm>
-          <a:prstGeom prst="rect">
-            <a:avLst/>
-          </a:prstGeom>
-          <a:solidFill>
-            <a:srgbClr val="F8F5EF"/>
-          </a:solidFill>
-          <a:ln>
-            <a:noFill/>
-          </a:ln>
-        </p:spPr>
-        <p:style>
-          <a:lnRef idx="1">
-            <a:schemeClr val="accent1"/>
-          </a:lnRef>
-          <a:fillRef idx="3">
-            <a:schemeClr val="accent1"/>
-          </a:fillRef>
-          <a:effectRef idx="2">
-            <a:schemeClr val="accent1"/>
-          </a:effectRef>
-          <a:fontRef idx="minor">
-            <a:schemeClr val="lt1"/>
-          </a:fontRef>
-        </p:style>
-        <p:txBody>
-          <a:bodyPr rtlCol="0" anchor="ctr"/>
-          <a:lstStyle/>
-          <a:p>
-            <a:pPr algn="ctr"/>
-          </a:p>
-        </p:txBody>
-      </p:sp>
-      <p:sp>
-        <p:nvSpPr>
-          <p:cNvPr id="40" name="Rectangle 39"/>
-          <p:cNvSpPr/>
-          <p:nvPr/>
-        </p:nvSpPr>
-        <p:spPr>
-          <a:xfrm>
-            <a:off x="7547340" y="5806586"/>
-            <a:ext cx="219865" cy="276365"/>
-          </a:xfrm>
-          <a:prstGeom prst="rect">
-            <a:avLst/>
-          </a:prstGeom>
-          <a:solidFill>
-            <a:srgbClr val="F8F5EF"/>
-          </a:solidFill>
-          <a:ln>
-            <a:noFill/>
-          </a:ln>
-        </p:spPr>
-        <p:style>
-          <a:lnRef idx="1">
-            <a:schemeClr val="accent1"/>
-          </a:lnRef>
-          <a:fillRef idx="3">
-            <a:schemeClr val="accent1"/>
-          </a:fillRef>
-          <a:effectRef idx="2">
-            <a:schemeClr val="accent1"/>
-          </a:effectRef>
-          <a:fontRef idx="minor">
-            <a:schemeClr val="lt1"/>
-          </a:fontRef>
-        </p:style>
-        <p:txBody>
-          <a:bodyPr rtlCol="0" anchor="ctr"/>
-          <a:lstStyle/>
-          <a:p>
-            <a:pPr algn="ctr"/>
-          </a:p>
-        </p:txBody>
-      </p:sp>
-      <p:sp>
-        <p:nvSpPr>
-          <p:cNvPr id="41" name="Rectangle 40"/>
-          <p:cNvSpPr/>
-          <p:nvPr/>
-        </p:nvSpPr>
-        <p:spPr>
-          <a:xfrm>
-            <a:off x="6952409" y="6741977"/>
-            <a:ext cx="219865" cy="276365"/>
-          </a:xfrm>
-          <a:prstGeom prst="rect">
-            <a:avLst/>
-          </a:prstGeom>
-          <a:solidFill>
-            <a:srgbClr val="F8F5EF"/>
-          </a:solidFill>
-          <a:ln>
-            <a:noFill/>
-          </a:ln>
-        </p:spPr>
-        <p:style>
-          <a:lnRef idx="1">
-            <a:schemeClr val="accent1"/>
-          </a:lnRef>
-          <a:fillRef idx="3">
-            <a:schemeClr val="accent1"/>
-          </a:fillRef>
-          <a:effectRef idx="2">
-            <a:schemeClr val="accent1"/>
-          </a:effectRef>
-          <a:fontRef idx="minor">
-            <a:schemeClr val="lt1"/>
-          </a:fontRef>
-        </p:style>
-        <p:txBody>
-          <a:bodyPr rtlCol="0" anchor="ctr"/>
-          <a:lstStyle/>
-          <a:p>
-            <a:pPr algn="ctr"/>
-          </a:p>
-        </p:txBody>
-      </p:sp>
-      <p:sp>
-        <p:nvSpPr>
-          <p:cNvPr id="42" name="Rectangle 41"/>
-          <p:cNvSpPr/>
-          <p:nvPr/>
-        </p:nvSpPr>
-        <p:spPr>
-          <a:xfrm>
-            <a:off x="7547340" y="6741977"/>
-            <a:ext cx="219865" cy="276365"/>
-          </a:xfrm>
-          <a:prstGeom prst="rect">
-            <a:avLst/>
-          </a:prstGeom>
-          <a:solidFill>
-            <a:srgbClr val="F8F5EF"/>
-          </a:solidFill>
-          <a:ln>
-            <a:noFill/>
-          </a:ln>
-        </p:spPr>
-        <p:style>
-          <a:lnRef idx="1">
-            <a:schemeClr val="accent1"/>
-          </a:lnRef>
-          <a:fillRef idx="3">
-            <a:schemeClr val="accent1"/>
-          </a:fillRef>
-          <a:effectRef idx="2">
-            <a:schemeClr val="accent1"/>
-          </a:effectRef>
-          <a:fontRef idx="minor">
-            <a:schemeClr val="lt1"/>
-          </a:fontRef>
-        </p:style>
-        <p:txBody>
-          <a:bodyPr rtlCol="0" anchor="ctr"/>
-          <a:lstStyle/>
-          <a:p>
-            <a:pPr algn="ctr"/>
-          </a:p>
-        </p:txBody>
-      </p:sp>
-      <p:sp>
-        <p:nvSpPr>
-          <p:cNvPr id="43" name="Rectangle 42"/>
-          <p:cNvSpPr/>
-          <p:nvPr/>
-        </p:nvSpPr>
-        <p:spPr>
-          <a:xfrm>
-            <a:off x="6952409" y="7677368"/>
-            <a:ext cx="219865" cy="276365"/>
-          </a:xfrm>
-          <a:prstGeom prst="rect">
-            <a:avLst/>
-          </a:prstGeom>
-          <a:solidFill>
-            <a:srgbClr val="F8F5EF"/>
-          </a:solidFill>
-          <a:ln>
-            <a:noFill/>
-          </a:ln>
-        </p:spPr>
-        <p:style>
-          <a:lnRef idx="1">
-            <a:schemeClr val="accent1"/>
-          </a:lnRef>
-          <a:fillRef idx="3">
-            <a:schemeClr val="accent1"/>
-          </a:fillRef>
-          <a:effectRef idx="2">
-            <a:schemeClr val="accent1"/>
-          </a:effectRef>
-          <a:fontRef idx="minor">
-            <a:schemeClr val="lt1"/>
-          </a:fontRef>
-        </p:style>
-        <p:txBody>
-          <a:bodyPr rtlCol="0" anchor="ctr"/>
-          <a:lstStyle/>
-          <a:p>
-            <a:pPr algn="ctr"/>
-          </a:p>
-        </p:txBody>
-      </p:sp>
-      <p:sp>
-        <p:nvSpPr>
-          <p:cNvPr id="44" name="Rectangle 43"/>
-          <p:cNvSpPr/>
-          <p:nvPr/>
-        </p:nvSpPr>
-        <p:spPr>
-          <a:xfrm>
-            <a:off x="7547340" y="7677368"/>
-            <a:ext cx="219865" cy="276365"/>
-          </a:xfrm>
-          <a:prstGeom prst="rect">
-            <a:avLst/>
-          </a:prstGeom>
-          <a:solidFill>
-            <a:srgbClr val="F8F5EF"/>
-          </a:solidFill>
-          <a:ln>
-            <a:noFill/>
-          </a:ln>
-        </p:spPr>
-        <p:style>
-          <a:lnRef idx="1">
-            <a:schemeClr val="accent1"/>
-          </a:lnRef>
-          <a:fillRef idx="3">
-            <a:schemeClr val="accent1"/>
-          </a:fillRef>
-          <a:effectRef idx="2">
-            <a:schemeClr val="accent1"/>
-          </a:effectRef>
-          <a:fontRef idx="minor">
-            <a:schemeClr val="lt1"/>
-          </a:fontRef>
-        </p:style>
-        <p:txBody>
-          <a:bodyPr rtlCol="0" anchor="ctr"/>
-          <a:lstStyle/>
-          <a:p>
-            <a:pPr algn="ctr"/>
-          </a:p>
-        </p:txBody>
-      </p:sp>
-      <p:sp>
-        <p:nvSpPr>
-          <p:cNvPr id="45" name="Rectangle 44"/>
-          <p:cNvSpPr/>
-          <p:nvPr/>
-        </p:nvSpPr>
-        <p:spPr>
-          <a:xfrm>
-            <a:off x="722376" y="8827251"/>
-            <a:ext cx="7607808" cy="380756"/>
-          </a:xfrm>
-          <a:prstGeom prst="rect">
-            <a:avLst/>
-          </a:prstGeom>
-          <a:solidFill>
-            <a:srgbClr val="125449"/>
-          </a:solidFill>
-          <a:ln>
-            <a:noFill/>
-          </a:ln>
-        </p:spPr>
-        <p:style>
-          <a:lnRef idx="1">
-            <a:schemeClr val="accent1"/>
-          </a:lnRef>
-          <a:fillRef idx="3">
-            <a:schemeClr val="accent1"/>
-          </a:fillRef>
-          <a:effectRef idx="2">
-            <a:schemeClr val="accent1"/>
-          </a:effectRef>
-          <a:fontRef idx="minor">
-            <a:schemeClr val="lt1"/>
-          </a:fontRef>
-        </p:style>
-        <p:txBody>
-          <a:bodyPr rtlCol="0" anchor="ctr"/>
-          <a:lstStyle/>
-          <a:p>
-            <a:pPr algn="ctr"/>
-          </a:p>
-        </p:txBody>
-      </p:sp>
-      <p:sp>
-        <p:nvSpPr>
-          <p:cNvPr id="46" name="Rounded Rectangle 45"/>
-          <p:cNvSpPr/>
-          <p:nvPr/>
-        </p:nvSpPr>
-        <p:spPr>
-          <a:xfrm>
-            <a:off x="8695944" y="2862072"/>
-            <a:ext cx="8851392" cy="6345936"/>
-          </a:xfrm>
-          <a:prstGeom prst="roundRect">
-            <a:avLst>
-              <a:gd name="adj" fmla="val 7000"/>
-            </a:avLst>
-          </a:prstGeom>
-          <a:solidFill>
-            <a:srgbClr val="EAF0E9"/>
-          </a:solidFill>
-          <a:ln>
-            <a:noFill/>
-          </a:ln>
-        </p:spPr>
-        <p:style>
-          <a:lnRef idx="1">
-            <a:schemeClr val="accent1"/>
-          </a:lnRef>
-          <a:fillRef idx="3">
-            <a:schemeClr val="accent1"/>
-          </a:fillRef>
-          <a:effectRef idx="2">
-            <a:schemeClr val="accent1"/>
-          </a:effectRef>
-          <a:fontRef idx="minor">
-            <a:schemeClr val="lt1"/>
-          </a:fontRef>
-        </p:style>
-        <p:txBody>
-          <a:bodyPr rtlCol="0" anchor="ctr"/>
-          <a:lstStyle/>
-          <a:p>
-            <a:pPr algn="ctr"/>
-          </a:p>
-        </p:txBody>
-      </p:sp>
-      <p:sp>
-        <p:nvSpPr>
-          <p:cNvPr id="47" name="Rounded Rectangle 46"/>
-          <p:cNvSpPr/>
-          <p:nvPr/>
-        </p:nvSpPr>
-        <p:spPr>
-          <a:xfrm>
-            <a:off x="9171432" y="3328416"/>
-            <a:ext cx="658368" cy="658368"/>
-          </a:xfrm>
-          <a:prstGeom prst="roundRect">
-            <a:avLst>
-              <a:gd name="adj" fmla="val 7000"/>
-            </a:avLst>
-          </a:prstGeom>
-          <a:solidFill>
-            <a:srgbClr val="125449"/>
-          </a:solidFill>
-          <a:ln>
-            <a:noFill/>
-          </a:ln>
-        </p:spPr>
-        <p:style>
-          <a:lnRef idx="1">
-            <a:schemeClr val="accent1"/>
-          </a:lnRef>
-          <a:fillRef idx="3">
-            <a:schemeClr val="accent1"/>
-          </a:fillRef>
-          <a:effectRef idx="2">
-            <a:schemeClr val="accent1"/>
-          </a:effectRef>
-          <a:fontRef idx="minor">
-            <a:schemeClr val="lt1"/>
-          </a:fontRef>
-        </p:style>
-        <p:txBody>
-          <a:bodyPr rtlCol="0" anchor="ctr"/>
-          <a:lstStyle/>
-          <a:p>
-            <a:pPr algn="ctr"/>
-          </a:p>
-        </p:txBody>
-      </p:sp>
-      <p:sp>
-        <p:nvSpPr>
-          <p:cNvPr id="48" name="TextBox 47"/>
-          <p:cNvSpPr txBox="1"/>
-          <p:nvPr/>
-        </p:nvSpPr>
-        <p:spPr>
-          <a:xfrm>
-            <a:off x="9226296" y="3383280"/>
+          <p:cNvPr id="22" name="TextBox 21"/>
+          <p:cNvSpPr txBox="1"/>
+          <p:nvPr/>
+        </p:nvSpPr>
+        <p:spPr>
+          <a:xfrm>
+            <a:off x="9226296" y="6784848"/>
             <a:ext cx="548640" cy="539496"/>
           </a:xfrm>
           <a:prstGeom prst="rect">
@@ -16444,20 +13682,20 @@
               </a:defRPr>
             </a:pPr>
             <a:r>
-              <a:t>01</a:t>
-            </a:r>
-          </a:p>
-        </p:txBody>
-      </p:sp>
-      <p:sp>
-        <p:nvSpPr>
-          <p:cNvPr id="49" name="TextBox 48"/>
-          <p:cNvSpPr txBox="1"/>
-          <p:nvPr/>
-        </p:nvSpPr>
-        <p:spPr>
-          <a:xfrm>
-            <a:off x="10030968" y="3300984"/>
+              <a:t>03</a:t>
+            </a:r>
+          </a:p>
+        </p:txBody>
+      </p:sp>
+      <p:sp>
+        <p:nvSpPr>
+          <p:cNvPr id="23" name="TextBox 22"/>
+          <p:cNvSpPr txBox="1"/>
+          <p:nvPr/>
+        </p:nvSpPr>
+        <p:spPr>
+          <a:xfrm>
+            <a:off x="10030968" y="6702552"/>
             <a:ext cx="6839712" cy="493776"/>
           </a:xfrm>
           <a:prstGeom prst="rect">
@@ -16480,20 +13718,20 @@
               </a:defRPr>
             </a:pPr>
             <a:r>
-              <a:t>Fund the promises</a:t>
-            </a:r>
-          </a:p>
-        </p:txBody>
-      </p:sp>
-      <p:sp>
-        <p:nvSpPr>
-          <p:cNvPr id="50" name="TextBox 49"/>
-          <p:cNvSpPr txBox="1"/>
-          <p:nvPr/>
-        </p:nvSpPr>
-        <p:spPr>
-          <a:xfrm>
-            <a:off x="10040112" y="3959352"/>
+              <a:t>Monitor and reconsider</a:t>
+            </a:r>
+          </a:p>
+        </p:txBody>
+      </p:sp>
+      <p:sp>
+        <p:nvSpPr>
+          <p:cNvPr id="24" name="TextBox 23"/>
+          <p:cNvSpPr txBox="1"/>
+          <p:nvPr/>
+        </p:nvSpPr>
+        <p:spPr>
+          <a:xfrm>
+            <a:off x="10040112" y="7360920"/>
             <a:ext cx="6867144" cy="594360"/>
           </a:xfrm>
           <a:prstGeom prst="rect">
@@ -16516,382 +13754,6 @@
               </a:defRPr>
             </a:pPr>
             <a:r>
-              <a:t>Principal-match every revised payment.</a:t>
-            </a:r>
-          </a:p>
-        </p:txBody>
-      </p:sp>
-      <p:cxnSp>
-        <p:nvCxnSpPr>
-          <p:cNvPr id="51" name="Connector 50"/>
-          <p:cNvCxnSpPr/>
-          <p:nvPr/>
-        </p:nvCxnSpPr>
-        <p:spPr>
-          <a:xfrm>
-            <a:off x="9162288" y="4672584"/>
-            <a:ext cx="7891272" cy="0"/>
-          </a:xfrm>
-          <a:prstGeom prst="line">
-            <a:avLst/>
-          </a:prstGeom>
-          <a:ln w="15240">
-            <a:solidFill>
-              <a:srgbClr val="D4DCD3"/>
-            </a:solidFill>
-          </a:ln>
-        </p:spPr>
-        <p:style>
-          <a:lnRef idx="2">
-            <a:schemeClr val="accent1"/>
-          </a:lnRef>
-          <a:fillRef idx="0">
-            <a:schemeClr val="accent1"/>
-          </a:fillRef>
-          <a:effectRef idx="1">
-            <a:schemeClr val="accent1"/>
-          </a:effectRef>
-          <a:fontRef idx="minor">
-            <a:schemeClr val="tx1"/>
-          </a:fontRef>
-        </p:style>
-      </p:cxnSp>
-      <p:sp>
-        <p:nvSpPr>
-          <p:cNvPr id="52" name="Rounded Rectangle 51"/>
-          <p:cNvSpPr/>
-          <p:nvPr/>
-        </p:nvSpPr>
-        <p:spPr>
-          <a:xfrm>
-            <a:off x="9171432" y="5029200"/>
-            <a:ext cx="658368" cy="658368"/>
-          </a:xfrm>
-          <a:prstGeom prst="roundRect">
-            <a:avLst>
-              <a:gd name="adj" fmla="val 7000"/>
-            </a:avLst>
-          </a:prstGeom>
-          <a:solidFill>
-            <a:srgbClr val="125449"/>
-          </a:solidFill>
-          <a:ln>
-            <a:noFill/>
-          </a:ln>
-        </p:spPr>
-        <p:style>
-          <a:lnRef idx="1">
-            <a:schemeClr val="accent1"/>
-          </a:lnRef>
-          <a:fillRef idx="3">
-            <a:schemeClr val="accent1"/>
-          </a:fillRef>
-          <a:effectRef idx="2">
-            <a:schemeClr val="accent1"/>
-          </a:effectRef>
-          <a:fontRef idx="minor">
-            <a:schemeClr val="lt1"/>
-          </a:fontRef>
-        </p:style>
-        <p:txBody>
-          <a:bodyPr rtlCol="0" anchor="ctr"/>
-          <a:lstStyle/>
-          <a:p>
-            <a:pPr algn="ctr"/>
-          </a:p>
-        </p:txBody>
-      </p:sp>
-      <p:sp>
-        <p:nvSpPr>
-          <p:cNvPr id="53" name="TextBox 52"/>
-          <p:cNvSpPr txBox="1"/>
-          <p:nvPr/>
-        </p:nvSpPr>
-        <p:spPr>
-          <a:xfrm>
-            <a:off x="9226296" y="5084064"/>
-            <a:ext cx="548640" cy="539496"/>
-          </a:xfrm>
-          <a:prstGeom prst="rect">
-            <a:avLst/>
-          </a:prstGeom>
-          <a:noFill/>
-        </p:spPr>
-        <p:txBody>
-          <a:bodyPr wrap="square" anchor="ctr" lIns="36576" rIns="36576" tIns="0" bIns="0">
-            <a:spAutoFit/>
-          </a:bodyPr>
-          <a:lstStyle/>
-          <a:p>
-            <a:pPr algn="ctr">
-              <a:defRPr sz="2000" b="1">
-                <a:solidFill>
-                  <a:srgbClr val="FFFFFF"/>
-                </a:solidFill>
-                <a:latin typeface="Lato"/>
-              </a:defRPr>
-            </a:pPr>
-            <a:r>
-              <a:t>02</a:t>
-            </a:r>
-          </a:p>
-        </p:txBody>
-      </p:sp>
-      <p:sp>
-        <p:nvSpPr>
-          <p:cNvPr id="54" name="TextBox 53"/>
-          <p:cNvSpPr txBox="1"/>
-          <p:nvPr/>
-        </p:nvSpPr>
-        <p:spPr>
-          <a:xfrm>
-            <a:off x="10030968" y="5001768"/>
-            <a:ext cx="6839712" cy="493776"/>
-          </a:xfrm>
-          <a:prstGeom prst="rect">
-            <a:avLst/>
-          </a:prstGeom>
-          <a:noFill/>
-        </p:spPr>
-        <p:txBody>
-          <a:bodyPr wrap="square" anchor="ctr" lIns="36576" rIns="36576" tIns="0" bIns="0">
-            <a:spAutoFit/>
-          </a:bodyPr>
-          <a:lstStyle/>
-          <a:p>
-            <a:pPr algn="l">
-              <a:defRPr sz="2500" b="1">
-                <a:solidFill>
-                  <a:srgbClr val="125449"/>
-                </a:solidFill>
-                <a:latin typeface="Lato"/>
-              </a:defRPr>
-            </a:pPr>
-            <a:r>
-              <a:t>Keep the original equity choice</a:t>
-            </a:r>
-          </a:p>
-        </p:txBody>
-      </p:sp>
-      <p:sp>
-        <p:nvSpPr>
-          <p:cNvPr id="55" name="TextBox 54"/>
-          <p:cNvSpPr txBox="1"/>
-          <p:nvPr/>
-        </p:nvSpPr>
-        <p:spPr>
-          <a:xfrm>
-            <a:off x="10040112" y="5660136"/>
-            <a:ext cx="6867144" cy="594360"/>
-          </a:xfrm>
-          <a:prstGeom prst="rect">
-            <a:avLst/>
-          </a:prstGeom>
-          <a:noFill/>
-        </p:spPr>
-        <p:txBody>
-          <a:bodyPr wrap="square" anchor="ctr" lIns="36576" rIns="36576" tIns="0" bIns="0">
-            <a:spAutoFit/>
-          </a:bodyPr>
-          <a:lstStyle/>
-          <a:p>
-            <a:pPr algn="l">
-              <a:defRPr sz="1800" b="0">
-                <a:solidFill>
-                  <a:srgbClr val="2D4038"/>
-                </a:solidFill>
-                <a:latin typeface="Lato"/>
-              </a:defRPr>
-            </a:pPr>
-            <a:r>
-              <a:t>Retain Sample MV weights without hindsight.</a:t>
-            </a:r>
-          </a:p>
-        </p:txBody>
-      </p:sp>
-      <p:cxnSp>
-        <p:nvCxnSpPr>
-          <p:cNvPr id="56" name="Connector 55"/>
-          <p:cNvCxnSpPr/>
-          <p:nvPr/>
-        </p:nvCxnSpPr>
-        <p:spPr>
-          <a:xfrm>
-            <a:off x="9162288" y="6373368"/>
-            <a:ext cx="7891272" cy="0"/>
-          </a:xfrm>
-          <a:prstGeom prst="line">
-            <a:avLst/>
-          </a:prstGeom>
-          <a:ln w="15240">
-            <a:solidFill>
-              <a:srgbClr val="D4DCD3"/>
-            </a:solidFill>
-          </a:ln>
-        </p:spPr>
-        <p:style>
-          <a:lnRef idx="2">
-            <a:schemeClr val="accent1"/>
-          </a:lnRef>
-          <a:fillRef idx="0">
-            <a:schemeClr val="accent1"/>
-          </a:fillRef>
-          <a:effectRef idx="1">
-            <a:schemeClr val="accent1"/>
-          </a:effectRef>
-          <a:fontRef idx="minor">
-            <a:schemeClr val="tx1"/>
-          </a:fontRef>
-        </p:style>
-      </p:cxnSp>
-      <p:sp>
-        <p:nvSpPr>
-          <p:cNvPr id="57" name="Rounded Rectangle 56"/>
-          <p:cNvSpPr/>
-          <p:nvPr/>
-        </p:nvSpPr>
-        <p:spPr>
-          <a:xfrm>
-            <a:off x="9171432" y="6729984"/>
-            <a:ext cx="658368" cy="658368"/>
-          </a:xfrm>
-          <a:prstGeom prst="roundRect">
-            <a:avLst>
-              <a:gd name="adj" fmla="val 7000"/>
-            </a:avLst>
-          </a:prstGeom>
-          <a:solidFill>
-            <a:srgbClr val="C28E52"/>
-          </a:solidFill>
-          <a:ln>
-            <a:noFill/>
-          </a:ln>
-        </p:spPr>
-        <p:style>
-          <a:lnRef idx="1">
-            <a:schemeClr val="accent1"/>
-          </a:lnRef>
-          <a:fillRef idx="3">
-            <a:schemeClr val="accent1"/>
-          </a:fillRef>
-          <a:effectRef idx="2">
-            <a:schemeClr val="accent1"/>
-          </a:effectRef>
-          <a:fontRef idx="minor">
-            <a:schemeClr val="lt1"/>
-          </a:fontRef>
-        </p:style>
-        <p:txBody>
-          <a:bodyPr rtlCol="0" anchor="ctr"/>
-          <a:lstStyle/>
-          <a:p>
-            <a:pPr algn="ctr"/>
-          </a:p>
-        </p:txBody>
-      </p:sp>
-      <p:sp>
-        <p:nvSpPr>
-          <p:cNvPr id="58" name="TextBox 57"/>
-          <p:cNvSpPr txBox="1"/>
-          <p:nvPr/>
-        </p:nvSpPr>
-        <p:spPr>
-          <a:xfrm>
-            <a:off x="9226296" y="6784848"/>
-            <a:ext cx="548640" cy="539496"/>
-          </a:xfrm>
-          <a:prstGeom prst="rect">
-            <a:avLst/>
-          </a:prstGeom>
-          <a:noFill/>
-        </p:spPr>
-        <p:txBody>
-          <a:bodyPr wrap="square" anchor="ctr" lIns="36576" rIns="36576" tIns="0" bIns="0">
-            <a:spAutoFit/>
-          </a:bodyPr>
-          <a:lstStyle/>
-          <a:p>
-            <a:pPr algn="ctr">
-              <a:defRPr sz="2000" b="1">
-                <a:solidFill>
-                  <a:srgbClr val="FFFFFF"/>
-                </a:solidFill>
-                <a:latin typeface="Lato"/>
-              </a:defRPr>
-            </a:pPr>
-            <a:r>
-              <a:t>03</a:t>
-            </a:r>
-          </a:p>
-        </p:txBody>
-      </p:sp>
-      <p:sp>
-        <p:nvSpPr>
-          <p:cNvPr id="59" name="TextBox 58"/>
-          <p:cNvSpPr txBox="1"/>
-          <p:nvPr/>
-        </p:nvSpPr>
-        <p:spPr>
-          <a:xfrm>
-            <a:off x="10030968" y="6702552"/>
-            <a:ext cx="6839712" cy="493776"/>
-          </a:xfrm>
-          <a:prstGeom prst="rect">
-            <a:avLst/>
-          </a:prstGeom>
-          <a:noFill/>
-        </p:spPr>
-        <p:txBody>
-          <a:bodyPr wrap="square" anchor="ctr" lIns="36576" rIns="36576" tIns="0" bIns="0">
-            <a:spAutoFit/>
-          </a:bodyPr>
-          <a:lstStyle/>
-          <a:p>
-            <a:pPr algn="l">
-              <a:defRPr sz="2500" b="1">
-                <a:solidFill>
-                  <a:srgbClr val="125449"/>
-                </a:solidFill>
-                <a:latin typeface="Lato"/>
-              </a:defRPr>
-            </a:pPr>
-            <a:r>
-              <a:t>Monitor and reconsider</a:t>
-            </a:r>
-          </a:p>
-        </p:txBody>
-      </p:sp>
-      <p:sp>
-        <p:nvSpPr>
-          <p:cNvPr id="60" name="TextBox 59"/>
-          <p:cNvSpPr txBox="1"/>
-          <p:nvPr/>
-        </p:nvSpPr>
-        <p:spPr>
-          <a:xfrm>
-            <a:off x="10040112" y="7360920"/>
-            <a:ext cx="6867144" cy="594360"/>
-          </a:xfrm>
-          <a:prstGeom prst="rect">
-            <a:avLst/>
-          </a:prstGeom>
-          <a:noFill/>
-        </p:spPr>
-        <p:txBody>
-          <a:bodyPr wrap="square" anchor="ctr" lIns="36576" rIns="36576" tIns="0" bIns="0">
-            <a:spAutoFit/>
-          </a:bodyPr>
-          <a:lstStyle/>
-          <a:p>
-            <a:pPr algn="l">
-              <a:defRPr sz="1800" b="0">
-                <a:solidFill>
-                  <a:srgbClr val="2D4038"/>
-                </a:solidFill>
-                <a:latin typeface="Lato"/>
-              </a:defRPr>
-            </a:pPr>
-            <a:r>
               <a:t>Use cash needs and rolling losses to review.</a:t>
             </a:r>
           </a:p>
@@ -16899,7 +13761,7 @@
       </p:sp>
       <p:sp>
         <p:nvSpPr>
-          <p:cNvPr id="61" name="TextBox 60"/>
+          <p:cNvPr id="25" name="TextBox 24"/>
           <p:cNvSpPr txBox="1"/>
           <p:nvPr/>
         </p:nvSpPr>
@@ -17254,365 +14116,45 @@
           </a:p>
         </p:txBody>
       </p:sp>
-      <p:sp>
-        <p:nvSpPr>
-          <p:cNvPr id="10" name="Rounded Rectangle 9"/>
-          <p:cNvSpPr/>
-          <p:nvPr/>
-        </p:nvSpPr>
+      <p:pic>
+        <p:nvPicPr>
+          <p:cNvPr id="10" name="Picture 9" descr="image.jpg"/>
+          <p:cNvPicPr>
+            <a:picLocks noChangeAspect="1"/>
+          </p:cNvPicPr>
+          <p:nvPr/>
+        </p:nvPicPr>
+        <p:blipFill>
+          <a:blip r:embed="rId2"/>
+          <a:stretch>
+            <a:fillRect/>
+          </a:stretch>
+        </p:blipFill>
         <p:spPr>
           <a:xfrm>
             <a:off x="11521440" y="2871216"/>
             <a:ext cx="6016752" cy="6318504"/>
+          </a:xfrm>
+          <a:prstGeom prst="rect">
+            <a:avLst/>
+          </a:prstGeom>
+        </p:spPr>
+      </p:pic>
+      <p:sp>
+        <p:nvSpPr>
+          <p:cNvPr id="11" name="Rounded Rectangle 10"/>
+          <p:cNvSpPr/>
+          <p:nvPr/>
+        </p:nvSpPr>
+        <p:spPr>
+          <a:xfrm>
+            <a:off x="1152144" y="3355848"/>
+            <a:ext cx="2880360" cy="493776"/>
           </a:xfrm>
           <a:prstGeom prst="roundRect">
             <a:avLst>
               <a:gd name="adj" fmla="val 7000"/>
             </a:avLst>
-          </a:prstGeom>
-          <a:solidFill>
-            <a:srgbClr val="EAF0E9"/>
-          </a:solidFill>
-          <a:ln>
-            <a:noFill/>
-          </a:ln>
-        </p:spPr>
-        <p:style>
-          <a:lnRef idx="1">
-            <a:schemeClr val="accent1"/>
-          </a:lnRef>
-          <a:fillRef idx="3">
-            <a:schemeClr val="accent1"/>
-          </a:fillRef>
-          <a:effectRef idx="2">
-            <a:schemeClr val="accent1"/>
-          </a:effectRef>
-          <a:fontRef idx="minor">
-            <a:schemeClr val="lt1"/>
-          </a:fontRef>
-        </p:style>
-        <p:txBody>
-          <a:bodyPr rtlCol="0" anchor="ctr"/>
-          <a:lstStyle/>
-          <a:p>
-            <a:pPr algn="ctr"/>
-          </a:p>
-        </p:txBody>
-      </p:sp>
-      <p:sp>
-        <p:nvSpPr>
-          <p:cNvPr id="11" name="Rectangle 10"/>
-          <p:cNvSpPr/>
-          <p:nvPr/>
-        </p:nvSpPr>
-        <p:spPr>
-          <a:xfrm>
-            <a:off x="11762110" y="5145877"/>
-            <a:ext cx="1022847" cy="4043842"/>
-          </a:xfrm>
-          <a:prstGeom prst="rect">
-            <a:avLst/>
-          </a:prstGeom>
-          <a:solidFill>
-            <a:srgbClr val="8DAE9D"/>
-          </a:solidFill>
-          <a:ln>
-            <a:noFill/>
-          </a:ln>
-        </p:spPr>
-        <p:style>
-          <a:lnRef idx="1">
-            <a:schemeClr val="accent1"/>
-          </a:lnRef>
-          <a:fillRef idx="3">
-            <a:schemeClr val="accent1"/>
-          </a:fillRef>
-          <a:effectRef idx="2">
-            <a:schemeClr val="accent1"/>
-          </a:effectRef>
-          <a:fontRef idx="minor">
-            <a:schemeClr val="lt1"/>
-          </a:fontRef>
-        </p:style>
-        <p:txBody>
-          <a:bodyPr rtlCol="0" anchor="ctr"/>
-          <a:lstStyle/>
-          <a:p>
-            <a:pPr algn="ctr"/>
-          </a:p>
-        </p:txBody>
-      </p:sp>
-      <p:sp>
-        <p:nvSpPr>
-          <p:cNvPr id="12" name="Rectangle 11"/>
-          <p:cNvSpPr/>
-          <p:nvPr/>
-        </p:nvSpPr>
-        <p:spPr>
-          <a:xfrm>
-            <a:off x="11935994" y="5954645"/>
-            <a:ext cx="173884" cy="262849"/>
-          </a:xfrm>
-          <a:prstGeom prst="rect">
-            <a:avLst/>
-          </a:prstGeom>
-          <a:solidFill>
-            <a:srgbClr val="F8F5EF"/>
-          </a:solidFill>
-          <a:ln>
-            <a:noFill/>
-          </a:ln>
-        </p:spPr>
-        <p:style>
-          <a:lnRef idx="1">
-            <a:schemeClr val="accent1"/>
-          </a:lnRef>
-          <a:fillRef idx="3">
-            <a:schemeClr val="accent1"/>
-          </a:fillRef>
-          <a:effectRef idx="2">
-            <a:schemeClr val="accent1"/>
-          </a:effectRef>
-          <a:fontRef idx="minor">
-            <a:schemeClr val="lt1"/>
-          </a:fontRef>
-        </p:style>
-        <p:txBody>
-          <a:bodyPr rtlCol="0" anchor="ctr"/>
-          <a:lstStyle/>
-          <a:p>
-            <a:pPr algn="ctr"/>
-          </a:p>
-        </p:txBody>
-      </p:sp>
-      <p:sp>
-        <p:nvSpPr>
-          <p:cNvPr id="13" name="Rectangle 12"/>
-          <p:cNvSpPr/>
-          <p:nvPr/>
-        </p:nvSpPr>
-        <p:spPr>
-          <a:xfrm>
-            <a:off x="12406504" y="5954645"/>
-            <a:ext cx="173884" cy="262849"/>
-          </a:xfrm>
-          <a:prstGeom prst="rect">
-            <a:avLst/>
-          </a:prstGeom>
-          <a:solidFill>
-            <a:srgbClr val="F8F5EF"/>
-          </a:solidFill>
-          <a:ln>
-            <a:noFill/>
-          </a:ln>
-        </p:spPr>
-        <p:style>
-          <a:lnRef idx="1">
-            <a:schemeClr val="accent1"/>
-          </a:lnRef>
-          <a:fillRef idx="3">
-            <a:schemeClr val="accent1"/>
-          </a:fillRef>
-          <a:effectRef idx="2">
-            <a:schemeClr val="accent1"/>
-          </a:effectRef>
-          <a:fontRef idx="minor">
-            <a:schemeClr val="lt1"/>
-          </a:fontRef>
-        </p:style>
-        <p:txBody>
-          <a:bodyPr rtlCol="0" anchor="ctr"/>
-          <a:lstStyle/>
-          <a:p>
-            <a:pPr algn="ctr"/>
-          </a:p>
-        </p:txBody>
-      </p:sp>
-      <p:sp>
-        <p:nvSpPr>
-          <p:cNvPr id="14" name="Rectangle 13"/>
-          <p:cNvSpPr/>
-          <p:nvPr/>
-        </p:nvSpPr>
-        <p:spPr>
-          <a:xfrm>
-            <a:off x="11935994" y="6844291"/>
-            <a:ext cx="173884" cy="262849"/>
-          </a:xfrm>
-          <a:prstGeom prst="rect">
-            <a:avLst/>
-          </a:prstGeom>
-          <a:solidFill>
-            <a:srgbClr val="F8F5EF"/>
-          </a:solidFill>
-          <a:ln>
-            <a:noFill/>
-          </a:ln>
-        </p:spPr>
-        <p:style>
-          <a:lnRef idx="1">
-            <a:schemeClr val="accent1"/>
-          </a:lnRef>
-          <a:fillRef idx="3">
-            <a:schemeClr val="accent1"/>
-          </a:fillRef>
-          <a:effectRef idx="2">
-            <a:schemeClr val="accent1"/>
-          </a:effectRef>
-          <a:fontRef idx="minor">
-            <a:schemeClr val="lt1"/>
-          </a:fontRef>
-        </p:style>
-        <p:txBody>
-          <a:bodyPr rtlCol="0" anchor="ctr"/>
-          <a:lstStyle/>
-          <a:p>
-            <a:pPr algn="ctr"/>
-          </a:p>
-        </p:txBody>
-      </p:sp>
-      <p:sp>
-        <p:nvSpPr>
-          <p:cNvPr id="15" name="Rectangle 14"/>
-          <p:cNvSpPr/>
-          <p:nvPr/>
-        </p:nvSpPr>
-        <p:spPr>
-          <a:xfrm>
-            <a:off x="12406504" y="6844291"/>
-            <a:ext cx="173884" cy="262849"/>
-          </a:xfrm>
-          <a:prstGeom prst="rect">
-            <a:avLst/>
-          </a:prstGeom>
-          <a:solidFill>
-            <a:srgbClr val="F8F5EF"/>
-          </a:solidFill>
-          <a:ln>
-            <a:noFill/>
-          </a:ln>
-        </p:spPr>
-        <p:style>
-          <a:lnRef idx="1">
-            <a:schemeClr val="accent1"/>
-          </a:lnRef>
-          <a:fillRef idx="3">
-            <a:schemeClr val="accent1"/>
-          </a:fillRef>
-          <a:effectRef idx="2">
-            <a:schemeClr val="accent1"/>
-          </a:effectRef>
-          <a:fontRef idx="minor">
-            <a:schemeClr val="lt1"/>
-          </a:fontRef>
-        </p:style>
-        <p:txBody>
-          <a:bodyPr rtlCol="0" anchor="ctr"/>
-          <a:lstStyle/>
-          <a:p>
-            <a:pPr algn="ctr"/>
-          </a:p>
-        </p:txBody>
-      </p:sp>
-      <p:sp>
-        <p:nvSpPr>
-          <p:cNvPr id="16" name="Rectangle 15"/>
-          <p:cNvSpPr/>
-          <p:nvPr/>
-        </p:nvSpPr>
-        <p:spPr>
-          <a:xfrm>
-            <a:off x="11935994" y="7733936"/>
-            <a:ext cx="173884" cy="262849"/>
-          </a:xfrm>
-          <a:prstGeom prst="rect">
-            <a:avLst/>
-          </a:prstGeom>
-          <a:solidFill>
-            <a:srgbClr val="F8F5EF"/>
-          </a:solidFill>
-          <a:ln>
-            <a:noFill/>
-          </a:ln>
-        </p:spPr>
-        <p:style>
-          <a:lnRef idx="1">
-            <a:schemeClr val="accent1"/>
-          </a:lnRef>
-          <a:fillRef idx="3">
-            <a:schemeClr val="accent1"/>
-          </a:fillRef>
-          <a:effectRef idx="2">
-            <a:schemeClr val="accent1"/>
-          </a:effectRef>
-          <a:fontRef idx="minor">
-            <a:schemeClr val="lt1"/>
-          </a:fontRef>
-        </p:style>
-        <p:txBody>
-          <a:bodyPr rtlCol="0" anchor="ctr"/>
-          <a:lstStyle/>
-          <a:p>
-            <a:pPr algn="ctr"/>
-          </a:p>
-        </p:txBody>
-      </p:sp>
-      <p:sp>
-        <p:nvSpPr>
-          <p:cNvPr id="17" name="Rectangle 16"/>
-          <p:cNvSpPr/>
-          <p:nvPr/>
-        </p:nvSpPr>
-        <p:spPr>
-          <a:xfrm>
-            <a:off x="12406504" y="7733936"/>
-            <a:ext cx="173884" cy="262849"/>
-          </a:xfrm>
-          <a:prstGeom prst="rect">
-            <a:avLst/>
-          </a:prstGeom>
-          <a:solidFill>
-            <a:srgbClr val="F8F5EF"/>
-          </a:solidFill>
-          <a:ln>
-            <a:noFill/>
-          </a:ln>
-        </p:spPr>
-        <p:style>
-          <a:lnRef idx="1">
-            <a:schemeClr val="accent1"/>
-          </a:lnRef>
-          <a:fillRef idx="3">
-            <a:schemeClr val="accent1"/>
-          </a:fillRef>
-          <a:effectRef idx="2">
-            <a:schemeClr val="accent1"/>
-          </a:effectRef>
-          <a:fontRef idx="minor">
-            <a:schemeClr val="lt1"/>
-          </a:fontRef>
-        </p:style>
-        <p:txBody>
-          <a:bodyPr rtlCol="0" anchor="ctr"/>
-          <a:lstStyle/>
-          <a:p>
-            <a:pPr algn="ctr"/>
-          </a:p>
-        </p:txBody>
-      </p:sp>
-      <p:sp>
-        <p:nvSpPr>
-          <p:cNvPr id="18" name="Rectangle 17"/>
-          <p:cNvSpPr/>
-          <p:nvPr/>
-        </p:nvSpPr>
-        <p:spPr>
-          <a:xfrm>
-            <a:off x="12784957" y="3439881"/>
-            <a:ext cx="1022847" cy="5749838"/>
-          </a:xfrm>
-          <a:prstGeom prst="rect">
-            <a:avLst/>
           </a:prstGeom>
           <a:solidFill>
             <a:srgbClr val="125449"/>
@@ -17645,1256 +14187,7 @@
       </p:sp>
       <p:sp>
         <p:nvSpPr>
-          <p:cNvPr id="19" name="Rectangle 18"/>
-          <p:cNvSpPr/>
-          <p:nvPr/>
-        </p:nvSpPr>
-        <p:spPr>
-          <a:xfrm>
-            <a:off x="12958842" y="4589849"/>
-            <a:ext cx="173884" cy="373739"/>
-          </a:xfrm>
-          <a:prstGeom prst="rect">
-            <a:avLst/>
-          </a:prstGeom>
-          <a:solidFill>
-            <a:srgbClr val="F8F5EF"/>
-          </a:solidFill>
-          <a:ln>
-            <a:noFill/>
-          </a:ln>
-        </p:spPr>
-        <p:style>
-          <a:lnRef idx="1">
-            <a:schemeClr val="accent1"/>
-          </a:lnRef>
-          <a:fillRef idx="3">
-            <a:schemeClr val="accent1"/>
-          </a:fillRef>
-          <a:effectRef idx="2">
-            <a:schemeClr val="accent1"/>
-          </a:effectRef>
-          <a:fontRef idx="minor">
-            <a:schemeClr val="lt1"/>
-          </a:fontRef>
-        </p:style>
-        <p:txBody>
-          <a:bodyPr rtlCol="0" anchor="ctr"/>
-          <a:lstStyle/>
-          <a:p>
-            <a:pPr algn="ctr"/>
-          </a:p>
-        </p:txBody>
-      </p:sp>
-      <p:sp>
-        <p:nvSpPr>
-          <p:cNvPr id="20" name="Rectangle 19"/>
-          <p:cNvSpPr/>
-          <p:nvPr/>
-        </p:nvSpPr>
-        <p:spPr>
-          <a:xfrm>
-            <a:off x="13429352" y="4589849"/>
-            <a:ext cx="173884" cy="373739"/>
-          </a:xfrm>
-          <a:prstGeom prst="rect">
-            <a:avLst/>
-          </a:prstGeom>
-          <a:solidFill>
-            <a:srgbClr val="F8F5EF"/>
-          </a:solidFill>
-          <a:ln>
-            <a:noFill/>
-          </a:ln>
-        </p:spPr>
-        <p:style>
-          <a:lnRef idx="1">
-            <a:schemeClr val="accent1"/>
-          </a:lnRef>
-          <a:fillRef idx="3">
-            <a:schemeClr val="accent1"/>
-          </a:fillRef>
-          <a:effectRef idx="2">
-            <a:schemeClr val="accent1"/>
-          </a:effectRef>
-          <a:fontRef idx="minor">
-            <a:schemeClr val="lt1"/>
-          </a:fontRef>
-        </p:style>
-        <p:txBody>
-          <a:bodyPr rtlCol="0" anchor="ctr"/>
-          <a:lstStyle/>
-          <a:p>
-            <a:pPr algn="ctr"/>
-          </a:p>
-        </p:txBody>
-      </p:sp>
-      <p:sp>
-        <p:nvSpPr>
-          <p:cNvPr id="21" name="Rectangle 20"/>
-          <p:cNvSpPr/>
-          <p:nvPr/>
-        </p:nvSpPr>
-        <p:spPr>
-          <a:xfrm>
-            <a:off x="12958842" y="5854813"/>
-            <a:ext cx="173884" cy="373739"/>
-          </a:xfrm>
-          <a:prstGeom prst="rect">
-            <a:avLst/>
-          </a:prstGeom>
-          <a:solidFill>
-            <a:srgbClr val="F8F5EF"/>
-          </a:solidFill>
-          <a:ln>
-            <a:noFill/>
-          </a:ln>
-        </p:spPr>
-        <p:style>
-          <a:lnRef idx="1">
-            <a:schemeClr val="accent1"/>
-          </a:lnRef>
-          <a:fillRef idx="3">
-            <a:schemeClr val="accent1"/>
-          </a:fillRef>
-          <a:effectRef idx="2">
-            <a:schemeClr val="accent1"/>
-          </a:effectRef>
-          <a:fontRef idx="minor">
-            <a:schemeClr val="lt1"/>
-          </a:fontRef>
-        </p:style>
-        <p:txBody>
-          <a:bodyPr rtlCol="0" anchor="ctr"/>
-          <a:lstStyle/>
-          <a:p>
-            <a:pPr algn="ctr"/>
-          </a:p>
-        </p:txBody>
-      </p:sp>
-      <p:sp>
-        <p:nvSpPr>
-          <p:cNvPr id="22" name="Rectangle 21"/>
-          <p:cNvSpPr/>
-          <p:nvPr/>
-        </p:nvSpPr>
-        <p:spPr>
-          <a:xfrm>
-            <a:off x="13429352" y="5854813"/>
-            <a:ext cx="173884" cy="373739"/>
-          </a:xfrm>
-          <a:prstGeom prst="rect">
-            <a:avLst/>
-          </a:prstGeom>
-          <a:solidFill>
-            <a:srgbClr val="F8F5EF"/>
-          </a:solidFill>
-          <a:ln>
-            <a:noFill/>
-          </a:ln>
-        </p:spPr>
-        <p:style>
-          <a:lnRef idx="1">
-            <a:schemeClr val="accent1"/>
-          </a:lnRef>
-          <a:fillRef idx="3">
-            <a:schemeClr val="accent1"/>
-          </a:fillRef>
-          <a:effectRef idx="2">
-            <a:schemeClr val="accent1"/>
-          </a:effectRef>
-          <a:fontRef idx="minor">
-            <a:schemeClr val="lt1"/>
-          </a:fontRef>
-        </p:style>
-        <p:txBody>
-          <a:bodyPr rtlCol="0" anchor="ctr"/>
-          <a:lstStyle/>
-          <a:p>
-            <a:pPr algn="ctr"/>
-          </a:p>
-        </p:txBody>
-      </p:sp>
-      <p:sp>
-        <p:nvSpPr>
-          <p:cNvPr id="23" name="Rectangle 22"/>
-          <p:cNvSpPr/>
-          <p:nvPr/>
-        </p:nvSpPr>
-        <p:spPr>
-          <a:xfrm>
-            <a:off x="12958842" y="7119778"/>
-            <a:ext cx="173884" cy="373739"/>
-          </a:xfrm>
-          <a:prstGeom prst="rect">
-            <a:avLst/>
-          </a:prstGeom>
-          <a:solidFill>
-            <a:srgbClr val="F8F5EF"/>
-          </a:solidFill>
-          <a:ln>
-            <a:noFill/>
-          </a:ln>
-        </p:spPr>
-        <p:style>
-          <a:lnRef idx="1">
-            <a:schemeClr val="accent1"/>
-          </a:lnRef>
-          <a:fillRef idx="3">
-            <a:schemeClr val="accent1"/>
-          </a:fillRef>
-          <a:effectRef idx="2">
-            <a:schemeClr val="accent1"/>
-          </a:effectRef>
-          <a:fontRef idx="minor">
-            <a:schemeClr val="lt1"/>
-          </a:fontRef>
-        </p:style>
-        <p:txBody>
-          <a:bodyPr rtlCol="0" anchor="ctr"/>
-          <a:lstStyle/>
-          <a:p>
-            <a:pPr algn="ctr"/>
-          </a:p>
-        </p:txBody>
-      </p:sp>
-      <p:sp>
-        <p:nvSpPr>
-          <p:cNvPr id="24" name="Rectangle 23"/>
-          <p:cNvSpPr/>
-          <p:nvPr/>
-        </p:nvSpPr>
-        <p:spPr>
-          <a:xfrm>
-            <a:off x="13429352" y="7119778"/>
-            <a:ext cx="173884" cy="373739"/>
-          </a:xfrm>
-          <a:prstGeom prst="rect">
-            <a:avLst/>
-          </a:prstGeom>
-          <a:solidFill>
-            <a:srgbClr val="F8F5EF"/>
-          </a:solidFill>
-          <a:ln>
-            <a:noFill/>
-          </a:ln>
-        </p:spPr>
-        <p:style>
-          <a:lnRef idx="1">
-            <a:schemeClr val="accent1"/>
-          </a:lnRef>
-          <a:fillRef idx="3">
-            <a:schemeClr val="accent1"/>
-          </a:fillRef>
-          <a:effectRef idx="2">
-            <a:schemeClr val="accent1"/>
-          </a:effectRef>
-          <a:fontRef idx="minor">
-            <a:schemeClr val="lt1"/>
-          </a:fontRef>
-        </p:style>
-        <p:txBody>
-          <a:bodyPr rtlCol="0" anchor="ctr"/>
-          <a:lstStyle/>
-          <a:p>
-            <a:pPr algn="ctr"/>
-          </a:p>
-        </p:txBody>
-      </p:sp>
-      <p:sp>
-        <p:nvSpPr>
-          <p:cNvPr id="25" name="Rectangle 24"/>
-          <p:cNvSpPr/>
-          <p:nvPr/>
-        </p:nvSpPr>
-        <p:spPr>
-          <a:xfrm>
-            <a:off x="13928140" y="4450842"/>
-            <a:ext cx="1022847" cy="4738878"/>
-          </a:xfrm>
-          <a:prstGeom prst="rect">
-            <a:avLst/>
-          </a:prstGeom>
-          <a:solidFill>
-            <a:srgbClr val="C28E52"/>
-          </a:solidFill>
-          <a:ln>
-            <a:noFill/>
-          </a:ln>
-        </p:spPr>
-        <p:style>
-          <a:lnRef idx="1">
-            <a:schemeClr val="accent1"/>
-          </a:lnRef>
-          <a:fillRef idx="3">
-            <a:schemeClr val="accent1"/>
-          </a:fillRef>
-          <a:effectRef idx="2">
-            <a:schemeClr val="accent1"/>
-          </a:effectRef>
-          <a:fontRef idx="minor">
-            <a:schemeClr val="lt1"/>
-          </a:fontRef>
-        </p:style>
-        <p:txBody>
-          <a:bodyPr rtlCol="0" anchor="ctr"/>
-          <a:lstStyle/>
-          <a:p>
-            <a:pPr algn="ctr"/>
-          </a:p>
-        </p:txBody>
-      </p:sp>
-      <p:sp>
-        <p:nvSpPr>
-          <p:cNvPr id="26" name="Rectangle 25"/>
-          <p:cNvSpPr/>
-          <p:nvPr/>
-        </p:nvSpPr>
-        <p:spPr>
-          <a:xfrm>
-            <a:off x="14102024" y="5398617"/>
-            <a:ext cx="173884" cy="308027"/>
-          </a:xfrm>
-          <a:prstGeom prst="rect">
-            <a:avLst/>
-          </a:prstGeom>
-          <a:solidFill>
-            <a:srgbClr val="F8F5EF"/>
-          </a:solidFill>
-          <a:ln>
-            <a:noFill/>
-          </a:ln>
-        </p:spPr>
-        <p:style>
-          <a:lnRef idx="1">
-            <a:schemeClr val="accent1"/>
-          </a:lnRef>
-          <a:fillRef idx="3">
-            <a:schemeClr val="accent1"/>
-          </a:fillRef>
-          <a:effectRef idx="2">
-            <a:schemeClr val="accent1"/>
-          </a:effectRef>
-          <a:fontRef idx="minor">
-            <a:schemeClr val="lt1"/>
-          </a:fontRef>
-        </p:style>
-        <p:txBody>
-          <a:bodyPr rtlCol="0" anchor="ctr"/>
-          <a:lstStyle/>
-          <a:p>
-            <a:pPr algn="ctr"/>
-          </a:p>
-        </p:txBody>
-      </p:sp>
-      <p:sp>
-        <p:nvSpPr>
-          <p:cNvPr id="27" name="Rectangle 26"/>
-          <p:cNvSpPr/>
-          <p:nvPr/>
-        </p:nvSpPr>
-        <p:spPr>
-          <a:xfrm>
-            <a:off x="14572534" y="5398617"/>
-            <a:ext cx="173884" cy="308027"/>
-          </a:xfrm>
-          <a:prstGeom prst="rect">
-            <a:avLst/>
-          </a:prstGeom>
-          <a:solidFill>
-            <a:srgbClr val="F8F5EF"/>
-          </a:solidFill>
-          <a:ln>
-            <a:noFill/>
-          </a:ln>
-        </p:spPr>
-        <p:style>
-          <a:lnRef idx="1">
-            <a:schemeClr val="accent1"/>
-          </a:lnRef>
-          <a:fillRef idx="3">
-            <a:schemeClr val="accent1"/>
-          </a:fillRef>
-          <a:effectRef idx="2">
-            <a:schemeClr val="accent1"/>
-          </a:effectRef>
-          <a:fontRef idx="minor">
-            <a:schemeClr val="lt1"/>
-          </a:fontRef>
-        </p:style>
-        <p:txBody>
-          <a:bodyPr rtlCol="0" anchor="ctr"/>
-          <a:lstStyle/>
-          <a:p>
-            <a:pPr algn="ctr"/>
-          </a:p>
-        </p:txBody>
-      </p:sp>
-      <p:sp>
-        <p:nvSpPr>
-          <p:cNvPr id="28" name="Rectangle 27"/>
-          <p:cNvSpPr/>
-          <p:nvPr/>
-        </p:nvSpPr>
-        <p:spPr>
-          <a:xfrm>
-            <a:off x="14102024" y="6441170"/>
-            <a:ext cx="173884" cy="308027"/>
-          </a:xfrm>
-          <a:prstGeom prst="rect">
-            <a:avLst/>
-          </a:prstGeom>
-          <a:solidFill>
-            <a:srgbClr val="F8F5EF"/>
-          </a:solidFill>
-          <a:ln>
-            <a:noFill/>
-          </a:ln>
-        </p:spPr>
-        <p:style>
-          <a:lnRef idx="1">
-            <a:schemeClr val="accent1"/>
-          </a:lnRef>
-          <a:fillRef idx="3">
-            <a:schemeClr val="accent1"/>
-          </a:fillRef>
-          <a:effectRef idx="2">
-            <a:schemeClr val="accent1"/>
-          </a:effectRef>
-          <a:fontRef idx="minor">
-            <a:schemeClr val="lt1"/>
-          </a:fontRef>
-        </p:style>
-        <p:txBody>
-          <a:bodyPr rtlCol="0" anchor="ctr"/>
-          <a:lstStyle/>
-          <a:p>
-            <a:pPr algn="ctr"/>
-          </a:p>
-        </p:txBody>
-      </p:sp>
-      <p:sp>
-        <p:nvSpPr>
-          <p:cNvPr id="29" name="Rectangle 28"/>
-          <p:cNvSpPr/>
-          <p:nvPr/>
-        </p:nvSpPr>
-        <p:spPr>
-          <a:xfrm>
-            <a:off x="14572534" y="6441170"/>
-            <a:ext cx="173884" cy="308027"/>
-          </a:xfrm>
-          <a:prstGeom prst="rect">
-            <a:avLst/>
-          </a:prstGeom>
-          <a:solidFill>
-            <a:srgbClr val="F8F5EF"/>
-          </a:solidFill>
-          <a:ln>
-            <a:noFill/>
-          </a:ln>
-        </p:spPr>
-        <p:style>
-          <a:lnRef idx="1">
-            <a:schemeClr val="accent1"/>
-          </a:lnRef>
-          <a:fillRef idx="3">
-            <a:schemeClr val="accent1"/>
-          </a:fillRef>
-          <a:effectRef idx="2">
-            <a:schemeClr val="accent1"/>
-          </a:effectRef>
-          <a:fontRef idx="minor">
-            <a:schemeClr val="lt1"/>
-          </a:fontRef>
-        </p:style>
-        <p:txBody>
-          <a:bodyPr rtlCol="0" anchor="ctr"/>
-          <a:lstStyle/>
-          <a:p>
-            <a:pPr algn="ctr"/>
-          </a:p>
-        </p:txBody>
-      </p:sp>
-      <p:sp>
-        <p:nvSpPr>
-          <p:cNvPr id="30" name="Rectangle 29"/>
-          <p:cNvSpPr/>
-          <p:nvPr/>
-        </p:nvSpPr>
-        <p:spPr>
-          <a:xfrm>
-            <a:off x="14102024" y="7483723"/>
-            <a:ext cx="173884" cy="308027"/>
-          </a:xfrm>
-          <a:prstGeom prst="rect">
-            <a:avLst/>
-          </a:prstGeom>
-          <a:solidFill>
-            <a:srgbClr val="F8F5EF"/>
-          </a:solidFill>
-          <a:ln>
-            <a:noFill/>
-          </a:ln>
-        </p:spPr>
-        <p:style>
-          <a:lnRef idx="1">
-            <a:schemeClr val="accent1"/>
-          </a:lnRef>
-          <a:fillRef idx="3">
-            <a:schemeClr val="accent1"/>
-          </a:fillRef>
-          <a:effectRef idx="2">
-            <a:schemeClr val="accent1"/>
-          </a:effectRef>
-          <a:fontRef idx="minor">
-            <a:schemeClr val="lt1"/>
-          </a:fontRef>
-        </p:style>
-        <p:txBody>
-          <a:bodyPr rtlCol="0" anchor="ctr"/>
-          <a:lstStyle/>
-          <a:p>
-            <a:pPr algn="ctr"/>
-          </a:p>
-        </p:txBody>
-      </p:sp>
-      <p:sp>
-        <p:nvSpPr>
-          <p:cNvPr id="31" name="Rectangle 30"/>
-          <p:cNvSpPr/>
-          <p:nvPr/>
-        </p:nvSpPr>
-        <p:spPr>
-          <a:xfrm>
-            <a:off x="14572534" y="7483723"/>
-            <a:ext cx="173884" cy="308027"/>
-          </a:xfrm>
-          <a:prstGeom prst="rect">
-            <a:avLst/>
-          </a:prstGeom>
-          <a:solidFill>
-            <a:srgbClr val="F8F5EF"/>
-          </a:solidFill>
-          <a:ln>
-            <a:noFill/>
-          </a:ln>
-        </p:spPr>
-        <p:style>
-          <a:lnRef idx="1">
-            <a:schemeClr val="accent1"/>
-          </a:lnRef>
-          <a:fillRef idx="3">
-            <a:schemeClr val="accent1"/>
-          </a:fillRef>
-          <a:effectRef idx="2">
-            <a:schemeClr val="accent1"/>
-          </a:effectRef>
-          <a:fontRef idx="minor">
-            <a:schemeClr val="lt1"/>
-          </a:fontRef>
-        </p:style>
-        <p:txBody>
-          <a:bodyPr rtlCol="0" anchor="ctr"/>
-          <a:lstStyle/>
-          <a:p>
-            <a:pPr algn="ctr"/>
-          </a:p>
-        </p:txBody>
-      </p:sp>
-      <p:sp>
-        <p:nvSpPr>
-          <p:cNvPr id="32" name="Rectangle 31"/>
-          <p:cNvSpPr/>
-          <p:nvPr/>
-        </p:nvSpPr>
-        <p:spPr>
-          <a:xfrm>
-            <a:off x="15071323" y="3123956"/>
-            <a:ext cx="1022847" cy="6065763"/>
-          </a:xfrm>
-          <a:prstGeom prst="rect">
-            <a:avLst/>
-          </a:prstGeom>
-          <a:solidFill>
-            <a:srgbClr val="317D74"/>
-          </a:solidFill>
-          <a:ln>
-            <a:noFill/>
-          </a:ln>
-        </p:spPr>
-        <p:style>
-          <a:lnRef idx="1">
-            <a:schemeClr val="accent1"/>
-          </a:lnRef>
-          <a:fillRef idx="3">
-            <a:schemeClr val="accent1"/>
-          </a:fillRef>
-          <a:effectRef idx="2">
-            <a:schemeClr val="accent1"/>
-          </a:effectRef>
-          <a:fontRef idx="minor">
-            <a:schemeClr val="lt1"/>
-          </a:fontRef>
-        </p:style>
-        <p:txBody>
-          <a:bodyPr rtlCol="0" anchor="ctr"/>
-          <a:lstStyle/>
-          <a:p>
-            <a:pPr algn="ctr"/>
-          </a:p>
-        </p:txBody>
-      </p:sp>
-      <p:sp>
-        <p:nvSpPr>
-          <p:cNvPr id="33" name="Rectangle 32"/>
-          <p:cNvSpPr/>
-          <p:nvPr/>
-        </p:nvSpPr>
-        <p:spPr>
-          <a:xfrm>
-            <a:off x="15245207" y="4337108"/>
-            <a:ext cx="173884" cy="394274"/>
-          </a:xfrm>
-          <a:prstGeom prst="rect">
-            <a:avLst/>
-          </a:prstGeom>
-          <a:solidFill>
-            <a:srgbClr val="F8F5EF"/>
-          </a:solidFill>
-          <a:ln>
-            <a:noFill/>
-          </a:ln>
-        </p:spPr>
-        <p:style>
-          <a:lnRef idx="1">
-            <a:schemeClr val="accent1"/>
-          </a:lnRef>
-          <a:fillRef idx="3">
-            <a:schemeClr val="accent1"/>
-          </a:fillRef>
-          <a:effectRef idx="2">
-            <a:schemeClr val="accent1"/>
-          </a:effectRef>
-          <a:fontRef idx="minor">
-            <a:schemeClr val="lt1"/>
-          </a:fontRef>
-        </p:style>
-        <p:txBody>
-          <a:bodyPr rtlCol="0" anchor="ctr"/>
-          <a:lstStyle/>
-          <a:p>
-            <a:pPr algn="ctr"/>
-          </a:p>
-        </p:txBody>
-      </p:sp>
-      <p:sp>
-        <p:nvSpPr>
-          <p:cNvPr id="34" name="Rectangle 33"/>
-          <p:cNvSpPr/>
-          <p:nvPr/>
-        </p:nvSpPr>
-        <p:spPr>
-          <a:xfrm>
-            <a:off x="15715717" y="4337108"/>
-            <a:ext cx="173884" cy="394274"/>
-          </a:xfrm>
-          <a:prstGeom prst="rect">
-            <a:avLst/>
-          </a:prstGeom>
-          <a:solidFill>
-            <a:srgbClr val="F8F5EF"/>
-          </a:solidFill>
-          <a:ln>
-            <a:noFill/>
-          </a:ln>
-        </p:spPr>
-        <p:style>
-          <a:lnRef idx="1">
-            <a:schemeClr val="accent1"/>
-          </a:lnRef>
-          <a:fillRef idx="3">
-            <a:schemeClr val="accent1"/>
-          </a:fillRef>
-          <a:effectRef idx="2">
-            <a:schemeClr val="accent1"/>
-          </a:effectRef>
-          <a:fontRef idx="minor">
-            <a:schemeClr val="lt1"/>
-          </a:fontRef>
-        </p:style>
-        <p:txBody>
-          <a:bodyPr rtlCol="0" anchor="ctr"/>
-          <a:lstStyle/>
-          <a:p>
-            <a:pPr algn="ctr"/>
-          </a:p>
-        </p:txBody>
-      </p:sp>
-      <p:sp>
-        <p:nvSpPr>
-          <p:cNvPr id="35" name="Rectangle 34"/>
-          <p:cNvSpPr/>
-          <p:nvPr/>
-        </p:nvSpPr>
-        <p:spPr>
-          <a:xfrm>
-            <a:off x="15245207" y="5671576"/>
-            <a:ext cx="173884" cy="394274"/>
-          </a:xfrm>
-          <a:prstGeom prst="rect">
-            <a:avLst/>
-          </a:prstGeom>
-          <a:solidFill>
-            <a:srgbClr val="F8F5EF"/>
-          </a:solidFill>
-          <a:ln>
-            <a:noFill/>
-          </a:ln>
-        </p:spPr>
-        <p:style>
-          <a:lnRef idx="1">
-            <a:schemeClr val="accent1"/>
-          </a:lnRef>
-          <a:fillRef idx="3">
-            <a:schemeClr val="accent1"/>
-          </a:fillRef>
-          <a:effectRef idx="2">
-            <a:schemeClr val="accent1"/>
-          </a:effectRef>
-          <a:fontRef idx="minor">
-            <a:schemeClr val="lt1"/>
-          </a:fontRef>
-        </p:style>
-        <p:txBody>
-          <a:bodyPr rtlCol="0" anchor="ctr"/>
-          <a:lstStyle/>
-          <a:p>
-            <a:pPr algn="ctr"/>
-          </a:p>
-        </p:txBody>
-      </p:sp>
-      <p:sp>
-        <p:nvSpPr>
-          <p:cNvPr id="36" name="Rectangle 35"/>
-          <p:cNvSpPr/>
-          <p:nvPr/>
-        </p:nvSpPr>
-        <p:spPr>
-          <a:xfrm>
-            <a:off x="15715717" y="5671576"/>
-            <a:ext cx="173884" cy="394274"/>
-          </a:xfrm>
-          <a:prstGeom prst="rect">
-            <a:avLst/>
-          </a:prstGeom>
-          <a:solidFill>
-            <a:srgbClr val="F8F5EF"/>
-          </a:solidFill>
-          <a:ln>
-            <a:noFill/>
-          </a:ln>
-        </p:spPr>
-        <p:style>
-          <a:lnRef idx="1">
-            <a:schemeClr val="accent1"/>
-          </a:lnRef>
-          <a:fillRef idx="3">
-            <a:schemeClr val="accent1"/>
-          </a:fillRef>
-          <a:effectRef idx="2">
-            <a:schemeClr val="accent1"/>
-          </a:effectRef>
-          <a:fontRef idx="minor">
-            <a:schemeClr val="lt1"/>
-          </a:fontRef>
-        </p:style>
-        <p:txBody>
-          <a:bodyPr rtlCol="0" anchor="ctr"/>
-          <a:lstStyle/>
-          <a:p>
-            <a:pPr algn="ctr"/>
-          </a:p>
-        </p:txBody>
-      </p:sp>
-      <p:sp>
-        <p:nvSpPr>
-          <p:cNvPr id="37" name="Rectangle 36"/>
-          <p:cNvSpPr/>
-          <p:nvPr/>
-        </p:nvSpPr>
-        <p:spPr>
-          <a:xfrm>
-            <a:off x="15245207" y="7006045"/>
-            <a:ext cx="173884" cy="394274"/>
-          </a:xfrm>
-          <a:prstGeom prst="rect">
-            <a:avLst/>
-          </a:prstGeom>
-          <a:solidFill>
-            <a:srgbClr val="F8F5EF"/>
-          </a:solidFill>
-          <a:ln>
-            <a:noFill/>
-          </a:ln>
-        </p:spPr>
-        <p:style>
-          <a:lnRef idx="1">
-            <a:schemeClr val="accent1"/>
-          </a:lnRef>
-          <a:fillRef idx="3">
-            <a:schemeClr val="accent1"/>
-          </a:fillRef>
-          <a:effectRef idx="2">
-            <a:schemeClr val="accent1"/>
-          </a:effectRef>
-          <a:fontRef idx="minor">
-            <a:schemeClr val="lt1"/>
-          </a:fontRef>
-        </p:style>
-        <p:txBody>
-          <a:bodyPr rtlCol="0" anchor="ctr"/>
-          <a:lstStyle/>
-          <a:p>
-            <a:pPr algn="ctr"/>
-          </a:p>
-        </p:txBody>
-      </p:sp>
-      <p:sp>
-        <p:nvSpPr>
-          <p:cNvPr id="38" name="Rectangle 37"/>
-          <p:cNvSpPr/>
-          <p:nvPr/>
-        </p:nvSpPr>
-        <p:spPr>
-          <a:xfrm>
-            <a:off x="15715717" y="7006045"/>
-            <a:ext cx="173884" cy="394274"/>
-          </a:xfrm>
-          <a:prstGeom prst="rect">
-            <a:avLst/>
-          </a:prstGeom>
-          <a:solidFill>
-            <a:srgbClr val="F8F5EF"/>
-          </a:solidFill>
-          <a:ln>
-            <a:noFill/>
-          </a:ln>
-        </p:spPr>
-        <p:style>
-          <a:lnRef idx="1">
-            <a:schemeClr val="accent1"/>
-          </a:lnRef>
-          <a:fillRef idx="3">
-            <a:schemeClr val="accent1"/>
-          </a:fillRef>
-          <a:effectRef idx="2">
-            <a:schemeClr val="accent1"/>
-          </a:effectRef>
-          <a:fontRef idx="minor">
-            <a:schemeClr val="lt1"/>
-          </a:fontRef>
-        </p:style>
-        <p:txBody>
-          <a:bodyPr rtlCol="0" anchor="ctr"/>
-          <a:lstStyle/>
-          <a:p>
-            <a:pPr algn="ctr"/>
-          </a:p>
-        </p:txBody>
-      </p:sp>
-      <p:sp>
-        <p:nvSpPr>
-          <p:cNvPr id="39" name="Rectangle 38"/>
-          <p:cNvSpPr/>
-          <p:nvPr/>
-        </p:nvSpPr>
-        <p:spPr>
-          <a:xfrm>
-            <a:off x="16274674" y="4956322"/>
-            <a:ext cx="1022847" cy="4233397"/>
-          </a:xfrm>
-          <a:prstGeom prst="rect">
-            <a:avLst/>
-          </a:prstGeom>
-          <a:solidFill>
-            <a:srgbClr val="276D61"/>
-          </a:solidFill>
-          <a:ln>
-            <a:noFill/>
-          </a:ln>
-        </p:spPr>
-        <p:style>
-          <a:lnRef idx="1">
-            <a:schemeClr val="accent1"/>
-          </a:lnRef>
-          <a:fillRef idx="3">
-            <a:schemeClr val="accent1"/>
-          </a:fillRef>
-          <a:effectRef idx="2">
-            <a:schemeClr val="accent1"/>
-          </a:effectRef>
-          <a:fontRef idx="minor">
-            <a:schemeClr val="lt1"/>
-          </a:fontRef>
-        </p:style>
-        <p:txBody>
-          <a:bodyPr rtlCol="0" anchor="ctr"/>
-          <a:lstStyle/>
-          <a:p>
-            <a:pPr algn="ctr"/>
-          </a:p>
-        </p:txBody>
-      </p:sp>
-      <p:sp>
-        <p:nvSpPr>
-          <p:cNvPr id="40" name="Rectangle 39"/>
-          <p:cNvSpPr/>
-          <p:nvPr/>
-        </p:nvSpPr>
-        <p:spPr>
-          <a:xfrm>
-            <a:off x="16448558" y="5803001"/>
-            <a:ext cx="173884" cy="275170"/>
-          </a:xfrm>
-          <a:prstGeom prst="rect">
-            <a:avLst/>
-          </a:prstGeom>
-          <a:solidFill>
-            <a:srgbClr val="F8F5EF"/>
-          </a:solidFill>
-          <a:ln>
-            <a:noFill/>
-          </a:ln>
-        </p:spPr>
-        <p:style>
-          <a:lnRef idx="1">
-            <a:schemeClr val="accent1"/>
-          </a:lnRef>
-          <a:fillRef idx="3">
-            <a:schemeClr val="accent1"/>
-          </a:fillRef>
-          <a:effectRef idx="2">
-            <a:schemeClr val="accent1"/>
-          </a:effectRef>
-          <a:fontRef idx="minor">
-            <a:schemeClr val="lt1"/>
-          </a:fontRef>
-        </p:style>
-        <p:txBody>
-          <a:bodyPr rtlCol="0" anchor="ctr"/>
-          <a:lstStyle/>
-          <a:p>
-            <a:pPr algn="ctr"/>
-          </a:p>
-        </p:txBody>
-      </p:sp>
-      <p:sp>
-        <p:nvSpPr>
-          <p:cNvPr id="41" name="Rectangle 40"/>
-          <p:cNvSpPr/>
-          <p:nvPr/>
-        </p:nvSpPr>
-        <p:spPr>
-          <a:xfrm>
-            <a:off x="16919068" y="5803001"/>
-            <a:ext cx="173884" cy="275170"/>
-          </a:xfrm>
-          <a:prstGeom prst="rect">
-            <a:avLst/>
-          </a:prstGeom>
-          <a:solidFill>
-            <a:srgbClr val="F8F5EF"/>
-          </a:solidFill>
-          <a:ln>
-            <a:noFill/>
-          </a:ln>
-        </p:spPr>
-        <p:style>
-          <a:lnRef idx="1">
-            <a:schemeClr val="accent1"/>
-          </a:lnRef>
-          <a:fillRef idx="3">
-            <a:schemeClr val="accent1"/>
-          </a:fillRef>
-          <a:effectRef idx="2">
-            <a:schemeClr val="accent1"/>
-          </a:effectRef>
-          <a:fontRef idx="minor">
-            <a:schemeClr val="lt1"/>
-          </a:fontRef>
-        </p:style>
-        <p:txBody>
-          <a:bodyPr rtlCol="0" anchor="ctr"/>
-          <a:lstStyle/>
-          <a:p>
-            <a:pPr algn="ctr"/>
-          </a:p>
-        </p:txBody>
-      </p:sp>
-      <p:sp>
-        <p:nvSpPr>
-          <p:cNvPr id="42" name="Rectangle 41"/>
-          <p:cNvSpPr/>
-          <p:nvPr/>
-        </p:nvSpPr>
-        <p:spPr>
-          <a:xfrm>
-            <a:off x="16448558" y="6734349"/>
-            <a:ext cx="173884" cy="275170"/>
-          </a:xfrm>
-          <a:prstGeom prst="rect">
-            <a:avLst/>
-          </a:prstGeom>
-          <a:solidFill>
-            <a:srgbClr val="F8F5EF"/>
-          </a:solidFill>
-          <a:ln>
-            <a:noFill/>
-          </a:ln>
-        </p:spPr>
-        <p:style>
-          <a:lnRef idx="1">
-            <a:schemeClr val="accent1"/>
-          </a:lnRef>
-          <a:fillRef idx="3">
-            <a:schemeClr val="accent1"/>
-          </a:fillRef>
-          <a:effectRef idx="2">
-            <a:schemeClr val="accent1"/>
-          </a:effectRef>
-          <a:fontRef idx="minor">
-            <a:schemeClr val="lt1"/>
-          </a:fontRef>
-        </p:style>
-        <p:txBody>
-          <a:bodyPr rtlCol="0" anchor="ctr"/>
-          <a:lstStyle/>
-          <a:p>
-            <a:pPr algn="ctr"/>
-          </a:p>
-        </p:txBody>
-      </p:sp>
-      <p:sp>
-        <p:nvSpPr>
-          <p:cNvPr id="43" name="Rectangle 42"/>
-          <p:cNvSpPr/>
-          <p:nvPr/>
-        </p:nvSpPr>
-        <p:spPr>
-          <a:xfrm>
-            <a:off x="16919068" y="6734349"/>
-            <a:ext cx="173884" cy="275170"/>
-          </a:xfrm>
-          <a:prstGeom prst="rect">
-            <a:avLst/>
-          </a:prstGeom>
-          <a:solidFill>
-            <a:srgbClr val="F8F5EF"/>
-          </a:solidFill>
-          <a:ln>
-            <a:noFill/>
-          </a:ln>
-        </p:spPr>
-        <p:style>
-          <a:lnRef idx="1">
-            <a:schemeClr val="accent1"/>
-          </a:lnRef>
-          <a:fillRef idx="3">
-            <a:schemeClr val="accent1"/>
-          </a:fillRef>
-          <a:effectRef idx="2">
-            <a:schemeClr val="accent1"/>
-          </a:effectRef>
-          <a:fontRef idx="minor">
-            <a:schemeClr val="lt1"/>
-          </a:fontRef>
-        </p:style>
-        <p:txBody>
-          <a:bodyPr rtlCol="0" anchor="ctr"/>
-          <a:lstStyle/>
-          <a:p>
-            <a:pPr algn="ctr"/>
-          </a:p>
-        </p:txBody>
-      </p:sp>
-      <p:sp>
-        <p:nvSpPr>
-          <p:cNvPr id="44" name="Rectangle 43"/>
-          <p:cNvSpPr/>
-          <p:nvPr/>
-        </p:nvSpPr>
-        <p:spPr>
-          <a:xfrm>
-            <a:off x="16448558" y="7665696"/>
-            <a:ext cx="173884" cy="275170"/>
-          </a:xfrm>
-          <a:prstGeom prst="rect">
-            <a:avLst/>
-          </a:prstGeom>
-          <a:solidFill>
-            <a:srgbClr val="F8F5EF"/>
-          </a:solidFill>
-          <a:ln>
-            <a:noFill/>
-          </a:ln>
-        </p:spPr>
-        <p:style>
-          <a:lnRef idx="1">
-            <a:schemeClr val="accent1"/>
-          </a:lnRef>
-          <a:fillRef idx="3">
-            <a:schemeClr val="accent1"/>
-          </a:fillRef>
-          <a:effectRef idx="2">
-            <a:schemeClr val="accent1"/>
-          </a:effectRef>
-          <a:fontRef idx="minor">
-            <a:schemeClr val="lt1"/>
-          </a:fontRef>
-        </p:style>
-        <p:txBody>
-          <a:bodyPr rtlCol="0" anchor="ctr"/>
-          <a:lstStyle/>
-          <a:p>
-            <a:pPr algn="ctr"/>
-          </a:p>
-        </p:txBody>
-      </p:sp>
-      <p:sp>
-        <p:nvSpPr>
-          <p:cNvPr id="45" name="Rectangle 44"/>
-          <p:cNvSpPr/>
-          <p:nvPr/>
-        </p:nvSpPr>
-        <p:spPr>
-          <a:xfrm>
-            <a:off x="16919068" y="7665696"/>
-            <a:ext cx="173884" cy="275170"/>
-          </a:xfrm>
-          <a:prstGeom prst="rect">
-            <a:avLst/>
-          </a:prstGeom>
-          <a:solidFill>
-            <a:srgbClr val="F8F5EF"/>
-          </a:solidFill>
-          <a:ln>
-            <a:noFill/>
-          </a:ln>
-        </p:spPr>
-        <p:style>
-          <a:lnRef idx="1">
-            <a:schemeClr val="accent1"/>
-          </a:lnRef>
-          <a:fillRef idx="3">
-            <a:schemeClr val="accent1"/>
-          </a:fillRef>
-          <a:effectRef idx="2">
-            <a:schemeClr val="accent1"/>
-          </a:effectRef>
-          <a:fontRef idx="minor">
-            <a:schemeClr val="lt1"/>
-          </a:fontRef>
-        </p:style>
-        <p:txBody>
-          <a:bodyPr rtlCol="0" anchor="ctr"/>
-          <a:lstStyle/>
-          <a:p>
-            <a:pPr algn="ctr"/>
-          </a:p>
-        </p:txBody>
-      </p:sp>
-      <p:sp>
-        <p:nvSpPr>
-          <p:cNvPr id="46" name="Rectangle 45"/>
-          <p:cNvSpPr/>
-          <p:nvPr/>
-        </p:nvSpPr>
-        <p:spPr>
-          <a:xfrm>
-            <a:off x="11521440" y="8810609"/>
-            <a:ext cx="6016752" cy="379110"/>
-          </a:xfrm>
-          <a:prstGeom prst="rect">
-            <a:avLst/>
-          </a:prstGeom>
-          <a:solidFill>
-            <a:srgbClr val="125449"/>
-          </a:solidFill>
-          <a:ln>
-            <a:noFill/>
-          </a:ln>
-        </p:spPr>
-        <p:style>
-          <a:lnRef idx="1">
-            <a:schemeClr val="accent1"/>
-          </a:lnRef>
-          <a:fillRef idx="3">
-            <a:schemeClr val="accent1"/>
-          </a:fillRef>
-          <a:effectRef idx="2">
-            <a:schemeClr val="accent1"/>
-          </a:effectRef>
-          <a:fontRef idx="minor">
-            <a:schemeClr val="lt1"/>
-          </a:fontRef>
-        </p:style>
-        <p:txBody>
-          <a:bodyPr rtlCol="0" anchor="ctr"/>
-          <a:lstStyle/>
-          <a:p>
-            <a:pPr algn="ctr"/>
-          </a:p>
-        </p:txBody>
-      </p:sp>
-      <p:sp>
-        <p:nvSpPr>
-          <p:cNvPr id="47" name="Rounded Rectangle 46"/>
-          <p:cNvSpPr/>
-          <p:nvPr/>
-        </p:nvSpPr>
-        <p:spPr>
-          <a:xfrm>
-            <a:off x="1152144" y="3355848"/>
-            <a:ext cx="2880360" cy="493776"/>
-          </a:xfrm>
-          <a:prstGeom prst="roundRect">
-            <a:avLst>
-              <a:gd name="adj" fmla="val 7000"/>
-            </a:avLst>
-          </a:prstGeom>
-          <a:solidFill>
-            <a:srgbClr val="125449"/>
-          </a:solidFill>
-          <a:ln>
-            <a:noFill/>
-          </a:ln>
-        </p:spPr>
-        <p:style>
-          <a:lnRef idx="1">
-            <a:schemeClr val="accent1"/>
-          </a:lnRef>
-          <a:fillRef idx="3">
-            <a:schemeClr val="accent1"/>
-          </a:fillRef>
-          <a:effectRef idx="2">
-            <a:schemeClr val="accent1"/>
-          </a:effectRef>
-          <a:fontRef idx="minor">
-            <a:schemeClr val="lt1"/>
-          </a:fontRef>
-        </p:style>
-        <p:txBody>
-          <a:bodyPr rtlCol="0" anchor="ctr"/>
-          <a:lstStyle/>
-          <a:p>
-            <a:pPr algn="ctr"/>
-          </a:p>
-        </p:txBody>
-      </p:sp>
-      <p:sp>
-        <p:nvSpPr>
-          <p:cNvPr id="48" name="TextBox 47"/>
+          <p:cNvPr id="12" name="TextBox 11"/>
           <p:cNvSpPr txBox="1"/>
           <p:nvPr/>
         </p:nvSpPr>
@@ -18930,7 +14223,7 @@
       </p:sp>
       <p:sp>
         <p:nvSpPr>
-          <p:cNvPr id="49" name="TextBox 48"/>
+          <p:cNvPr id="13" name="TextBox 12"/>
           <p:cNvSpPr txBox="1"/>
           <p:nvPr/>
         </p:nvSpPr>
@@ -18966,7 +14259,7 @@
       </p:sp>
       <p:sp>
         <p:nvSpPr>
-          <p:cNvPr id="50" name="TextBox 49"/>
+          <p:cNvPr id="14" name="TextBox 13"/>
           <p:cNvSpPr txBox="1"/>
           <p:nvPr/>
         </p:nvSpPr>
@@ -19002,7 +14295,7 @@
       </p:sp>
       <p:cxnSp>
         <p:nvCxnSpPr>
-          <p:cNvPr id="51" name="Connector 50"/>
+          <p:cNvPr id="15" name="Connector 14"/>
           <p:cNvCxnSpPr/>
           <p:nvPr/>
         </p:nvCxnSpPr>
@@ -19037,7 +14330,7 @@
       </p:cxnSp>
       <p:sp>
         <p:nvSpPr>
-          <p:cNvPr id="52" name="TextBox 51"/>
+          <p:cNvPr id="16" name="TextBox 15"/>
           <p:cNvSpPr txBox="1"/>
           <p:nvPr/>
         </p:nvSpPr>
@@ -19073,7 +14366,7 @@
       </p:sp>
       <p:sp>
         <p:nvSpPr>
-          <p:cNvPr id="53" name="TextBox 52"/>
+          <p:cNvPr id="17" name="TextBox 16"/>
           <p:cNvSpPr txBox="1"/>
           <p:nvPr/>
         </p:nvSpPr>
@@ -19109,7 +14402,7 @@
       </p:sp>
       <p:sp>
         <p:nvSpPr>
-          <p:cNvPr id="54" name="TextBox 53"/>
+          <p:cNvPr id="18" name="TextBox 17"/>
           <p:cNvSpPr txBox="1"/>
           <p:nvPr/>
         </p:nvSpPr>
@@ -19145,7 +14438,7 @@
       </p:sp>
       <p:sp>
         <p:nvSpPr>
-          <p:cNvPr id="55" name="TextBox 54"/>
+          <p:cNvPr id="19" name="TextBox 18"/>
           <p:cNvSpPr txBox="1"/>
           <p:nvPr/>
         </p:nvSpPr>
@@ -19181,7 +14474,7 @@
       </p:sp>
       <p:sp>
         <p:nvSpPr>
-          <p:cNvPr id="56" name="TextBox 55"/>
+          <p:cNvPr id="20" name="TextBox 19"/>
           <p:cNvSpPr txBox="1"/>
           <p:nvPr/>
         </p:nvSpPr>
@@ -20681,1602 +15974,33 @@
           </a:p>
         </p:txBody>
       </p:sp>
-      <p:sp>
-        <p:nvSpPr>
-          <p:cNvPr id="12" name="Rounded Rectangle 11"/>
-          <p:cNvSpPr/>
-          <p:nvPr/>
-        </p:nvSpPr>
+      <p:pic>
+        <p:nvPicPr>
+          <p:cNvPr id="12" name="Picture 11" descr="image.jpg"/>
+          <p:cNvPicPr>
+            <a:picLocks noChangeAspect="1"/>
+          </p:cNvPicPr>
+          <p:nvPr/>
+        </p:nvPicPr>
+        <p:blipFill>
+          <a:blip r:embed="rId3"/>
+          <a:stretch>
+            <a:fillRect/>
+          </a:stretch>
+        </p:blipFill>
         <p:spPr>
           <a:xfrm>
             <a:off x="12435840" y="3099816"/>
             <a:ext cx="4946904" cy="2340864"/>
           </a:xfrm>
-          <a:prstGeom prst="roundRect">
-            <a:avLst>
-              <a:gd name="adj" fmla="val 7000"/>
-            </a:avLst>
-          </a:prstGeom>
-          <a:solidFill>
-            <a:srgbClr val="EAF0E9"/>
-          </a:solidFill>
-          <a:ln>
-            <a:noFill/>
-          </a:ln>
-        </p:spPr>
-        <p:style>
-          <a:lnRef idx="1">
-            <a:schemeClr val="accent1"/>
-          </a:lnRef>
-          <a:fillRef idx="3">
-            <a:schemeClr val="accent1"/>
-          </a:fillRef>
-          <a:effectRef idx="2">
-            <a:schemeClr val="accent1"/>
-          </a:effectRef>
-          <a:fontRef idx="minor">
-            <a:schemeClr val="lt1"/>
-          </a:fontRef>
-        </p:style>
-        <p:txBody>
-          <a:bodyPr rtlCol="0" anchor="ctr"/>
-          <a:lstStyle/>
-          <a:p>
-            <a:pPr algn="ctr"/>
-          </a:p>
-        </p:txBody>
-      </p:sp>
-      <p:sp>
-        <p:nvSpPr>
-          <p:cNvPr id="13" name="Rectangle 12"/>
-          <p:cNvSpPr/>
-          <p:nvPr/>
-        </p:nvSpPr>
-        <p:spPr>
-          <a:xfrm>
-            <a:off x="12633716" y="3942527"/>
-            <a:ext cx="840973" cy="1498152"/>
-          </a:xfrm>
-          <a:prstGeom prst="rect">
-            <a:avLst/>
-          </a:prstGeom>
-          <a:solidFill>
-            <a:srgbClr val="8DAE9D"/>
-          </a:solidFill>
-          <a:ln>
-            <a:noFill/>
-          </a:ln>
-        </p:spPr>
-        <p:style>
-          <a:lnRef idx="1">
-            <a:schemeClr val="accent1"/>
-          </a:lnRef>
-          <a:fillRef idx="3">
-            <a:schemeClr val="accent1"/>
-          </a:fillRef>
-          <a:effectRef idx="2">
-            <a:schemeClr val="accent1"/>
-          </a:effectRef>
-          <a:fontRef idx="minor">
-            <a:schemeClr val="lt1"/>
-          </a:fontRef>
-        </p:style>
-        <p:txBody>
-          <a:bodyPr rtlCol="0" anchor="ctr"/>
-          <a:lstStyle/>
-          <a:p>
-            <a:pPr algn="ctr"/>
-          </a:p>
-        </p:txBody>
-      </p:sp>
-      <p:sp>
-        <p:nvSpPr>
-          <p:cNvPr id="14" name="Rectangle 13"/>
-          <p:cNvSpPr/>
-          <p:nvPr/>
-        </p:nvSpPr>
-        <p:spPr>
-          <a:xfrm>
-            <a:off x="12776681" y="4242157"/>
-            <a:ext cx="142965" cy="97379"/>
-          </a:xfrm>
-          <a:prstGeom prst="rect">
-            <a:avLst/>
-          </a:prstGeom>
-          <a:solidFill>
-            <a:srgbClr val="F8F5EF"/>
-          </a:solidFill>
-          <a:ln>
-            <a:noFill/>
-          </a:ln>
-        </p:spPr>
-        <p:style>
-          <a:lnRef idx="1">
-            <a:schemeClr val="accent1"/>
-          </a:lnRef>
-          <a:fillRef idx="3">
-            <a:schemeClr val="accent1"/>
-          </a:fillRef>
-          <a:effectRef idx="2">
-            <a:schemeClr val="accent1"/>
-          </a:effectRef>
-          <a:fontRef idx="minor">
-            <a:schemeClr val="lt1"/>
-          </a:fontRef>
-        </p:style>
-        <p:txBody>
-          <a:bodyPr rtlCol="0" anchor="ctr"/>
-          <a:lstStyle/>
-          <a:p>
-            <a:pPr algn="ctr"/>
-          </a:p>
-        </p:txBody>
-      </p:sp>
-      <p:sp>
-        <p:nvSpPr>
-          <p:cNvPr id="15" name="Rectangle 14"/>
-          <p:cNvSpPr/>
-          <p:nvPr/>
-        </p:nvSpPr>
-        <p:spPr>
-          <a:xfrm>
-            <a:off x="13163529" y="4242157"/>
-            <a:ext cx="142965" cy="97379"/>
-          </a:xfrm>
-          <a:prstGeom prst="rect">
-            <a:avLst/>
-          </a:prstGeom>
-          <a:solidFill>
-            <a:srgbClr val="F8F5EF"/>
-          </a:solidFill>
-          <a:ln>
-            <a:noFill/>
-          </a:ln>
-        </p:spPr>
-        <p:style>
-          <a:lnRef idx="1">
-            <a:schemeClr val="accent1"/>
-          </a:lnRef>
-          <a:fillRef idx="3">
-            <a:schemeClr val="accent1"/>
-          </a:fillRef>
-          <a:effectRef idx="2">
-            <a:schemeClr val="accent1"/>
-          </a:effectRef>
-          <a:fontRef idx="minor">
-            <a:schemeClr val="lt1"/>
-          </a:fontRef>
-        </p:style>
-        <p:txBody>
-          <a:bodyPr rtlCol="0" anchor="ctr"/>
-          <a:lstStyle/>
-          <a:p>
-            <a:pPr algn="ctr"/>
-          </a:p>
-        </p:txBody>
-      </p:sp>
-      <p:sp>
-        <p:nvSpPr>
-          <p:cNvPr id="16" name="Rectangle 15"/>
-          <p:cNvSpPr/>
-          <p:nvPr/>
-        </p:nvSpPr>
-        <p:spPr>
-          <a:xfrm>
-            <a:off x="12776681" y="4571751"/>
-            <a:ext cx="142965" cy="97379"/>
-          </a:xfrm>
-          <a:prstGeom prst="rect">
-            <a:avLst/>
-          </a:prstGeom>
-          <a:solidFill>
-            <a:srgbClr val="F8F5EF"/>
-          </a:solidFill>
-          <a:ln>
-            <a:noFill/>
-          </a:ln>
-        </p:spPr>
-        <p:style>
-          <a:lnRef idx="1">
-            <a:schemeClr val="accent1"/>
-          </a:lnRef>
-          <a:fillRef idx="3">
-            <a:schemeClr val="accent1"/>
-          </a:fillRef>
-          <a:effectRef idx="2">
-            <a:schemeClr val="accent1"/>
-          </a:effectRef>
-          <a:fontRef idx="minor">
-            <a:schemeClr val="lt1"/>
-          </a:fontRef>
-        </p:style>
-        <p:txBody>
-          <a:bodyPr rtlCol="0" anchor="ctr"/>
-          <a:lstStyle/>
-          <a:p>
-            <a:pPr algn="ctr"/>
-          </a:p>
-        </p:txBody>
-      </p:sp>
-      <p:sp>
-        <p:nvSpPr>
-          <p:cNvPr id="17" name="Rectangle 16"/>
-          <p:cNvSpPr/>
-          <p:nvPr/>
-        </p:nvSpPr>
-        <p:spPr>
-          <a:xfrm>
-            <a:off x="13163529" y="4571751"/>
-            <a:ext cx="142965" cy="97379"/>
-          </a:xfrm>
-          <a:prstGeom prst="rect">
-            <a:avLst/>
-          </a:prstGeom>
-          <a:solidFill>
-            <a:srgbClr val="F8F5EF"/>
-          </a:solidFill>
-          <a:ln>
-            <a:noFill/>
-          </a:ln>
-        </p:spPr>
-        <p:style>
-          <a:lnRef idx="1">
-            <a:schemeClr val="accent1"/>
-          </a:lnRef>
-          <a:fillRef idx="3">
-            <a:schemeClr val="accent1"/>
-          </a:fillRef>
-          <a:effectRef idx="2">
-            <a:schemeClr val="accent1"/>
-          </a:effectRef>
-          <a:fontRef idx="minor">
-            <a:schemeClr val="lt1"/>
-          </a:fontRef>
-        </p:style>
-        <p:txBody>
-          <a:bodyPr rtlCol="0" anchor="ctr"/>
-          <a:lstStyle/>
-          <a:p>
-            <a:pPr algn="ctr"/>
-          </a:p>
-        </p:txBody>
-      </p:sp>
-      <p:sp>
-        <p:nvSpPr>
-          <p:cNvPr id="18" name="Rectangle 17"/>
-          <p:cNvSpPr/>
-          <p:nvPr/>
-        </p:nvSpPr>
-        <p:spPr>
-          <a:xfrm>
-            <a:off x="12776681" y="4901344"/>
-            <a:ext cx="142965" cy="97379"/>
-          </a:xfrm>
-          <a:prstGeom prst="rect">
-            <a:avLst/>
-          </a:prstGeom>
-          <a:solidFill>
-            <a:srgbClr val="F8F5EF"/>
-          </a:solidFill>
-          <a:ln>
-            <a:noFill/>
-          </a:ln>
-        </p:spPr>
-        <p:style>
-          <a:lnRef idx="1">
-            <a:schemeClr val="accent1"/>
-          </a:lnRef>
-          <a:fillRef idx="3">
-            <a:schemeClr val="accent1"/>
-          </a:fillRef>
-          <a:effectRef idx="2">
-            <a:schemeClr val="accent1"/>
-          </a:effectRef>
-          <a:fontRef idx="minor">
-            <a:schemeClr val="lt1"/>
-          </a:fontRef>
-        </p:style>
-        <p:txBody>
-          <a:bodyPr rtlCol="0" anchor="ctr"/>
-          <a:lstStyle/>
-          <a:p>
-            <a:pPr algn="ctr"/>
-          </a:p>
-        </p:txBody>
-      </p:sp>
-      <p:sp>
-        <p:nvSpPr>
-          <p:cNvPr id="19" name="Rectangle 18"/>
-          <p:cNvSpPr/>
-          <p:nvPr/>
-        </p:nvSpPr>
-        <p:spPr>
-          <a:xfrm>
-            <a:off x="13163529" y="4901344"/>
-            <a:ext cx="142965" cy="97379"/>
-          </a:xfrm>
-          <a:prstGeom prst="rect">
-            <a:avLst/>
-          </a:prstGeom>
-          <a:solidFill>
-            <a:srgbClr val="F8F5EF"/>
-          </a:solidFill>
-          <a:ln>
-            <a:noFill/>
-          </a:ln>
-        </p:spPr>
-        <p:style>
-          <a:lnRef idx="1">
-            <a:schemeClr val="accent1"/>
-          </a:lnRef>
-          <a:fillRef idx="3">
-            <a:schemeClr val="accent1"/>
-          </a:fillRef>
-          <a:effectRef idx="2">
-            <a:schemeClr val="accent1"/>
-          </a:effectRef>
-          <a:fontRef idx="minor">
-            <a:schemeClr val="lt1"/>
-          </a:fontRef>
-        </p:style>
-        <p:txBody>
-          <a:bodyPr rtlCol="0" anchor="ctr"/>
-          <a:lstStyle/>
-          <a:p>
-            <a:pPr algn="ctr"/>
-          </a:p>
-        </p:txBody>
-      </p:sp>
-      <p:sp>
-        <p:nvSpPr>
-          <p:cNvPr id="20" name="Rectangle 19"/>
-          <p:cNvSpPr/>
-          <p:nvPr/>
-        </p:nvSpPr>
-        <p:spPr>
-          <a:xfrm>
-            <a:off x="13474689" y="3310493"/>
-            <a:ext cx="840973" cy="2130186"/>
-          </a:xfrm>
-          <a:prstGeom prst="rect">
-            <a:avLst/>
-          </a:prstGeom>
-          <a:solidFill>
-            <a:srgbClr val="125449"/>
-          </a:solidFill>
-          <a:ln>
-            <a:noFill/>
-          </a:ln>
-        </p:spPr>
-        <p:style>
-          <a:lnRef idx="1">
-            <a:schemeClr val="accent1"/>
-          </a:lnRef>
-          <a:fillRef idx="3">
-            <a:schemeClr val="accent1"/>
-          </a:fillRef>
-          <a:effectRef idx="2">
-            <a:schemeClr val="accent1"/>
-          </a:effectRef>
-          <a:fontRef idx="minor">
-            <a:schemeClr val="lt1"/>
-          </a:fontRef>
-        </p:style>
-        <p:txBody>
-          <a:bodyPr rtlCol="0" anchor="ctr"/>
-          <a:lstStyle/>
-          <a:p>
-            <a:pPr algn="ctr"/>
-          </a:p>
-        </p:txBody>
-      </p:sp>
-      <p:sp>
-        <p:nvSpPr>
-          <p:cNvPr id="21" name="Rectangle 20"/>
-          <p:cNvSpPr/>
-          <p:nvPr/>
-        </p:nvSpPr>
-        <p:spPr>
-          <a:xfrm>
-            <a:off x="13617655" y="3736531"/>
-            <a:ext cx="142965" cy="138462"/>
-          </a:xfrm>
-          <a:prstGeom prst="rect">
-            <a:avLst/>
-          </a:prstGeom>
-          <a:solidFill>
-            <a:srgbClr val="F8F5EF"/>
-          </a:solidFill>
-          <a:ln>
-            <a:noFill/>
-          </a:ln>
-        </p:spPr>
-        <p:style>
-          <a:lnRef idx="1">
-            <a:schemeClr val="accent1"/>
-          </a:lnRef>
-          <a:fillRef idx="3">
-            <a:schemeClr val="accent1"/>
-          </a:fillRef>
-          <a:effectRef idx="2">
-            <a:schemeClr val="accent1"/>
-          </a:effectRef>
-          <a:fontRef idx="minor">
-            <a:schemeClr val="lt1"/>
-          </a:fontRef>
-        </p:style>
-        <p:txBody>
-          <a:bodyPr rtlCol="0" anchor="ctr"/>
-          <a:lstStyle/>
-          <a:p>
-            <a:pPr algn="ctr"/>
-          </a:p>
-        </p:txBody>
-      </p:sp>
-      <p:sp>
-        <p:nvSpPr>
-          <p:cNvPr id="22" name="Rectangle 21"/>
-          <p:cNvSpPr/>
-          <p:nvPr/>
-        </p:nvSpPr>
-        <p:spPr>
-          <a:xfrm>
-            <a:off x="14004503" y="3736531"/>
-            <a:ext cx="142965" cy="138462"/>
-          </a:xfrm>
-          <a:prstGeom prst="rect">
-            <a:avLst/>
-          </a:prstGeom>
-          <a:solidFill>
-            <a:srgbClr val="F8F5EF"/>
-          </a:solidFill>
-          <a:ln>
-            <a:noFill/>
-          </a:ln>
-        </p:spPr>
-        <p:style>
-          <a:lnRef idx="1">
-            <a:schemeClr val="accent1"/>
-          </a:lnRef>
-          <a:fillRef idx="3">
-            <a:schemeClr val="accent1"/>
-          </a:fillRef>
-          <a:effectRef idx="2">
-            <a:schemeClr val="accent1"/>
-          </a:effectRef>
-          <a:fontRef idx="minor">
-            <a:schemeClr val="lt1"/>
-          </a:fontRef>
-        </p:style>
-        <p:txBody>
-          <a:bodyPr rtlCol="0" anchor="ctr"/>
-          <a:lstStyle/>
-          <a:p>
-            <a:pPr algn="ctr"/>
-          </a:p>
-        </p:txBody>
-      </p:sp>
-      <p:sp>
-        <p:nvSpPr>
-          <p:cNvPr id="23" name="Rectangle 22"/>
-          <p:cNvSpPr/>
-          <p:nvPr/>
-        </p:nvSpPr>
-        <p:spPr>
-          <a:xfrm>
-            <a:off x="13617655" y="4205171"/>
-            <a:ext cx="142965" cy="138462"/>
-          </a:xfrm>
-          <a:prstGeom prst="rect">
-            <a:avLst/>
-          </a:prstGeom>
-          <a:solidFill>
-            <a:srgbClr val="F8F5EF"/>
-          </a:solidFill>
-          <a:ln>
-            <a:noFill/>
-          </a:ln>
-        </p:spPr>
-        <p:style>
-          <a:lnRef idx="1">
-            <a:schemeClr val="accent1"/>
-          </a:lnRef>
-          <a:fillRef idx="3">
-            <a:schemeClr val="accent1"/>
-          </a:fillRef>
-          <a:effectRef idx="2">
-            <a:schemeClr val="accent1"/>
-          </a:effectRef>
-          <a:fontRef idx="minor">
-            <a:schemeClr val="lt1"/>
-          </a:fontRef>
-        </p:style>
-        <p:txBody>
-          <a:bodyPr rtlCol="0" anchor="ctr"/>
-          <a:lstStyle/>
-          <a:p>
-            <a:pPr algn="ctr"/>
-          </a:p>
-        </p:txBody>
-      </p:sp>
-      <p:sp>
-        <p:nvSpPr>
-          <p:cNvPr id="24" name="Rectangle 23"/>
-          <p:cNvSpPr/>
-          <p:nvPr/>
-        </p:nvSpPr>
-        <p:spPr>
-          <a:xfrm>
-            <a:off x="14004503" y="4205171"/>
-            <a:ext cx="142965" cy="138462"/>
-          </a:xfrm>
-          <a:prstGeom prst="rect">
-            <a:avLst/>
-          </a:prstGeom>
-          <a:solidFill>
-            <a:srgbClr val="F8F5EF"/>
-          </a:solidFill>
-          <a:ln>
-            <a:noFill/>
-          </a:ln>
-        </p:spPr>
-        <p:style>
-          <a:lnRef idx="1">
-            <a:schemeClr val="accent1"/>
-          </a:lnRef>
-          <a:fillRef idx="3">
-            <a:schemeClr val="accent1"/>
-          </a:fillRef>
-          <a:effectRef idx="2">
-            <a:schemeClr val="accent1"/>
-          </a:effectRef>
-          <a:fontRef idx="minor">
-            <a:schemeClr val="lt1"/>
-          </a:fontRef>
-        </p:style>
-        <p:txBody>
-          <a:bodyPr rtlCol="0" anchor="ctr"/>
-          <a:lstStyle/>
-          <a:p>
-            <a:pPr algn="ctr"/>
-          </a:p>
-        </p:txBody>
-      </p:sp>
-      <p:sp>
-        <p:nvSpPr>
-          <p:cNvPr id="25" name="Rectangle 24"/>
-          <p:cNvSpPr/>
-          <p:nvPr/>
-        </p:nvSpPr>
-        <p:spPr>
-          <a:xfrm>
-            <a:off x="13617655" y="4673812"/>
-            <a:ext cx="142965" cy="138462"/>
-          </a:xfrm>
-          <a:prstGeom prst="rect">
-            <a:avLst/>
-          </a:prstGeom>
-          <a:solidFill>
-            <a:srgbClr val="F8F5EF"/>
-          </a:solidFill>
-          <a:ln>
-            <a:noFill/>
-          </a:ln>
-        </p:spPr>
-        <p:style>
-          <a:lnRef idx="1">
-            <a:schemeClr val="accent1"/>
-          </a:lnRef>
-          <a:fillRef idx="3">
-            <a:schemeClr val="accent1"/>
-          </a:fillRef>
-          <a:effectRef idx="2">
-            <a:schemeClr val="accent1"/>
-          </a:effectRef>
-          <a:fontRef idx="minor">
-            <a:schemeClr val="lt1"/>
-          </a:fontRef>
-        </p:style>
-        <p:txBody>
-          <a:bodyPr rtlCol="0" anchor="ctr"/>
-          <a:lstStyle/>
-          <a:p>
-            <a:pPr algn="ctr"/>
-          </a:p>
-        </p:txBody>
-      </p:sp>
-      <p:sp>
-        <p:nvSpPr>
-          <p:cNvPr id="26" name="Rectangle 25"/>
-          <p:cNvSpPr/>
-          <p:nvPr/>
-        </p:nvSpPr>
-        <p:spPr>
-          <a:xfrm>
-            <a:off x="14004503" y="4673812"/>
-            <a:ext cx="142965" cy="138462"/>
-          </a:xfrm>
-          <a:prstGeom prst="rect">
-            <a:avLst/>
-          </a:prstGeom>
-          <a:solidFill>
-            <a:srgbClr val="F8F5EF"/>
-          </a:solidFill>
-          <a:ln>
-            <a:noFill/>
-          </a:ln>
-        </p:spPr>
-        <p:style>
-          <a:lnRef idx="1">
-            <a:schemeClr val="accent1"/>
-          </a:lnRef>
-          <a:fillRef idx="3">
-            <a:schemeClr val="accent1"/>
-          </a:fillRef>
-          <a:effectRef idx="2">
-            <a:schemeClr val="accent1"/>
-          </a:effectRef>
-          <a:fontRef idx="minor">
-            <a:schemeClr val="lt1"/>
-          </a:fontRef>
-        </p:style>
-        <p:txBody>
-          <a:bodyPr rtlCol="0" anchor="ctr"/>
-          <a:lstStyle/>
-          <a:p>
-            <a:pPr algn="ctr"/>
-          </a:p>
-        </p:txBody>
-      </p:sp>
-      <p:sp>
-        <p:nvSpPr>
-          <p:cNvPr id="27" name="Rectangle 26"/>
-          <p:cNvSpPr/>
-          <p:nvPr/>
-        </p:nvSpPr>
-        <p:spPr>
-          <a:xfrm>
-            <a:off x="14414601" y="3685032"/>
-            <a:ext cx="840973" cy="1755648"/>
-          </a:xfrm>
-          <a:prstGeom prst="rect">
-            <a:avLst/>
-          </a:prstGeom>
-          <a:solidFill>
-            <a:srgbClr val="C28E52"/>
-          </a:solidFill>
-          <a:ln>
-            <a:noFill/>
-          </a:ln>
-        </p:spPr>
-        <p:style>
-          <a:lnRef idx="1">
-            <a:schemeClr val="accent1"/>
-          </a:lnRef>
-          <a:fillRef idx="3">
-            <a:schemeClr val="accent1"/>
-          </a:fillRef>
-          <a:effectRef idx="2">
-            <a:schemeClr val="accent1"/>
-          </a:effectRef>
-          <a:fontRef idx="minor">
-            <a:schemeClr val="lt1"/>
-          </a:fontRef>
-        </p:style>
-        <p:txBody>
-          <a:bodyPr rtlCol="0" anchor="ctr"/>
-          <a:lstStyle/>
-          <a:p>
-            <a:pPr algn="ctr"/>
-          </a:p>
-        </p:txBody>
-      </p:sp>
-      <p:sp>
-        <p:nvSpPr>
-          <p:cNvPr id="28" name="Rectangle 27"/>
-          <p:cNvSpPr/>
-          <p:nvPr/>
-        </p:nvSpPr>
-        <p:spPr>
-          <a:xfrm>
-            <a:off x="14557567" y="4036161"/>
-            <a:ext cx="142965" cy="114117"/>
-          </a:xfrm>
-          <a:prstGeom prst="rect">
-            <a:avLst/>
-          </a:prstGeom>
-          <a:solidFill>
-            <a:srgbClr val="F8F5EF"/>
-          </a:solidFill>
-          <a:ln>
-            <a:noFill/>
-          </a:ln>
-        </p:spPr>
-        <p:style>
-          <a:lnRef idx="1">
-            <a:schemeClr val="accent1"/>
-          </a:lnRef>
-          <a:fillRef idx="3">
-            <a:schemeClr val="accent1"/>
-          </a:fillRef>
-          <a:effectRef idx="2">
-            <a:schemeClr val="accent1"/>
-          </a:effectRef>
-          <a:fontRef idx="minor">
-            <a:schemeClr val="lt1"/>
-          </a:fontRef>
-        </p:style>
-        <p:txBody>
-          <a:bodyPr rtlCol="0" anchor="ctr"/>
-          <a:lstStyle/>
-          <a:p>
-            <a:pPr algn="ctr"/>
-          </a:p>
-        </p:txBody>
-      </p:sp>
-      <p:sp>
-        <p:nvSpPr>
-          <p:cNvPr id="29" name="Rectangle 28"/>
-          <p:cNvSpPr/>
-          <p:nvPr/>
-        </p:nvSpPr>
-        <p:spPr>
-          <a:xfrm>
-            <a:off x="14944415" y="4036161"/>
-            <a:ext cx="142965" cy="114117"/>
-          </a:xfrm>
-          <a:prstGeom prst="rect">
-            <a:avLst/>
-          </a:prstGeom>
-          <a:solidFill>
-            <a:srgbClr val="F8F5EF"/>
-          </a:solidFill>
-          <a:ln>
-            <a:noFill/>
-          </a:ln>
-        </p:spPr>
-        <p:style>
-          <a:lnRef idx="1">
-            <a:schemeClr val="accent1"/>
-          </a:lnRef>
-          <a:fillRef idx="3">
-            <a:schemeClr val="accent1"/>
-          </a:fillRef>
-          <a:effectRef idx="2">
-            <a:schemeClr val="accent1"/>
-          </a:effectRef>
-          <a:fontRef idx="minor">
-            <a:schemeClr val="lt1"/>
-          </a:fontRef>
-        </p:style>
-        <p:txBody>
-          <a:bodyPr rtlCol="0" anchor="ctr"/>
-          <a:lstStyle/>
-          <a:p>
-            <a:pPr algn="ctr"/>
-          </a:p>
-        </p:txBody>
-      </p:sp>
-      <p:sp>
-        <p:nvSpPr>
-          <p:cNvPr id="30" name="Rectangle 29"/>
-          <p:cNvSpPr/>
-          <p:nvPr/>
-        </p:nvSpPr>
-        <p:spPr>
-          <a:xfrm>
-            <a:off x="14557567" y="4422404"/>
-            <a:ext cx="142965" cy="114117"/>
-          </a:xfrm>
-          <a:prstGeom prst="rect">
-            <a:avLst/>
-          </a:prstGeom>
-          <a:solidFill>
-            <a:srgbClr val="F8F5EF"/>
-          </a:solidFill>
-          <a:ln>
-            <a:noFill/>
-          </a:ln>
-        </p:spPr>
-        <p:style>
-          <a:lnRef idx="1">
-            <a:schemeClr val="accent1"/>
-          </a:lnRef>
-          <a:fillRef idx="3">
-            <a:schemeClr val="accent1"/>
-          </a:fillRef>
-          <a:effectRef idx="2">
-            <a:schemeClr val="accent1"/>
-          </a:effectRef>
-          <a:fontRef idx="minor">
-            <a:schemeClr val="lt1"/>
-          </a:fontRef>
-        </p:style>
-        <p:txBody>
-          <a:bodyPr rtlCol="0" anchor="ctr"/>
-          <a:lstStyle/>
-          <a:p>
-            <a:pPr algn="ctr"/>
-          </a:p>
-        </p:txBody>
-      </p:sp>
-      <p:sp>
-        <p:nvSpPr>
-          <p:cNvPr id="31" name="Rectangle 30"/>
-          <p:cNvSpPr/>
-          <p:nvPr/>
-        </p:nvSpPr>
-        <p:spPr>
-          <a:xfrm>
-            <a:off x="14944415" y="4422404"/>
-            <a:ext cx="142965" cy="114117"/>
-          </a:xfrm>
-          <a:prstGeom prst="rect">
-            <a:avLst/>
-          </a:prstGeom>
-          <a:solidFill>
-            <a:srgbClr val="F8F5EF"/>
-          </a:solidFill>
-          <a:ln>
-            <a:noFill/>
-          </a:ln>
-        </p:spPr>
-        <p:style>
-          <a:lnRef idx="1">
-            <a:schemeClr val="accent1"/>
-          </a:lnRef>
-          <a:fillRef idx="3">
-            <a:schemeClr val="accent1"/>
-          </a:fillRef>
-          <a:effectRef idx="2">
-            <a:schemeClr val="accent1"/>
-          </a:effectRef>
-          <a:fontRef idx="minor">
-            <a:schemeClr val="lt1"/>
-          </a:fontRef>
-        </p:style>
-        <p:txBody>
-          <a:bodyPr rtlCol="0" anchor="ctr"/>
-          <a:lstStyle/>
-          <a:p>
-            <a:pPr algn="ctr"/>
-          </a:p>
-        </p:txBody>
-      </p:sp>
-      <p:sp>
-        <p:nvSpPr>
-          <p:cNvPr id="32" name="Rectangle 31"/>
-          <p:cNvSpPr/>
-          <p:nvPr/>
-        </p:nvSpPr>
-        <p:spPr>
-          <a:xfrm>
-            <a:off x="14557567" y="4808646"/>
-            <a:ext cx="142965" cy="114117"/>
-          </a:xfrm>
-          <a:prstGeom prst="rect">
-            <a:avLst/>
-          </a:prstGeom>
-          <a:solidFill>
-            <a:srgbClr val="F8F5EF"/>
-          </a:solidFill>
-          <a:ln>
-            <a:noFill/>
-          </a:ln>
-        </p:spPr>
-        <p:style>
-          <a:lnRef idx="1">
-            <a:schemeClr val="accent1"/>
-          </a:lnRef>
-          <a:fillRef idx="3">
-            <a:schemeClr val="accent1"/>
-          </a:fillRef>
-          <a:effectRef idx="2">
-            <a:schemeClr val="accent1"/>
-          </a:effectRef>
-          <a:fontRef idx="minor">
-            <a:schemeClr val="lt1"/>
-          </a:fontRef>
-        </p:style>
-        <p:txBody>
-          <a:bodyPr rtlCol="0" anchor="ctr"/>
-          <a:lstStyle/>
-          <a:p>
-            <a:pPr algn="ctr"/>
-          </a:p>
-        </p:txBody>
-      </p:sp>
-      <p:sp>
-        <p:nvSpPr>
-          <p:cNvPr id="33" name="Rectangle 32"/>
-          <p:cNvSpPr/>
-          <p:nvPr/>
-        </p:nvSpPr>
-        <p:spPr>
-          <a:xfrm>
-            <a:off x="14944415" y="4808646"/>
-            <a:ext cx="142965" cy="114117"/>
-          </a:xfrm>
-          <a:prstGeom prst="rect">
-            <a:avLst/>
-          </a:prstGeom>
-          <a:solidFill>
-            <a:srgbClr val="F8F5EF"/>
-          </a:solidFill>
-          <a:ln>
-            <a:noFill/>
-          </a:ln>
-        </p:spPr>
-        <p:style>
-          <a:lnRef idx="1">
-            <a:schemeClr val="accent1"/>
-          </a:lnRef>
-          <a:fillRef idx="3">
-            <a:schemeClr val="accent1"/>
-          </a:fillRef>
-          <a:effectRef idx="2">
-            <a:schemeClr val="accent1"/>
-          </a:effectRef>
-          <a:fontRef idx="minor">
-            <a:schemeClr val="lt1"/>
-          </a:fontRef>
-        </p:style>
-        <p:txBody>
-          <a:bodyPr rtlCol="0" anchor="ctr"/>
-          <a:lstStyle/>
-          <a:p>
-            <a:pPr algn="ctr"/>
-          </a:p>
-        </p:txBody>
-      </p:sp>
-      <p:sp>
-        <p:nvSpPr>
-          <p:cNvPr id="34" name="Rectangle 33"/>
-          <p:cNvSpPr/>
-          <p:nvPr/>
-        </p:nvSpPr>
-        <p:spPr>
-          <a:xfrm>
-            <a:off x="15354513" y="3193450"/>
-            <a:ext cx="840973" cy="2247229"/>
-          </a:xfrm>
-          <a:prstGeom prst="rect">
-            <a:avLst/>
-          </a:prstGeom>
-          <a:solidFill>
-            <a:srgbClr val="317D74"/>
-          </a:solidFill>
-          <a:ln>
-            <a:noFill/>
-          </a:ln>
-        </p:spPr>
-        <p:style>
-          <a:lnRef idx="1">
-            <a:schemeClr val="accent1"/>
-          </a:lnRef>
-          <a:fillRef idx="3">
-            <a:schemeClr val="accent1"/>
-          </a:fillRef>
-          <a:effectRef idx="2">
-            <a:schemeClr val="accent1"/>
-          </a:effectRef>
-          <a:fontRef idx="minor">
-            <a:schemeClr val="lt1"/>
-          </a:fontRef>
-        </p:style>
-        <p:txBody>
-          <a:bodyPr rtlCol="0" anchor="ctr"/>
-          <a:lstStyle/>
-          <a:p>
-            <a:pPr algn="ctr"/>
-          </a:p>
-        </p:txBody>
-      </p:sp>
-      <p:sp>
-        <p:nvSpPr>
-          <p:cNvPr id="35" name="Rectangle 34"/>
-          <p:cNvSpPr/>
-          <p:nvPr/>
-        </p:nvSpPr>
-        <p:spPr>
-          <a:xfrm>
-            <a:off x="15497478" y="3642896"/>
-            <a:ext cx="142965" cy="146069"/>
-          </a:xfrm>
-          <a:prstGeom prst="rect">
-            <a:avLst/>
-          </a:prstGeom>
-          <a:solidFill>
-            <a:srgbClr val="F8F5EF"/>
-          </a:solidFill>
-          <a:ln>
-            <a:noFill/>
-          </a:ln>
-        </p:spPr>
-        <p:style>
-          <a:lnRef idx="1">
-            <a:schemeClr val="accent1"/>
-          </a:lnRef>
-          <a:fillRef idx="3">
-            <a:schemeClr val="accent1"/>
-          </a:fillRef>
-          <a:effectRef idx="2">
-            <a:schemeClr val="accent1"/>
-          </a:effectRef>
-          <a:fontRef idx="minor">
-            <a:schemeClr val="lt1"/>
-          </a:fontRef>
-        </p:style>
-        <p:txBody>
-          <a:bodyPr rtlCol="0" anchor="ctr"/>
-          <a:lstStyle/>
-          <a:p>
-            <a:pPr algn="ctr"/>
-          </a:p>
-        </p:txBody>
-      </p:sp>
-      <p:sp>
-        <p:nvSpPr>
-          <p:cNvPr id="36" name="Rectangle 35"/>
-          <p:cNvSpPr/>
-          <p:nvPr/>
-        </p:nvSpPr>
-        <p:spPr>
-          <a:xfrm>
-            <a:off x="15884326" y="3642896"/>
-            <a:ext cx="142965" cy="146069"/>
-          </a:xfrm>
-          <a:prstGeom prst="rect">
-            <a:avLst/>
-          </a:prstGeom>
-          <a:solidFill>
-            <a:srgbClr val="F8F5EF"/>
-          </a:solidFill>
-          <a:ln>
-            <a:noFill/>
-          </a:ln>
-        </p:spPr>
-        <p:style>
-          <a:lnRef idx="1">
-            <a:schemeClr val="accent1"/>
-          </a:lnRef>
-          <a:fillRef idx="3">
-            <a:schemeClr val="accent1"/>
-          </a:fillRef>
-          <a:effectRef idx="2">
-            <a:schemeClr val="accent1"/>
-          </a:effectRef>
-          <a:fontRef idx="minor">
-            <a:schemeClr val="lt1"/>
-          </a:fontRef>
-        </p:style>
-        <p:txBody>
-          <a:bodyPr rtlCol="0" anchor="ctr"/>
-          <a:lstStyle/>
-          <a:p>
-            <a:pPr algn="ctr"/>
-          </a:p>
-        </p:txBody>
-      </p:sp>
-      <p:sp>
-        <p:nvSpPr>
-          <p:cNvPr id="37" name="Rectangle 36"/>
-          <p:cNvSpPr/>
-          <p:nvPr/>
-        </p:nvSpPr>
-        <p:spPr>
-          <a:xfrm>
-            <a:off x="15497478" y="4137286"/>
-            <a:ext cx="142965" cy="146069"/>
-          </a:xfrm>
-          <a:prstGeom prst="rect">
-            <a:avLst/>
-          </a:prstGeom>
-          <a:solidFill>
-            <a:srgbClr val="F8F5EF"/>
-          </a:solidFill>
-          <a:ln>
-            <a:noFill/>
-          </a:ln>
-        </p:spPr>
-        <p:style>
-          <a:lnRef idx="1">
-            <a:schemeClr val="accent1"/>
-          </a:lnRef>
-          <a:fillRef idx="3">
-            <a:schemeClr val="accent1"/>
-          </a:fillRef>
-          <a:effectRef idx="2">
-            <a:schemeClr val="accent1"/>
-          </a:effectRef>
-          <a:fontRef idx="minor">
-            <a:schemeClr val="lt1"/>
-          </a:fontRef>
-        </p:style>
-        <p:txBody>
-          <a:bodyPr rtlCol="0" anchor="ctr"/>
-          <a:lstStyle/>
-          <a:p>
-            <a:pPr algn="ctr"/>
-          </a:p>
-        </p:txBody>
-      </p:sp>
-      <p:sp>
-        <p:nvSpPr>
-          <p:cNvPr id="38" name="Rectangle 37"/>
-          <p:cNvSpPr/>
-          <p:nvPr/>
-        </p:nvSpPr>
-        <p:spPr>
-          <a:xfrm>
-            <a:off x="15884326" y="4137286"/>
-            <a:ext cx="142965" cy="146069"/>
-          </a:xfrm>
-          <a:prstGeom prst="rect">
-            <a:avLst/>
-          </a:prstGeom>
-          <a:solidFill>
-            <a:srgbClr val="F8F5EF"/>
-          </a:solidFill>
-          <a:ln>
-            <a:noFill/>
-          </a:ln>
-        </p:spPr>
-        <p:style>
-          <a:lnRef idx="1">
-            <a:schemeClr val="accent1"/>
-          </a:lnRef>
-          <a:fillRef idx="3">
-            <a:schemeClr val="accent1"/>
-          </a:fillRef>
-          <a:effectRef idx="2">
-            <a:schemeClr val="accent1"/>
-          </a:effectRef>
-          <a:fontRef idx="minor">
-            <a:schemeClr val="lt1"/>
-          </a:fontRef>
-        </p:style>
-        <p:txBody>
-          <a:bodyPr rtlCol="0" anchor="ctr"/>
-          <a:lstStyle/>
-          <a:p>
-            <a:pPr algn="ctr"/>
-          </a:p>
-        </p:txBody>
-      </p:sp>
-      <p:sp>
-        <p:nvSpPr>
-          <p:cNvPr id="39" name="Rectangle 38"/>
-          <p:cNvSpPr/>
-          <p:nvPr/>
-        </p:nvSpPr>
-        <p:spPr>
-          <a:xfrm>
-            <a:off x="15497478" y="4631677"/>
-            <a:ext cx="142965" cy="146069"/>
-          </a:xfrm>
-          <a:prstGeom prst="rect">
-            <a:avLst/>
-          </a:prstGeom>
-          <a:solidFill>
-            <a:srgbClr val="F8F5EF"/>
-          </a:solidFill>
-          <a:ln>
-            <a:noFill/>
-          </a:ln>
-        </p:spPr>
-        <p:style>
-          <a:lnRef idx="1">
-            <a:schemeClr val="accent1"/>
-          </a:lnRef>
-          <a:fillRef idx="3">
-            <a:schemeClr val="accent1"/>
-          </a:fillRef>
-          <a:effectRef idx="2">
-            <a:schemeClr val="accent1"/>
-          </a:effectRef>
-          <a:fontRef idx="minor">
-            <a:schemeClr val="lt1"/>
-          </a:fontRef>
-        </p:style>
-        <p:txBody>
-          <a:bodyPr rtlCol="0" anchor="ctr"/>
-          <a:lstStyle/>
-          <a:p>
-            <a:pPr algn="ctr"/>
-          </a:p>
-        </p:txBody>
-      </p:sp>
-      <p:sp>
-        <p:nvSpPr>
-          <p:cNvPr id="40" name="Rectangle 39"/>
-          <p:cNvSpPr/>
-          <p:nvPr/>
-        </p:nvSpPr>
-        <p:spPr>
-          <a:xfrm>
-            <a:off x="15884326" y="4631677"/>
-            <a:ext cx="142965" cy="146069"/>
-          </a:xfrm>
-          <a:prstGeom prst="rect">
-            <a:avLst/>
-          </a:prstGeom>
-          <a:solidFill>
-            <a:srgbClr val="F8F5EF"/>
-          </a:solidFill>
-          <a:ln>
-            <a:noFill/>
-          </a:ln>
-        </p:spPr>
-        <p:style>
-          <a:lnRef idx="1">
-            <a:schemeClr val="accent1"/>
-          </a:lnRef>
-          <a:fillRef idx="3">
-            <a:schemeClr val="accent1"/>
-          </a:fillRef>
-          <a:effectRef idx="2">
-            <a:schemeClr val="accent1"/>
-          </a:effectRef>
-          <a:fontRef idx="minor">
-            <a:schemeClr val="lt1"/>
-          </a:fontRef>
-        </p:style>
-        <p:txBody>
-          <a:bodyPr rtlCol="0" anchor="ctr"/>
-          <a:lstStyle/>
-          <a:p>
-            <a:pPr algn="ctr"/>
-          </a:p>
-        </p:txBody>
-      </p:sp>
-      <p:sp>
-        <p:nvSpPr>
-          <p:cNvPr id="41" name="Rectangle 40"/>
-          <p:cNvSpPr/>
-          <p:nvPr/>
-        </p:nvSpPr>
-        <p:spPr>
-          <a:xfrm>
-            <a:off x="16343894" y="3872301"/>
-            <a:ext cx="840973" cy="1568378"/>
-          </a:xfrm>
-          <a:prstGeom prst="rect">
-            <a:avLst/>
-          </a:prstGeom>
-          <a:solidFill>
-            <a:srgbClr val="276D61"/>
-          </a:solidFill>
-          <a:ln>
-            <a:noFill/>
-          </a:ln>
-        </p:spPr>
-        <p:style>
-          <a:lnRef idx="1">
-            <a:schemeClr val="accent1"/>
-          </a:lnRef>
-          <a:fillRef idx="3">
-            <a:schemeClr val="accent1"/>
-          </a:fillRef>
-          <a:effectRef idx="2">
-            <a:schemeClr val="accent1"/>
-          </a:effectRef>
-          <a:fontRef idx="minor">
-            <a:schemeClr val="lt1"/>
-          </a:fontRef>
-        </p:style>
-        <p:txBody>
-          <a:bodyPr rtlCol="0" anchor="ctr"/>
-          <a:lstStyle/>
-          <a:p>
-            <a:pPr algn="ctr"/>
-          </a:p>
-        </p:txBody>
-      </p:sp>
-      <p:sp>
-        <p:nvSpPr>
-          <p:cNvPr id="42" name="Rectangle 41"/>
-          <p:cNvSpPr/>
-          <p:nvPr/>
-        </p:nvSpPr>
-        <p:spPr>
-          <a:xfrm>
-            <a:off x="16486859" y="4185976"/>
-            <a:ext cx="142965" cy="101944"/>
-          </a:xfrm>
-          <a:prstGeom prst="rect">
-            <a:avLst/>
-          </a:prstGeom>
-          <a:solidFill>
-            <a:srgbClr val="F8F5EF"/>
-          </a:solidFill>
-          <a:ln>
-            <a:noFill/>
-          </a:ln>
-        </p:spPr>
-        <p:style>
-          <a:lnRef idx="1">
-            <a:schemeClr val="accent1"/>
-          </a:lnRef>
-          <a:fillRef idx="3">
-            <a:schemeClr val="accent1"/>
-          </a:fillRef>
-          <a:effectRef idx="2">
-            <a:schemeClr val="accent1"/>
-          </a:effectRef>
-          <a:fontRef idx="minor">
-            <a:schemeClr val="lt1"/>
-          </a:fontRef>
-        </p:style>
-        <p:txBody>
-          <a:bodyPr rtlCol="0" anchor="ctr"/>
-          <a:lstStyle/>
-          <a:p>
-            <a:pPr algn="ctr"/>
-          </a:p>
-        </p:txBody>
-      </p:sp>
-      <p:sp>
-        <p:nvSpPr>
-          <p:cNvPr id="43" name="Rectangle 42"/>
-          <p:cNvSpPr/>
-          <p:nvPr/>
-        </p:nvSpPr>
-        <p:spPr>
-          <a:xfrm>
-            <a:off x="16873707" y="4185976"/>
-            <a:ext cx="142965" cy="101944"/>
-          </a:xfrm>
-          <a:prstGeom prst="rect">
-            <a:avLst/>
-          </a:prstGeom>
-          <a:solidFill>
-            <a:srgbClr val="F8F5EF"/>
-          </a:solidFill>
-          <a:ln>
-            <a:noFill/>
-          </a:ln>
-        </p:spPr>
-        <p:style>
-          <a:lnRef idx="1">
-            <a:schemeClr val="accent1"/>
-          </a:lnRef>
-          <a:fillRef idx="3">
-            <a:schemeClr val="accent1"/>
-          </a:fillRef>
-          <a:effectRef idx="2">
-            <a:schemeClr val="accent1"/>
-          </a:effectRef>
-          <a:fontRef idx="minor">
-            <a:schemeClr val="lt1"/>
-          </a:fontRef>
-        </p:style>
-        <p:txBody>
-          <a:bodyPr rtlCol="0" anchor="ctr"/>
-          <a:lstStyle/>
-          <a:p>
-            <a:pPr algn="ctr"/>
-          </a:p>
-        </p:txBody>
-      </p:sp>
-      <p:sp>
-        <p:nvSpPr>
-          <p:cNvPr id="44" name="Rectangle 43"/>
-          <p:cNvSpPr/>
-          <p:nvPr/>
-        </p:nvSpPr>
-        <p:spPr>
-          <a:xfrm>
-            <a:off x="16486859" y="4531020"/>
-            <a:ext cx="142965" cy="101944"/>
-          </a:xfrm>
-          <a:prstGeom prst="rect">
-            <a:avLst/>
-          </a:prstGeom>
-          <a:solidFill>
-            <a:srgbClr val="F8F5EF"/>
-          </a:solidFill>
-          <a:ln>
-            <a:noFill/>
-          </a:ln>
-        </p:spPr>
-        <p:style>
-          <a:lnRef idx="1">
-            <a:schemeClr val="accent1"/>
-          </a:lnRef>
-          <a:fillRef idx="3">
-            <a:schemeClr val="accent1"/>
-          </a:fillRef>
-          <a:effectRef idx="2">
-            <a:schemeClr val="accent1"/>
-          </a:effectRef>
-          <a:fontRef idx="minor">
-            <a:schemeClr val="lt1"/>
-          </a:fontRef>
-        </p:style>
-        <p:txBody>
-          <a:bodyPr rtlCol="0" anchor="ctr"/>
-          <a:lstStyle/>
-          <a:p>
-            <a:pPr algn="ctr"/>
-          </a:p>
-        </p:txBody>
-      </p:sp>
-      <p:sp>
-        <p:nvSpPr>
-          <p:cNvPr id="45" name="Rectangle 44"/>
-          <p:cNvSpPr/>
-          <p:nvPr/>
-        </p:nvSpPr>
-        <p:spPr>
-          <a:xfrm>
-            <a:off x="16873707" y="4531020"/>
-            <a:ext cx="142965" cy="101944"/>
-          </a:xfrm>
-          <a:prstGeom prst="rect">
-            <a:avLst/>
-          </a:prstGeom>
-          <a:solidFill>
-            <a:srgbClr val="F8F5EF"/>
-          </a:solidFill>
-          <a:ln>
-            <a:noFill/>
-          </a:ln>
-        </p:spPr>
-        <p:style>
-          <a:lnRef idx="1">
-            <a:schemeClr val="accent1"/>
-          </a:lnRef>
-          <a:fillRef idx="3">
-            <a:schemeClr val="accent1"/>
-          </a:fillRef>
-          <a:effectRef idx="2">
-            <a:schemeClr val="accent1"/>
-          </a:effectRef>
-          <a:fontRef idx="minor">
-            <a:schemeClr val="lt1"/>
-          </a:fontRef>
-        </p:style>
-        <p:txBody>
-          <a:bodyPr rtlCol="0" anchor="ctr"/>
-          <a:lstStyle/>
-          <a:p>
-            <a:pPr algn="ctr"/>
-          </a:p>
-        </p:txBody>
-      </p:sp>
-      <p:sp>
-        <p:nvSpPr>
-          <p:cNvPr id="46" name="Rectangle 45"/>
-          <p:cNvSpPr/>
-          <p:nvPr/>
-        </p:nvSpPr>
-        <p:spPr>
-          <a:xfrm>
-            <a:off x="16486859" y="4876063"/>
-            <a:ext cx="142965" cy="101944"/>
-          </a:xfrm>
-          <a:prstGeom prst="rect">
-            <a:avLst/>
-          </a:prstGeom>
-          <a:solidFill>
-            <a:srgbClr val="F8F5EF"/>
-          </a:solidFill>
-          <a:ln>
-            <a:noFill/>
-          </a:ln>
-        </p:spPr>
-        <p:style>
-          <a:lnRef idx="1">
-            <a:schemeClr val="accent1"/>
-          </a:lnRef>
-          <a:fillRef idx="3">
-            <a:schemeClr val="accent1"/>
-          </a:fillRef>
-          <a:effectRef idx="2">
-            <a:schemeClr val="accent1"/>
-          </a:effectRef>
-          <a:fontRef idx="minor">
-            <a:schemeClr val="lt1"/>
-          </a:fontRef>
-        </p:style>
-        <p:txBody>
-          <a:bodyPr rtlCol="0" anchor="ctr"/>
-          <a:lstStyle/>
-          <a:p>
-            <a:pPr algn="ctr"/>
-          </a:p>
-        </p:txBody>
-      </p:sp>
-      <p:sp>
-        <p:nvSpPr>
-          <p:cNvPr id="47" name="Rectangle 46"/>
-          <p:cNvSpPr/>
-          <p:nvPr/>
-        </p:nvSpPr>
-        <p:spPr>
-          <a:xfrm>
-            <a:off x="16873707" y="4876063"/>
-            <a:ext cx="142965" cy="101944"/>
-          </a:xfrm>
-          <a:prstGeom prst="rect">
-            <a:avLst/>
-          </a:prstGeom>
-          <a:solidFill>
-            <a:srgbClr val="F8F5EF"/>
-          </a:solidFill>
-          <a:ln>
-            <a:noFill/>
-          </a:ln>
-        </p:spPr>
-        <p:style>
-          <a:lnRef idx="1">
-            <a:schemeClr val="accent1"/>
-          </a:lnRef>
-          <a:fillRef idx="3">
-            <a:schemeClr val="accent1"/>
-          </a:fillRef>
-          <a:effectRef idx="2">
-            <a:schemeClr val="accent1"/>
-          </a:effectRef>
-          <a:fontRef idx="minor">
-            <a:schemeClr val="lt1"/>
-          </a:fontRef>
-        </p:style>
-        <p:txBody>
-          <a:bodyPr rtlCol="0" anchor="ctr"/>
-          <a:lstStyle/>
-          <a:p>
-            <a:pPr algn="ctr"/>
-          </a:p>
-        </p:txBody>
-      </p:sp>
-      <p:sp>
-        <p:nvSpPr>
-          <p:cNvPr id="48" name="Rectangle 47"/>
-          <p:cNvSpPr/>
-          <p:nvPr/>
-        </p:nvSpPr>
-        <p:spPr>
-          <a:xfrm>
-            <a:off x="12435840" y="5300228"/>
-            <a:ext cx="4946904" cy="140451"/>
-          </a:xfrm>
-          <a:prstGeom prst="rect">
-            <a:avLst/>
-          </a:prstGeom>
-          <a:solidFill>
-            <a:srgbClr val="125449"/>
-          </a:solidFill>
-          <a:ln>
-            <a:noFill/>
-          </a:ln>
-        </p:spPr>
-        <p:style>
-          <a:lnRef idx="1">
-            <a:schemeClr val="accent1"/>
-          </a:lnRef>
-          <a:fillRef idx="3">
-            <a:schemeClr val="accent1"/>
-          </a:fillRef>
-          <a:effectRef idx="2">
-            <a:schemeClr val="accent1"/>
-          </a:effectRef>
-          <a:fontRef idx="minor">
-            <a:schemeClr val="lt1"/>
-          </a:fontRef>
-        </p:style>
-        <p:txBody>
-          <a:bodyPr rtlCol="0" anchor="ctr"/>
-          <a:lstStyle/>
-          <a:p>
-            <a:pPr algn="ctr"/>
-          </a:p>
-        </p:txBody>
-      </p:sp>
-      <p:sp>
-        <p:nvSpPr>
-          <p:cNvPr id="49" name="TextBox 48"/>
+          <a:prstGeom prst="rect">
+            <a:avLst/>
+          </a:prstGeom>
+        </p:spPr>
+      </p:pic>
+      <p:sp>
+        <p:nvSpPr>
+          <p:cNvPr id="13" name="TextBox 12"/>
           <p:cNvSpPr txBox="1"/>
           <p:nvPr/>
         </p:nvSpPr>
@@ -22312,7 +16036,7 @@
       </p:sp>
       <p:sp>
         <p:nvSpPr>
-          <p:cNvPr id="50" name="TextBox 49"/>
+          <p:cNvPr id="14" name="TextBox 13"/>
           <p:cNvSpPr txBox="1"/>
           <p:nvPr/>
         </p:nvSpPr>
@@ -22348,7 +16072,7 @@
       </p:sp>
       <p:cxnSp>
         <p:nvCxnSpPr>
-          <p:cNvPr id="51" name="Connector 50"/>
+          <p:cNvPr id="15" name="Connector 14"/>
           <p:cNvCxnSpPr/>
           <p:nvPr/>
         </p:nvCxnSpPr>
@@ -22383,7 +16107,7 @@
       </p:cxnSp>
       <p:sp>
         <p:nvSpPr>
-          <p:cNvPr id="52" name="TextBox 51"/>
+          <p:cNvPr id="16" name="TextBox 15"/>
           <p:cNvSpPr txBox="1"/>
           <p:nvPr/>
         </p:nvSpPr>

--- a/Final Submission/Presentation.pptx
+++ b/Final Submission/Presentation.pptx
@@ -130,8 +130,8 @@
     <c:autoTitleDeleted val="0"/>
     <c:plotArea>
       <c:barChart>
-        <c:barDir val="col"/>
-        <c:grouping val="clustered"/>
+        <c:barDir val="bar"/>
+        <c:grouping val="stacked"/>
         <c:ser>
           <c:idx val="0"/>
           <c:order val="0"/>
@@ -141,67 +141,7 @@
               <c:strCache>
                 <c:ptCount val="1"/>
                 <c:pt idx="0">
-                  <c:v>Original</c:v>
-                </c:pt>
-              </c:strCache>
-            </c:strRef>
-          </c:tx>
-          <c:spPr>
-            <a:solidFill>
-              <a:srgbClr val="8DAE9D"/>
-            </a:solidFill>
-            <a:ln w="33020">
-              <a:solidFill>
-                <a:srgbClr val="8DAE9D"/>
-              </a:solidFill>
-            </a:ln>
-          </c:spPr>
-          <c:cat>
-            <c:strRef>
-              <c:f>Sheet1!$A$2:$A$4</c:f>
-              <c:strCache>
-                <c:ptCount val="3"/>
-                <c:pt idx="0">
-                  <c:v>2024</c:v>
-                </c:pt>
-                <c:pt idx="1">
-                  <c:v>2025</c:v>
-                </c:pt>
-                <c:pt idx="2">
-                  <c:v>2027</c:v>
-                </c:pt>
-              </c:strCache>
-            </c:strRef>
-          </c:cat>
-          <c:val>
-            <c:numRef>
-              <c:f>Sheet1!$B$2:$B$4</c:f>
-              <c:numCache>
-                <c:formatCode>General</c:formatCode>
-                <c:ptCount val="3"/>
-                <c:pt idx="0">
-                  <c:v>2.4</c:v>
-                </c:pt>
-                <c:pt idx="1">
-                  <c:v>0</c:v>
-                </c:pt>
-                <c:pt idx="2">
-                  <c:v>3.6</c:v>
-                </c:pt>
-              </c:numCache>
-            </c:numRef>
-          </c:val>
-        </c:ser>
-        <c:ser>
-          <c:idx val="1"/>
-          <c:order val="1"/>
-          <c:tx>
-            <c:strRef>
-              <c:f>Sheet1!$C$1</c:f>
-              <c:strCache>
-                <c:ptCount val="1"/>
-                <c:pt idx="0">
-                  <c:v>Revised</c:v>
+                  <c:v>Bonds</c:v>
                 </c:pt>
               </c:strCache>
             </c:strRef>
@@ -218,41 +158,78 @@
           </c:spPr>
           <c:cat>
             <c:strRef>
-              <c:f>Sheet1!$A$2:$A$4</c:f>
+              <c:f>Sheet1!$A$2:$A$2</c:f>
               <c:strCache>
-                <c:ptCount val="3"/>
+                <c:ptCount val="1"/>
                 <c:pt idx="0">
-                  <c:v>2024</c:v>
-                </c:pt>
-                <c:pt idx="1">
-                  <c:v>2025</c:v>
-                </c:pt>
-                <c:pt idx="2">
-                  <c:v>2027</c:v>
+                  <c:v>2022 allocation</c:v>
                 </c:pt>
               </c:strCache>
             </c:strRef>
           </c:cat>
           <c:val>
             <c:numRef>
-              <c:f>Sheet1!$C$2:$C$4</c:f>
+              <c:f>Sheet1!$B$2:$B$2</c:f>
               <c:numCache>
                 <c:formatCode>General</c:formatCode>
-                <c:ptCount val="3"/>
+                <c:ptCount val="1"/>
                 <c:pt idx="0">
-                  <c:v>2.4</c:v>
-                </c:pt>
-                <c:pt idx="1">
-                  <c:v>1.2</c:v>
-                </c:pt>
-                <c:pt idx="2">
-                  <c:v>2.4</c:v>
+                  <c:v>5.784228</c:v>
+                </c:pt>
+              </c:numCache>
+            </c:numRef>
+          </c:val>
+        </c:ser>
+        <c:ser>
+          <c:idx val="1"/>
+          <c:order val="1"/>
+          <c:tx>
+            <c:strRef>
+              <c:f>Sheet1!$C$1</c:f>
+              <c:strCache>
+                <c:ptCount val="1"/>
+                <c:pt idx="0">
+                  <c:v>Net equities</c:v>
+                </c:pt>
+              </c:strCache>
+            </c:strRef>
+          </c:tx>
+          <c:spPr>
+            <a:solidFill>
+              <a:srgbClr val="C28E52"/>
+            </a:solidFill>
+            <a:ln w="33020">
+              <a:solidFill>
+                <a:srgbClr val="C28E52"/>
+              </a:solidFill>
+            </a:ln>
+          </c:spPr>
+          <c:cat>
+            <c:strRef>
+              <c:f>Sheet1!$A$2:$A$2</c:f>
+              <c:strCache>
+                <c:ptCount val="1"/>
+                <c:pt idx="0">
+                  <c:v>2022 allocation</c:v>
+                </c:pt>
+              </c:strCache>
+            </c:strRef>
+          </c:cat>
+          <c:val>
+            <c:numRef>
+              <c:f>Sheet1!$C$2:$C$2</c:f>
+              <c:numCache>
+                <c:formatCode>General</c:formatCode>
+                <c:ptCount val="1"/>
+                <c:pt idx="0">
+                  <c:v>6.209562437562439</c:v>
                 </c:pt>
               </c:numCache>
             </c:numRef>
           </c:val>
         </c:ser>
         <c:gapWidth val="65"/>
+        <c:overlap val="100"/>
         <c:axId val="-2068027336"/>
         <c:axId val="-2113994440"/>
       </c:barChart>
@@ -262,7 +239,7 @@
           <c:orientation val="minMax"/>
         </c:scaling>
         <c:delete val="0"/>
-        <c:axPos val="b"/>
+        <c:axPos val="l"/>
         <c:majorTickMark val="out"/>
         <c:minorTickMark val="none"/>
         <c:tickLblPos val="nextTo"/>
@@ -287,11 +264,11 @@
       <c:valAx>
         <c:axId val="-2113994440"/>
         <c:scaling>
-          <c:max val="4.0"/>
+          <c:max val="12.2"/>
           <c:min val="0.0"/>
         </c:scaling>
         <c:delete val="0"/>
-        <c:axPos val="l"/>
+        <c:axPos val="b"/>
         <c:majorGridlines/>
         <c:majorTickMark val="out"/>
         <c:minorTickMark val="none"/>
@@ -362,18 +339,18 @@
               <c:strCache>
                 <c:ptCount val="1"/>
                 <c:pt idx="0">
-                  <c:v>Fund loss %</c:v>
+                  <c:v>Adjusted R²</c:v>
                 </c:pt>
               </c:strCache>
             </c:strRef>
           </c:tx>
           <c:spPr>
             <a:solidFill>
-              <a:srgbClr val="BE7460"/>
+              <a:srgbClr val="125449"/>
             </a:solidFill>
             <a:ln w="33020">
               <a:solidFill>
-                <a:srgbClr val="BE7460"/>
+                <a:srgbClr val="125449"/>
               </a:solidFill>
             </a:ln>
           </c:spPr>
@@ -383,10 +360,10 @@
               <c:strCache>
                 <c:ptCount val="2"/>
                 <c:pt idx="0">
-                  <c:v>Principal</c:v>
+                  <c:v>CAPM</c:v>
                 </c:pt>
                 <c:pt idx="1">
-                  <c:v>Coupon</c:v>
+                  <c:v>FF3</c:v>
                 </c:pt>
               </c:strCache>
             </c:strRef>
@@ -398,10 +375,10 @@
                 <c:formatCode>General</c:formatCode>
                 <c:ptCount val="2"/>
                 <c:pt idx="0">
-                  <c:v>14.42</c:v>
+                  <c:v>0.7849860862</c:v>
                 </c:pt>
                 <c:pt idx="1">
-                  <c:v>15.08</c:v>
+                  <c:v>0.8436523346</c:v>
                 </c:pt>
               </c:numCache>
             </c:numRef>
@@ -442,7 +419,7 @@
       <c:valAx>
         <c:axId val="-2113994440"/>
         <c:scaling>
-          <c:max val="17.0"/>
+          <c:max val="1.0"/>
           <c:min val="0.0"/>
         </c:scaling>
         <c:delete val="0"/>
@@ -485,6 +462,292 @@
 </file>
 
 <file path=ppt/charts/chart11.xml><?xml version="1.0" encoding="utf-8"?>
+<c:chartSpace xmlns:c="http://schemas.openxmlformats.org/drawingml/2006/chart" xmlns:a="http://schemas.openxmlformats.org/drawingml/2006/main" xmlns:r="http://schemas.openxmlformats.org/officeDocument/2006/relationships">
+  <c:date1904 val="0"/>
+  <c:chart>
+    <c:autoTitleDeleted val="0"/>
+    <c:plotArea>
+      <c:barChart>
+        <c:barDir val="bar"/>
+        <c:grouping val="clustered"/>
+        <c:ser>
+          <c:idx val="0"/>
+          <c:order val="0"/>
+          <c:tx>
+            <c:strRef>
+              <c:f>Sheet1!$B$1</c:f>
+              <c:strCache>
+                <c:ptCount val="1"/>
+                <c:pt idx="0">
+                  <c:v>Exposure</c:v>
+                </c:pt>
+              </c:strCache>
+            </c:strRef>
+          </c:tx>
+          <c:spPr>
+            <a:solidFill>
+              <a:srgbClr val="C28E52"/>
+            </a:solidFill>
+            <a:ln w="33020">
+              <a:solidFill>
+                <a:srgbClr val="C28E52"/>
+              </a:solidFill>
+            </a:ln>
+          </c:spPr>
+          <c:cat>
+            <c:strRef>
+              <c:f>Sheet1!$A$2:$A$4</c:f>
+              <c:strCache>
+                <c:ptCount val="3"/>
+                <c:pt idx="0">
+                  <c:v>Market β</c:v>
+                </c:pt>
+                <c:pt idx="1">
+                  <c:v>SMB</c:v>
+                </c:pt>
+                <c:pt idx="2">
+                  <c:v>HML</c:v>
+                </c:pt>
+              </c:strCache>
+            </c:strRef>
+          </c:cat>
+          <c:val>
+            <c:numRef>
+              <c:f>Sheet1!$B$2:$B$4</c:f>
+              <c:numCache>
+                <c:formatCode>General</c:formatCode>
+                <c:ptCount val="3"/>
+                <c:pt idx="0">
+                  <c:v>0.8667145258</c:v>
+                </c:pt>
+                <c:pt idx="1">
+                  <c:v>-0.4264931863</c:v>
+                </c:pt>
+                <c:pt idx="2">
+                  <c:v>0.01012961894</c:v>
+                </c:pt>
+              </c:numCache>
+            </c:numRef>
+          </c:val>
+        </c:ser>
+        <c:gapWidth val="65"/>
+        <c:axId val="-2068027336"/>
+        <c:axId val="-2113994440"/>
+      </c:barChart>
+      <c:catAx>
+        <c:axId val="-2068027336"/>
+        <c:scaling>
+          <c:orientation val="minMax"/>
+        </c:scaling>
+        <c:delete val="0"/>
+        <c:axPos val="l"/>
+        <c:majorTickMark val="out"/>
+        <c:minorTickMark val="none"/>
+        <c:tickLblPos val="nextTo"/>
+        <c:txPr>
+          <a:bodyPr/>
+          <a:lstStyle/>
+          <a:p>
+            <a:pPr>
+              <a:defRPr sz="1200">
+                <a:latin typeface="Lato"/>
+              </a:defRPr>
+            </a:pPr>
+          </a:p>
+        </c:txPr>
+        <c:crossAx val="-2113994440"/>
+        <c:crosses val="autoZero"/>
+        <c:auto val="1"/>
+        <c:lblAlgn val="ctr"/>
+        <c:lblOffset val="100"/>
+        <c:noMultiLvlLbl val="0"/>
+      </c:catAx>
+      <c:valAx>
+        <c:axId val="-2113994440"/>
+        <c:scaling>
+          <c:max val="1.0"/>
+          <c:min val="-0.6"/>
+        </c:scaling>
+        <c:delete val="0"/>
+        <c:axPos val="b"/>
+        <c:majorGridlines/>
+        <c:majorTickMark val="out"/>
+        <c:minorTickMark val="none"/>
+        <c:tickLblPos val="nextTo"/>
+        <c:txPr>
+          <a:bodyPr/>
+          <a:lstStyle/>
+          <a:p>
+            <a:pPr>
+              <a:defRPr sz="1500">
+                <a:latin typeface="Lato"/>
+              </a:defRPr>
+            </a:pPr>
+          </a:p>
+        </c:txPr>
+        <c:crossAx val="-2068027336"/>
+        <c:crosses val="autoZero"/>
+      </c:valAx>
+    </c:plotArea>
+    <c:dispBlanksAs val="gap"/>
+  </c:chart>
+  <c:txPr>
+    <a:bodyPr/>
+    <a:lstStyle/>
+    <a:p>
+      <a:pPr>
+        <a:defRPr sz="1800"/>
+      </a:pPr>
+      <a:endParaRPr lang="en-US"/>
+    </a:p>
+  </c:txPr>
+  <c:externalData r:id="rId1">
+    <c:autoUpdate val="0"/>
+  </c:externalData>
+</c:chartSpace>
+</file>
+
+<file path=ppt/charts/chart12.xml><?xml version="1.0" encoding="utf-8"?>
+<c:chartSpace xmlns:c="http://schemas.openxmlformats.org/drawingml/2006/chart" xmlns:a="http://schemas.openxmlformats.org/drawingml/2006/main" xmlns:r="http://schemas.openxmlformats.org/officeDocument/2006/relationships">
+  <c:date1904 val="0"/>
+  <c:chart>
+    <c:autoTitleDeleted val="0"/>
+    <c:plotArea>
+      <c:barChart>
+        <c:barDir val="bar"/>
+        <c:grouping val="clustered"/>
+        <c:ser>
+          <c:idx val="0"/>
+          <c:order val="0"/>
+          <c:tx>
+            <c:strRef>
+              <c:f>Sheet1!$B$1</c:f>
+              <c:strCache>
+                <c:ptCount val="1"/>
+                <c:pt idx="0">
+                  <c:v>Fund loss %</c:v>
+                </c:pt>
+              </c:strCache>
+            </c:strRef>
+          </c:tx>
+          <c:spPr>
+            <a:solidFill>
+              <a:srgbClr val="BE7460"/>
+            </a:solidFill>
+            <a:ln w="33020">
+              <a:solidFill>
+                <a:srgbClr val="BE7460"/>
+              </a:solidFill>
+            </a:ln>
+          </c:spPr>
+          <c:cat>
+            <c:strRef>
+              <c:f>Sheet1!$A$2:$A$3</c:f>
+              <c:strCache>
+                <c:ptCount val="2"/>
+                <c:pt idx="0">
+                  <c:v>Principal</c:v>
+                </c:pt>
+                <c:pt idx="1">
+                  <c:v>Coupon</c:v>
+                </c:pt>
+              </c:strCache>
+            </c:strRef>
+          </c:cat>
+          <c:val>
+            <c:numRef>
+              <c:f>Sheet1!$B$2:$B$3</c:f>
+              <c:numCache>
+                <c:formatCode>General</c:formatCode>
+                <c:ptCount val="2"/>
+                <c:pt idx="0">
+                  <c:v>14.42</c:v>
+                </c:pt>
+                <c:pt idx="1">
+                  <c:v>15.08</c:v>
+                </c:pt>
+              </c:numCache>
+            </c:numRef>
+          </c:val>
+        </c:ser>
+        <c:gapWidth val="65"/>
+        <c:axId val="-2068027336"/>
+        <c:axId val="-2113994440"/>
+      </c:barChart>
+      <c:catAx>
+        <c:axId val="-2068027336"/>
+        <c:scaling>
+          <c:orientation val="minMax"/>
+        </c:scaling>
+        <c:delete val="0"/>
+        <c:axPos val="l"/>
+        <c:majorTickMark val="out"/>
+        <c:minorTickMark val="none"/>
+        <c:tickLblPos val="nextTo"/>
+        <c:txPr>
+          <a:bodyPr/>
+          <a:lstStyle/>
+          <a:p>
+            <a:pPr>
+              <a:defRPr sz="1200">
+                <a:latin typeface="Lato"/>
+              </a:defRPr>
+            </a:pPr>
+          </a:p>
+        </c:txPr>
+        <c:crossAx val="-2113994440"/>
+        <c:crosses val="autoZero"/>
+        <c:auto val="1"/>
+        <c:lblAlgn val="ctr"/>
+        <c:lblOffset val="100"/>
+        <c:noMultiLvlLbl val="0"/>
+      </c:catAx>
+      <c:valAx>
+        <c:axId val="-2113994440"/>
+        <c:scaling>
+          <c:max val="17.0"/>
+          <c:min val="0.0"/>
+        </c:scaling>
+        <c:delete val="0"/>
+        <c:axPos val="b"/>
+        <c:majorGridlines/>
+        <c:majorTickMark val="out"/>
+        <c:minorTickMark val="none"/>
+        <c:tickLblPos val="nextTo"/>
+        <c:txPr>
+          <a:bodyPr/>
+          <a:lstStyle/>
+          <a:p>
+            <a:pPr>
+              <a:defRPr sz="1500">
+                <a:latin typeface="Lato"/>
+              </a:defRPr>
+            </a:pPr>
+          </a:p>
+        </c:txPr>
+        <c:crossAx val="-2068027336"/>
+        <c:crosses val="autoZero"/>
+      </c:valAx>
+    </c:plotArea>
+    <c:dispBlanksAs val="gap"/>
+  </c:chart>
+  <c:txPr>
+    <a:bodyPr/>
+    <a:lstStyle/>
+    <a:p>
+      <a:pPr>
+        <a:defRPr sz="1800"/>
+      </a:pPr>
+      <a:endParaRPr lang="en-US"/>
+    </a:p>
+  </c:txPr>
+  <c:externalData r:id="rId1">
+    <c:autoUpdate val="0"/>
+  </c:externalData>
+</c:chartSpace>
+</file>
+
+<file path=ppt/charts/chart13.xml><?xml version="1.0" encoding="utf-8"?>
 <c:chartSpace xmlns:c="http://schemas.openxmlformats.org/drawingml/2006/chart" xmlns:a="http://schemas.openxmlformats.org/drawingml/2006/main" xmlns:r="http://schemas.openxmlformats.org/officeDocument/2006/relationships">
   <c:date1904 val="0"/>
   <c:chart>
@@ -1113,7 +1376,7 @@
 </c:chartSpace>
 </file>
 
-<file path=ppt/charts/chart12.xml><?xml version="1.0" encoding="utf-8"?>
+<file path=ppt/charts/chart14.xml><?xml version="1.0" encoding="utf-8"?>
 <c:chartSpace xmlns:c="http://schemas.openxmlformats.org/drawingml/2006/chart" xmlns:a="http://schemas.openxmlformats.org/drawingml/2006/main" xmlns:r="http://schemas.openxmlformats.org/officeDocument/2006/relationships">
   <c:date1904 val="0"/>
   <c:chart>
@@ -1253,15 +1516,15 @@
 </c:chartSpace>
 </file>
 
-<file path=ppt/charts/chart2.xml><?xml version="1.0" encoding="utf-8"?>
+<file path=ppt/charts/chart15.xml><?xml version="1.0" encoding="utf-8"?>
 <c:chartSpace xmlns:c="http://schemas.openxmlformats.org/drawingml/2006/chart" xmlns:a="http://schemas.openxmlformats.org/drawingml/2006/main" xmlns:r="http://schemas.openxmlformats.org/officeDocument/2006/relationships">
   <c:date1904 val="0"/>
   <c:chart>
     <c:autoTitleDeleted val="0"/>
     <c:plotArea>
       <c:barChart>
-        <c:barDir val="bar"/>
-        <c:grouping val="stacked"/>
+        <c:barDir val="col"/>
+        <c:grouping val="clustered"/>
         <c:ser>
           <c:idx val="0"/>
           <c:order val="0"/>
@@ -1271,7 +1534,7 @@
               <c:strCache>
                 <c:ptCount val="1"/>
                 <c:pt idx="0">
-                  <c:v>Bonds</c:v>
+                  <c:v>Fund total, $m</c:v>
                 </c:pt>
               </c:strCache>
             </c:strRef>
@@ -1288,29 +1551,41 @@
           </c:spPr>
           <c:cat>
             <c:strRef>
-              <c:f>Sheet1!$A$2:$A$3</c:f>
+              <c:f>Sheet1!$A$2:$A$5</c:f>
               <c:strCache>
-                <c:ptCount val="2"/>
+                <c:ptCount val="4"/>
                 <c:pt idx="0">
-                  <c:v>Principal</c:v>
+                  <c:v>0%</c:v>
                 </c:pt>
                 <c:pt idx="1">
-                  <c:v>Coupon</c:v>
+                  <c:v>4.80%</c:v>
+                </c:pt>
+                <c:pt idx="2">
+                  <c:v>8%</c:v>
+                </c:pt>
+                <c:pt idx="3">
+                  <c:v>12%</c:v>
                 </c:pt>
               </c:strCache>
             </c:strRef>
           </c:cat>
           <c:val>
             <c:numRef>
-              <c:f>Sheet1!$B$2:$B$3</c:f>
+              <c:f>Sheet1!$B$2:$B$5</c:f>
               <c:numCache>
                 <c:formatCode>General</c:formatCode>
-                <c:ptCount val="2"/>
+                <c:ptCount val="4"/>
                 <c:pt idx="0">
-                  <c:v>5.784228</c:v>
+                  <c:v>6.773562437562439</c:v>
                 </c:pt>
                 <c:pt idx="1">
-                  <c:v>5.429776178571429</c:v>
+                  <c:v>9.596106331618323</c:v>
+                </c:pt>
+                <c:pt idx="2">
+                  <c:v>12.057466708315923</c:v>
+                </c:pt>
+                <c:pt idx="3">
+                  <c:v>15.938647936308048</c:v>
                 </c:pt>
               </c:numCache>
             </c:numRef>
@@ -1325,7 +1600,7 @@
               <c:strCache>
                 <c:ptCount val="1"/>
                 <c:pt idx="0">
-                  <c:v>Equities</c:v>
+                  <c:v>2030 target, $m</c:v>
                 </c:pt>
               </c:strCache>
             </c:strRef>
@@ -1342,36 +1617,47 @@
           </c:spPr>
           <c:cat>
             <c:strRef>
-              <c:f>Sheet1!$A$2:$A$3</c:f>
+              <c:f>Sheet1!$A$2:$A$5</c:f>
               <c:strCache>
-                <c:ptCount val="2"/>
+                <c:ptCount val="4"/>
                 <c:pt idx="0">
-                  <c:v>Principal</c:v>
+                  <c:v>0%</c:v>
                 </c:pt>
                 <c:pt idx="1">
-                  <c:v>Coupon</c:v>
+                  <c:v>4.80%</c:v>
+                </c:pt>
+                <c:pt idx="2">
+                  <c:v>8%</c:v>
+                </c:pt>
+                <c:pt idx="3">
+                  <c:v>12%</c:v>
                 </c:pt>
               </c:strCache>
             </c:strRef>
           </c:cat>
           <c:val>
             <c:numRef>
-              <c:f>Sheet1!$C$2:$C$3</c:f>
+              <c:f>Sheet1!$C$2:$C$5</c:f>
               <c:numCache>
                 <c:formatCode>General</c:formatCode>
-                <c:ptCount val="2"/>
+                <c:ptCount val="4"/>
                 <c:pt idx="0">
-                  <c:v>6.209562437562439</c:v>
+                  <c:v>9.596106443820231</c:v>
                 </c:pt>
                 <c:pt idx="1">
-                  <c:v>6.563660161267304</c:v>
+                  <c:v>9.596106443820231</c:v>
+                </c:pt>
+                <c:pt idx="2">
+                  <c:v>9.596106443820231</c:v>
+                </c:pt>
+                <c:pt idx="3">
+                  <c:v>9.596106443820231</c:v>
                 </c:pt>
               </c:numCache>
             </c:numRef>
           </c:val>
         </c:ser>
         <c:gapWidth val="65"/>
-        <c:overlap val="100"/>
         <c:axId val="-2068027336"/>
         <c:axId val="-2113994440"/>
       </c:barChart>
@@ -1381,7 +1667,7 @@
           <c:orientation val="minMax"/>
         </c:scaling>
         <c:delete val="0"/>
-        <c:axPos val="l"/>
+        <c:axPos val="b"/>
         <c:majorTickMark val="out"/>
         <c:minorTickMark val="none"/>
         <c:tickLblPos val="nextTo"/>
@@ -1406,11 +1692,11 @@
       <c:valAx>
         <c:axId val="-2113994440"/>
         <c:scaling>
-          <c:max val="12.0"/>
+          <c:max val="17.0"/>
           <c:min val="0.0"/>
         </c:scaling>
         <c:delete val="0"/>
-        <c:axPos val="b"/>
+        <c:axPos val="l"/>
         <c:majorGridlines/>
         <c:majorTickMark val="out"/>
         <c:minorTickMark val="none"/>
@@ -1463,7 +1749,7 @@
 </c:chartSpace>
 </file>
 
-<file path=ppt/charts/chart3.xml><?xml version="1.0" encoding="utf-8"?>
+<file path=ppt/charts/chart2.xml><?xml version="1.0" encoding="utf-8"?>
 <c:chartSpace xmlns:c="http://schemas.openxmlformats.org/drawingml/2006/chart" xmlns:a="http://schemas.openxmlformats.org/drawingml/2006/main" xmlns:r="http://schemas.openxmlformats.org/officeDocument/2006/relationships">
   <c:date1904 val="0"/>
   <c:chart>
@@ -1481,7 +1767,7 @@
               <c:strCache>
                 <c:ptCount val="1"/>
                 <c:pt idx="0">
-                  <c:v>Retained cash, USD thousands</c:v>
+                  <c:v>USD million</c:v>
                 </c:pt>
               </c:strCache>
             </c:strRef>
@@ -1498,22 +1784,16 @@
           </c:spPr>
           <c:cat>
             <c:strRef>
-              <c:f>Sheet1!$A$2:$A$6</c:f>
+              <c:f>Sheet1!$A$2:$A$4</c:f>
               <c:strCache>
-                <c:ptCount val="5"/>
+                <c:ptCount val="3"/>
                 <c:pt idx="0">
-                  <c:v>2023</c:v>
+                  <c:v>2024</c:v>
                 </c:pt>
                 <c:pt idx="1">
-                  <c:v>2024</c:v>
+                  <c:v>2025</c:v>
                 </c:pt>
                 <c:pt idx="2">
-                  <c:v>2025</c:v>
-                </c:pt>
-                <c:pt idx="3">
-                  <c:v>2026</c:v>
-                </c:pt>
-                <c:pt idx="4">
                   <c:v>2027</c:v>
                 </c:pt>
               </c:strCache>
@@ -1521,24 +1801,18 @@
           </c:cat>
           <c:val>
             <c:numRef>
-              <c:f>Sheet1!$B$2:$B$6</c:f>
+              <c:f>Sheet1!$B$2:$B$4</c:f>
               <c:numCache>
                 <c:formatCode>General</c:formatCode>
-                <c:ptCount val="5"/>
+                <c:ptCount val="3"/>
                 <c:pt idx="0">
-                  <c:v>132.0</c:v>
+                  <c:v>2.4</c:v>
                 </c:pt>
                 <c:pt idx="1">
-                  <c:v>264.0</c:v>
+                  <c:v>1.2</c:v>
                 </c:pt>
                 <c:pt idx="2">
-                  <c:v>396.0</c:v>
-                </c:pt>
-                <c:pt idx="3">
-                  <c:v>480.0</c:v>
-                </c:pt>
-                <c:pt idx="4">
-                  <c:v>564.0</c:v>
+                  <c:v>2.4</c:v>
                 </c:pt>
               </c:numCache>
             </c:numRef>
@@ -1579,7 +1853,7 @@
       <c:valAx>
         <c:axId val="-2113994440"/>
         <c:scaling>
-          <c:max val="640.0"/>
+          <c:max val="3.0"/>
           <c:min val="0.0"/>
         </c:scaling>
         <c:delete val="0"/>
@@ -1603,6 +1877,227 @@
         <c:crosses val="autoZero"/>
       </c:valAx>
     </c:plotArea>
+    <c:dispBlanksAs val="gap"/>
+  </c:chart>
+  <c:txPr>
+    <a:bodyPr/>
+    <a:lstStyle/>
+    <a:p>
+      <a:pPr>
+        <a:defRPr sz="1800"/>
+      </a:pPr>
+      <a:endParaRPr lang="en-US"/>
+    </a:p>
+  </c:txPr>
+  <c:externalData r:id="rId1">
+    <c:autoUpdate val="0"/>
+  </c:externalData>
+</c:chartSpace>
+</file>
+
+<file path=ppt/charts/chart3.xml><?xml version="1.0" encoding="utf-8"?>
+<c:chartSpace xmlns:c="http://schemas.openxmlformats.org/drawingml/2006/chart" xmlns:a="http://schemas.openxmlformats.org/drawingml/2006/main" xmlns:r="http://schemas.openxmlformats.org/officeDocument/2006/relationships">
+  <c:date1904 val="0"/>
+  <c:chart>
+    <c:autoTitleDeleted val="0"/>
+    <c:plotArea>
+      <c:barChart>
+        <c:barDir val="col"/>
+        <c:grouping val="clustered"/>
+        <c:ser>
+          <c:idx val="0"/>
+          <c:order val="0"/>
+          <c:tx>
+            <c:strRef>
+              <c:f>Sheet1!$B$1</c:f>
+              <c:strCache>
+                <c:ptCount val="1"/>
+                <c:pt idx="0">
+                  <c:v>Original</c:v>
+                </c:pt>
+              </c:strCache>
+            </c:strRef>
+          </c:tx>
+          <c:spPr>
+            <a:solidFill>
+              <a:srgbClr val="8DAE9D"/>
+            </a:solidFill>
+            <a:ln w="33020">
+              <a:solidFill>
+                <a:srgbClr val="8DAE9D"/>
+              </a:solidFill>
+            </a:ln>
+          </c:spPr>
+          <c:cat>
+            <c:strRef>
+              <c:f>Sheet1!$A$2:$A$4</c:f>
+              <c:strCache>
+                <c:ptCount val="3"/>
+                <c:pt idx="0">
+                  <c:v>2024</c:v>
+                </c:pt>
+                <c:pt idx="1">
+                  <c:v>2025</c:v>
+                </c:pt>
+                <c:pt idx="2">
+                  <c:v>2027</c:v>
+                </c:pt>
+              </c:strCache>
+            </c:strRef>
+          </c:cat>
+          <c:val>
+            <c:numRef>
+              <c:f>Sheet1!$B$2:$B$4</c:f>
+              <c:numCache>
+                <c:formatCode>General</c:formatCode>
+                <c:ptCount val="3"/>
+                <c:pt idx="0">
+                  <c:v>2.4</c:v>
+                </c:pt>
+                <c:pt idx="1">
+                  <c:v>0</c:v>
+                </c:pt>
+                <c:pt idx="2">
+                  <c:v>3.6</c:v>
+                </c:pt>
+              </c:numCache>
+            </c:numRef>
+          </c:val>
+        </c:ser>
+        <c:ser>
+          <c:idx val="1"/>
+          <c:order val="1"/>
+          <c:tx>
+            <c:strRef>
+              <c:f>Sheet1!$C$1</c:f>
+              <c:strCache>
+                <c:ptCount val="1"/>
+                <c:pt idx="0">
+                  <c:v>Revised</c:v>
+                </c:pt>
+              </c:strCache>
+            </c:strRef>
+          </c:tx>
+          <c:spPr>
+            <a:solidFill>
+              <a:srgbClr val="125449"/>
+            </a:solidFill>
+            <a:ln w="33020">
+              <a:solidFill>
+                <a:srgbClr val="125449"/>
+              </a:solidFill>
+            </a:ln>
+          </c:spPr>
+          <c:cat>
+            <c:strRef>
+              <c:f>Sheet1!$A$2:$A$4</c:f>
+              <c:strCache>
+                <c:ptCount val="3"/>
+                <c:pt idx="0">
+                  <c:v>2024</c:v>
+                </c:pt>
+                <c:pt idx="1">
+                  <c:v>2025</c:v>
+                </c:pt>
+                <c:pt idx="2">
+                  <c:v>2027</c:v>
+                </c:pt>
+              </c:strCache>
+            </c:strRef>
+          </c:cat>
+          <c:val>
+            <c:numRef>
+              <c:f>Sheet1!$C$2:$C$4</c:f>
+              <c:numCache>
+                <c:formatCode>General</c:formatCode>
+                <c:ptCount val="3"/>
+                <c:pt idx="0">
+                  <c:v>2.4</c:v>
+                </c:pt>
+                <c:pt idx="1">
+                  <c:v>1.2</c:v>
+                </c:pt>
+                <c:pt idx="2">
+                  <c:v>2.4</c:v>
+                </c:pt>
+              </c:numCache>
+            </c:numRef>
+          </c:val>
+        </c:ser>
+        <c:gapWidth val="65"/>
+        <c:axId val="-2068027336"/>
+        <c:axId val="-2113994440"/>
+      </c:barChart>
+      <c:catAx>
+        <c:axId val="-2068027336"/>
+        <c:scaling>
+          <c:orientation val="minMax"/>
+        </c:scaling>
+        <c:delete val="0"/>
+        <c:axPos val="b"/>
+        <c:majorTickMark val="out"/>
+        <c:minorTickMark val="none"/>
+        <c:tickLblPos val="nextTo"/>
+        <c:txPr>
+          <a:bodyPr/>
+          <a:lstStyle/>
+          <a:p>
+            <a:pPr>
+              <a:defRPr sz="1200">
+                <a:latin typeface="Lato"/>
+              </a:defRPr>
+            </a:pPr>
+          </a:p>
+        </c:txPr>
+        <c:crossAx val="-2113994440"/>
+        <c:crosses val="autoZero"/>
+        <c:auto val="1"/>
+        <c:lblAlgn val="ctr"/>
+        <c:lblOffset val="100"/>
+        <c:noMultiLvlLbl val="0"/>
+      </c:catAx>
+      <c:valAx>
+        <c:axId val="-2113994440"/>
+        <c:scaling>
+          <c:max val="4.0"/>
+          <c:min val="0.0"/>
+        </c:scaling>
+        <c:delete val="0"/>
+        <c:axPos val="l"/>
+        <c:majorGridlines/>
+        <c:majorTickMark val="out"/>
+        <c:minorTickMark val="none"/>
+        <c:tickLblPos val="nextTo"/>
+        <c:txPr>
+          <a:bodyPr/>
+          <a:lstStyle/>
+          <a:p>
+            <a:pPr>
+              <a:defRPr sz="1500">
+                <a:latin typeface="Lato"/>
+              </a:defRPr>
+            </a:pPr>
+          </a:p>
+        </c:txPr>
+        <c:crossAx val="-2068027336"/>
+        <c:crosses val="autoZero"/>
+      </c:valAx>
+    </c:plotArea>
+    <c:legend>
+      <c:legendPos val="b"/>
+      <c:overlay val="0"/>
+      <c:txPr>
+        <a:bodyPr/>
+        <a:lstStyle/>
+        <a:p>
+          <a:pPr>
+            <a:defRPr sz="1500">
+              <a:latin typeface="Lato"/>
+            </a:defRPr>
+          </a:pPr>
+        </a:p>
+      </c:txPr>
+    </c:legend>
     <c:dispBlanksAs val="gap"/>
   </c:chart>
   <c:txPr>
@@ -1629,7 +2124,7 @@
     <c:plotArea>
       <c:barChart>
         <c:barDir val="bar"/>
-        <c:grouping val="clustered"/>
+        <c:grouping val="stacked"/>
         <c:ser>
           <c:idx val="0"/>
           <c:order val="0"/>
@@ -1639,18 +2134,18 @@
               <c:strCache>
                 <c:ptCount val="1"/>
                 <c:pt idx="0">
-                  <c:v>Change, USD thousands</c:v>
+                  <c:v>Bonds</c:v>
                 </c:pt>
               </c:strCache>
             </c:strRef>
           </c:tx>
           <c:spPr>
             <a:solidFill>
-              <a:srgbClr val="BE7460"/>
+              <a:srgbClr val="125449"/>
             </a:solidFill>
             <a:ln w="33020">
               <a:solidFill>
-                <a:srgbClr val="BE7460"/>
+                <a:srgbClr val="125449"/>
               </a:solidFill>
             </a:ln>
           </c:spPr>
@@ -1675,16 +2170,71 @@
                 <c:formatCode>General</c:formatCode>
                 <c:ptCount val="2"/>
                 <c:pt idx="0">
-                  <c:v>-178.26366</c:v>
+                  <c:v>5.784228</c:v>
                 </c:pt>
                 <c:pt idx="1">
-                  <c:v>-168.60238</c:v>
+                  <c:v>5.429776178571429</c:v>
+                </c:pt>
+              </c:numCache>
+            </c:numRef>
+          </c:val>
+        </c:ser>
+        <c:ser>
+          <c:idx val="1"/>
+          <c:order val="1"/>
+          <c:tx>
+            <c:strRef>
+              <c:f>Sheet1!$C$1</c:f>
+              <c:strCache>
+                <c:ptCount val="1"/>
+                <c:pt idx="0">
+                  <c:v>Equities</c:v>
+                </c:pt>
+              </c:strCache>
+            </c:strRef>
+          </c:tx>
+          <c:spPr>
+            <a:solidFill>
+              <a:srgbClr val="C28E52"/>
+            </a:solidFill>
+            <a:ln w="33020">
+              <a:solidFill>
+                <a:srgbClr val="C28E52"/>
+              </a:solidFill>
+            </a:ln>
+          </c:spPr>
+          <c:cat>
+            <c:strRef>
+              <c:f>Sheet1!$A$2:$A$3</c:f>
+              <c:strCache>
+                <c:ptCount val="2"/>
+                <c:pt idx="0">
+                  <c:v>Principal</c:v>
+                </c:pt>
+                <c:pt idx="1">
+                  <c:v>Coupon</c:v>
+                </c:pt>
+              </c:strCache>
+            </c:strRef>
+          </c:cat>
+          <c:val>
+            <c:numRef>
+              <c:f>Sheet1!$C$2:$C$3</c:f>
+              <c:numCache>
+                <c:formatCode>General</c:formatCode>
+                <c:ptCount val="2"/>
+                <c:pt idx="0">
+                  <c:v>6.209562437562439</c:v>
+                </c:pt>
+                <c:pt idx="1">
+                  <c:v>6.563660161267304</c:v>
                 </c:pt>
               </c:numCache>
             </c:numRef>
           </c:val>
         </c:ser>
         <c:gapWidth val="65"/>
+        <c:overlap val="100"/>
         <c:axId val="-2068027336"/>
         <c:axId val="-2113994440"/>
       </c:barChart>
@@ -1719,11 +2269,184 @@
       <c:valAx>
         <c:axId val="-2113994440"/>
         <c:scaling>
-          <c:max val="0.0"/>
-          <c:min val="-200.0"/>
+          <c:max val="12.0"/>
+          <c:min val="0.0"/>
         </c:scaling>
         <c:delete val="0"/>
         <c:axPos val="b"/>
+        <c:majorGridlines/>
+        <c:majorTickMark val="out"/>
+        <c:minorTickMark val="none"/>
+        <c:tickLblPos val="nextTo"/>
+        <c:txPr>
+          <a:bodyPr/>
+          <a:lstStyle/>
+          <a:p>
+            <a:pPr>
+              <a:defRPr sz="1500">
+                <a:latin typeface="Lato"/>
+              </a:defRPr>
+            </a:pPr>
+          </a:p>
+        </c:txPr>
+        <c:crossAx val="-2068027336"/>
+        <c:crosses val="autoZero"/>
+      </c:valAx>
+    </c:plotArea>
+    <c:legend>
+      <c:legendPos val="b"/>
+      <c:overlay val="0"/>
+      <c:txPr>
+        <a:bodyPr/>
+        <a:lstStyle/>
+        <a:p>
+          <a:pPr>
+            <a:defRPr sz="1500">
+              <a:latin typeface="Lato"/>
+            </a:defRPr>
+          </a:pPr>
+        </a:p>
+      </c:txPr>
+    </c:legend>
+    <c:dispBlanksAs val="gap"/>
+  </c:chart>
+  <c:txPr>
+    <a:bodyPr/>
+    <a:lstStyle/>
+    <a:p>
+      <a:pPr>
+        <a:defRPr sz="1800"/>
+      </a:pPr>
+      <a:endParaRPr lang="en-US"/>
+    </a:p>
+  </c:txPr>
+  <c:externalData r:id="rId1">
+    <c:autoUpdate val="0"/>
+  </c:externalData>
+</c:chartSpace>
+</file>
+
+<file path=ppt/charts/chart5.xml><?xml version="1.0" encoding="utf-8"?>
+<c:chartSpace xmlns:c="http://schemas.openxmlformats.org/drawingml/2006/chart" xmlns:a="http://schemas.openxmlformats.org/drawingml/2006/main" xmlns:r="http://schemas.openxmlformats.org/officeDocument/2006/relationships">
+  <c:date1904 val="0"/>
+  <c:chart>
+    <c:autoTitleDeleted val="0"/>
+    <c:plotArea>
+      <c:barChart>
+        <c:barDir val="col"/>
+        <c:grouping val="clustered"/>
+        <c:ser>
+          <c:idx val="0"/>
+          <c:order val="0"/>
+          <c:tx>
+            <c:strRef>
+              <c:f>Sheet1!$B$1</c:f>
+              <c:strCache>
+                <c:ptCount val="1"/>
+                <c:pt idx="0">
+                  <c:v>Retained cash, USD thousands</c:v>
+                </c:pt>
+              </c:strCache>
+            </c:strRef>
+          </c:tx>
+          <c:spPr>
+            <a:solidFill>
+              <a:srgbClr val="125449"/>
+            </a:solidFill>
+            <a:ln w="33020">
+              <a:solidFill>
+                <a:srgbClr val="125449"/>
+              </a:solidFill>
+            </a:ln>
+          </c:spPr>
+          <c:cat>
+            <c:strRef>
+              <c:f>Sheet1!$A$2:$A$6</c:f>
+              <c:strCache>
+                <c:ptCount val="5"/>
+                <c:pt idx="0">
+                  <c:v>2023</c:v>
+                </c:pt>
+                <c:pt idx="1">
+                  <c:v>2024</c:v>
+                </c:pt>
+                <c:pt idx="2">
+                  <c:v>2025</c:v>
+                </c:pt>
+                <c:pt idx="3">
+                  <c:v>2026</c:v>
+                </c:pt>
+                <c:pt idx="4">
+                  <c:v>2027</c:v>
+                </c:pt>
+              </c:strCache>
+            </c:strRef>
+          </c:cat>
+          <c:val>
+            <c:numRef>
+              <c:f>Sheet1!$B$2:$B$6</c:f>
+              <c:numCache>
+                <c:formatCode>General</c:formatCode>
+                <c:ptCount val="5"/>
+                <c:pt idx="0">
+                  <c:v>132.0</c:v>
+                </c:pt>
+                <c:pt idx="1">
+                  <c:v>264.0</c:v>
+                </c:pt>
+                <c:pt idx="2">
+                  <c:v>396.0</c:v>
+                </c:pt>
+                <c:pt idx="3">
+                  <c:v>480.0</c:v>
+                </c:pt>
+                <c:pt idx="4">
+                  <c:v>564.0</c:v>
+                </c:pt>
+              </c:numCache>
+            </c:numRef>
+          </c:val>
+        </c:ser>
+        <c:gapWidth val="65"/>
+        <c:axId val="-2068027336"/>
+        <c:axId val="-2113994440"/>
+      </c:barChart>
+      <c:catAx>
+        <c:axId val="-2068027336"/>
+        <c:scaling>
+          <c:orientation val="minMax"/>
+        </c:scaling>
+        <c:delete val="0"/>
+        <c:axPos val="b"/>
+        <c:majorTickMark val="out"/>
+        <c:minorTickMark val="none"/>
+        <c:tickLblPos val="nextTo"/>
+        <c:txPr>
+          <a:bodyPr/>
+          <a:lstStyle/>
+          <a:p>
+            <a:pPr>
+              <a:defRPr sz="1200">
+                <a:latin typeface="Lato"/>
+              </a:defRPr>
+            </a:pPr>
+          </a:p>
+        </c:txPr>
+        <c:crossAx val="-2113994440"/>
+        <c:crosses val="autoZero"/>
+        <c:auto val="1"/>
+        <c:lblAlgn val="ctr"/>
+        <c:lblOffset val="100"/>
+        <c:noMultiLvlLbl val="0"/>
+      </c:catAx>
+      <c:valAx>
+        <c:axId val="-2113994440"/>
+        <c:scaling>
+          <c:max val="640.0"/>
+          <c:min val="0.0"/>
+        </c:scaling>
+        <c:delete val="0"/>
+        <c:axPos val="l"/>
         <c:majorGridlines/>
         <c:majorTickMark val="out"/>
         <c:minorTickMark val="none"/>
@@ -1761,7 +2484,147 @@
 </c:chartSpace>
 </file>
 
-<file path=ppt/charts/chart5.xml><?xml version="1.0" encoding="utf-8"?>
+<file path=ppt/charts/chart6.xml><?xml version="1.0" encoding="utf-8"?>
+<c:chartSpace xmlns:c="http://schemas.openxmlformats.org/drawingml/2006/chart" xmlns:a="http://schemas.openxmlformats.org/drawingml/2006/main" xmlns:r="http://schemas.openxmlformats.org/officeDocument/2006/relationships">
+  <c:date1904 val="0"/>
+  <c:chart>
+    <c:autoTitleDeleted val="0"/>
+    <c:plotArea>
+      <c:barChart>
+        <c:barDir val="bar"/>
+        <c:grouping val="clustered"/>
+        <c:ser>
+          <c:idx val="0"/>
+          <c:order val="0"/>
+          <c:tx>
+            <c:strRef>
+              <c:f>Sheet1!$B$1</c:f>
+              <c:strCache>
+                <c:ptCount val="1"/>
+                <c:pt idx="0">
+                  <c:v>Change, USD thousands</c:v>
+                </c:pt>
+              </c:strCache>
+            </c:strRef>
+          </c:tx>
+          <c:spPr>
+            <a:solidFill>
+              <a:srgbClr val="BE7460"/>
+            </a:solidFill>
+            <a:ln w="33020">
+              <a:solidFill>
+                <a:srgbClr val="BE7460"/>
+              </a:solidFill>
+            </a:ln>
+          </c:spPr>
+          <c:cat>
+            <c:strRef>
+              <c:f>Sheet1!$A$2:$A$3</c:f>
+              <c:strCache>
+                <c:ptCount val="2"/>
+                <c:pt idx="0">
+                  <c:v>Principal</c:v>
+                </c:pt>
+                <c:pt idx="1">
+                  <c:v>Coupon</c:v>
+                </c:pt>
+              </c:strCache>
+            </c:strRef>
+          </c:cat>
+          <c:val>
+            <c:numRef>
+              <c:f>Sheet1!$B$2:$B$3</c:f>
+              <c:numCache>
+                <c:formatCode>General</c:formatCode>
+                <c:ptCount val="2"/>
+                <c:pt idx="0">
+                  <c:v>-178.26366</c:v>
+                </c:pt>
+                <c:pt idx="1">
+                  <c:v>-168.60238</c:v>
+                </c:pt>
+              </c:numCache>
+            </c:numRef>
+          </c:val>
+        </c:ser>
+        <c:gapWidth val="65"/>
+        <c:axId val="-2068027336"/>
+        <c:axId val="-2113994440"/>
+      </c:barChart>
+      <c:catAx>
+        <c:axId val="-2068027336"/>
+        <c:scaling>
+          <c:orientation val="minMax"/>
+        </c:scaling>
+        <c:delete val="0"/>
+        <c:axPos val="l"/>
+        <c:majorTickMark val="out"/>
+        <c:minorTickMark val="none"/>
+        <c:tickLblPos val="nextTo"/>
+        <c:txPr>
+          <a:bodyPr/>
+          <a:lstStyle/>
+          <a:p>
+            <a:pPr>
+              <a:defRPr sz="1200">
+                <a:latin typeface="Lato"/>
+              </a:defRPr>
+            </a:pPr>
+          </a:p>
+        </c:txPr>
+        <c:crossAx val="-2113994440"/>
+        <c:crosses val="autoZero"/>
+        <c:auto val="1"/>
+        <c:lblAlgn val="ctr"/>
+        <c:lblOffset val="100"/>
+        <c:noMultiLvlLbl val="0"/>
+      </c:catAx>
+      <c:valAx>
+        <c:axId val="-2113994440"/>
+        <c:scaling>
+          <c:max val="0.0"/>
+          <c:min val="-200.0"/>
+        </c:scaling>
+        <c:delete val="0"/>
+        <c:axPos val="b"/>
+        <c:majorGridlines/>
+        <c:majorTickMark val="out"/>
+        <c:minorTickMark val="none"/>
+        <c:tickLblPos val="nextTo"/>
+        <c:txPr>
+          <a:bodyPr/>
+          <a:lstStyle/>
+          <a:p>
+            <a:pPr>
+              <a:defRPr sz="1500">
+                <a:latin typeface="Lato"/>
+              </a:defRPr>
+            </a:pPr>
+          </a:p>
+        </c:txPr>
+        <c:crossAx val="-2068027336"/>
+        <c:crosses val="autoZero"/>
+      </c:valAx>
+    </c:plotArea>
+    <c:dispBlanksAs val="gap"/>
+  </c:chart>
+  <c:txPr>
+    <a:bodyPr/>
+    <a:lstStyle/>
+    <a:p>
+      <a:pPr>
+        <a:defRPr sz="1800"/>
+      </a:pPr>
+      <a:endParaRPr lang="en-US"/>
+    </a:p>
+  </c:txPr>
+  <c:externalData r:id="rId1">
+    <c:autoUpdate val="0"/>
+  </c:externalData>
+</c:chartSpace>
+</file>
+
+<file path=ppt/charts/chart7.xml><?xml version="1.0" encoding="utf-8"?>
 <c:chartSpace xmlns:c="http://schemas.openxmlformats.org/drawingml/2006/chart" xmlns:a="http://schemas.openxmlformats.org/drawingml/2006/main" xmlns:r="http://schemas.openxmlformats.org/officeDocument/2006/relationships">
   <c:date1904 val="0"/>
   <c:roundedCorners val="0"/>
@@ -1880,7 +2743,7 @@
 </c:chartSpace>
 </file>
 
-<file path=ppt/charts/chart6.xml><?xml version="1.0" encoding="utf-8"?>
+<file path=ppt/charts/chart8.xml><?xml version="1.0" encoding="utf-8"?>
 <c:chartSpace xmlns:c="http://schemas.openxmlformats.org/drawingml/2006/chart" xmlns:a="http://schemas.openxmlformats.org/drawingml/2006/main" xmlns:r="http://schemas.openxmlformats.org/officeDocument/2006/relationships">
   <c:date1904 val="0"/>
   <c:chart>
@@ -2015,367 +2878,6 @@
         <c:axId val="-2113994440"/>
         <c:scaling>
           <c:max val="16.0"/>
-          <c:min val="0.0"/>
-        </c:scaling>
-        <c:delete val="0"/>
-        <c:axPos val="b"/>
-        <c:majorGridlines/>
-        <c:majorTickMark val="out"/>
-        <c:minorTickMark val="none"/>
-        <c:tickLblPos val="nextTo"/>
-        <c:txPr>
-          <a:bodyPr/>
-          <a:lstStyle/>
-          <a:p>
-            <a:pPr>
-              <a:defRPr sz="1500">
-                <a:latin typeface="Lato"/>
-              </a:defRPr>
-            </a:pPr>
-          </a:p>
-        </c:txPr>
-        <c:crossAx val="-2068027336"/>
-        <c:crosses val="autoZero"/>
-      </c:valAx>
-    </c:plotArea>
-    <c:dispBlanksAs val="gap"/>
-  </c:chart>
-  <c:txPr>
-    <a:bodyPr/>
-    <a:lstStyle/>
-    <a:p>
-      <a:pPr>
-        <a:defRPr sz="1800"/>
-      </a:pPr>
-      <a:endParaRPr lang="en-US"/>
-    </a:p>
-  </c:txPr>
-  <c:externalData r:id="rId1">
-    <c:autoUpdate val="0"/>
-  </c:externalData>
-</c:chartSpace>
-</file>
-
-<file path=ppt/charts/chart7.xml><?xml version="1.0" encoding="utf-8"?>
-<c:chartSpace xmlns:c="http://schemas.openxmlformats.org/drawingml/2006/chart" xmlns:a="http://schemas.openxmlformats.org/drawingml/2006/main" xmlns:r="http://schemas.openxmlformats.org/officeDocument/2006/relationships">
-  <c:date1904 val="0"/>
-  <c:chart>
-    <c:autoTitleDeleted val="0"/>
-    <c:plotArea>
-      <c:barChart>
-        <c:barDir val="col"/>
-        <c:grouping val="clustered"/>
-        <c:ser>
-          <c:idx val="0"/>
-          <c:order val="0"/>
-          <c:tx>
-            <c:strRef>
-              <c:f>Sheet1!$B$1</c:f>
-              <c:strCache>
-                <c:ptCount val="1"/>
-                <c:pt idx="0">
-                  <c:v>Return %</c:v>
-                </c:pt>
-              </c:strCache>
-            </c:strRef>
-          </c:tx>
-          <c:spPr>
-            <a:solidFill>
-              <a:srgbClr val="125449"/>
-            </a:solidFill>
-            <a:ln w="33020">
-              <a:solidFill>
-                <a:srgbClr val="125449"/>
-              </a:solidFill>
-            </a:ln>
-          </c:spPr>
-          <c:cat>
-            <c:strRef>
-              <c:f>Sheet1!$A$2:$A$4</c:f>
-              <c:strCache>
-                <c:ptCount val="3"/>
-                <c:pt idx="0">
-                  <c:v>Sample MV</c:v>
-                </c:pt>
-                <c:pt idx="1">
-                  <c:v>Single Index</c:v>
-                </c:pt>
-                <c:pt idx="2">
-                  <c:v>Min. Variance</c:v>
-                </c:pt>
-              </c:strCache>
-            </c:strRef>
-          </c:cat>
-          <c:val>
-            <c:numRef>
-              <c:f>Sheet1!$B$2:$B$4</c:f>
-              <c:numCache>
-                <c:formatCode>General</c:formatCode>
-                <c:ptCount val="3"/>
-                <c:pt idx="0">
-                  <c:v>12.046581187371338</c:v>
-                </c:pt>
-                <c:pt idx="1">
-                  <c:v>11.905535603931195</c:v>
-                </c:pt>
-                <c:pt idx="2">
-                  <c:v>10.857185131194342</c:v>
-                </c:pt>
-              </c:numCache>
-            </c:numRef>
-          </c:val>
-        </c:ser>
-        <c:ser>
-          <c:idx val="1"/>
-          <c:order val="1"/>
-          <c:tx>
-            <c:strRef>
-              <c:f>Sheet1!$C$1</c:f>
-              <c:strCache>
-                <c:ptCount val="1"/>
-                <c:pt idx="0">
-                  <c:v>Volatility %</c:v>
-                </c:pt>
-              </c:strCache>
-            </c:strRef>
-          </c:tx>
-          <c:spPr>
-            <a:solidFill>
-              <a:srgbClr val="C28E52"/>
-            </a:solidFill>
-            <a:ln w="33020">
-              <a:solidFill>
-                <a:srgbClr val="C28E52"/>
-              </a:solidFill>
-            </a:ln>
-          </c:spPr>
-          <c:cat>
-            <c:strRef>
-              <c:f>Sheet1!$A$2:$A$4</c:f>
-              <c:strCache>
-                <c:ptCount val="3"/>
-                <c:pt idx="0">
-                  <c:v>Sample MV</c:v>
-                </c:pt>
-                <c:pt idx="1">
-                  <c:v>Single Index</c:v>
-                </c:pt>
-                <c:pt idx="2">
-                  <c:v>Min. Variance</c:v>
-                </c:pt>
-              </c:strCache>
-            </c:strRef>
-          </c:cat>
-          <c:val>
-            <c:numRef>
-              <c:f>Sheet1!$C$2:$C$4</c:f>
-              <c:numCache>
-                <c:formatCode>General</c:formatCode>
-                <c:ptCount val="3"/>
-                <c:pt idx="0">
-                  <c:v>14.97572487681616</c:v>
-                </c:pt>
-                <c:pt idx="1">
-                  <c:v>14.462438864444218</c:v>
-                </c:pt>
-                <c:pt idx="2">
-                  <c:v>13.147012521086127</c:v>
-                </c:pt>
-              </c:numCache>
-            </c:numRef>
-          </c:val>
-        </c:ser>
-        <c:gapWidth val="65"/>
-        <c:axId val="-2068027336"/>
-        <c:axId val="-2113994440"/>
-      </c:barChart>
-      <c:catAx>
-        <c:axId val="-2068027336"/>
-        <c:scaling>
-          <c:orientation val="minMax"/>
-        </c:scaling>
-        <c:delete val="0"/>
-        <c:axPos val="b"/>
-        <c:majorTickMark val="out"/>
-        <c:minorTickMark val="none"/>
-        <c:tickLblPos val="nextTo"/>
-        <c:txPr>
-          <a:bodyPr/>
-          <a:lstStyle/>
-          <a:p>
-            <a:pPr>
-              <a:defRPr sz="1200">
-                <a:latin typeface="Lato"/>
-              </a:defRPr>
-            </a:pPr>
-          </a:p>
-        </c:txPr>
-        <c:crossAx val="-2113994440"/>
-        <c:crosses val="autoZero"/>
-        <c:auto val="1"/>
-        <c:lblAlgn val="ctr"/>
-        <c:lblOffset val="100"/>
-        <c:noMultiLvlLbl val="0"/>
-      </c:catAx>
-      <c:valAx>
-        <c:axId val="-2113994440"/>
-        <c:scaling>
-          <c:max val="17.0"/>
-          <c:min val="0.0"/>
-        </c:scaling>
-        <c:delete val="0"/>
-        <c:axPos val="l"/>
-        <c:majorGridlines/>
-        <c:majorTickMark val="out"/>
-        <c:minorTickMark val="none"/>
-        <c:tickLblPos val="nextTo"/>
-        <c:txPr>
-          <a:bodyPr/>
-          <a:lstStyle/>
-          <a:p>
-            <a:pPr>
-              <a:defRPr sz="1500">
-                <a:latin typeface="Lato"/>
-              </a:defRPr>
-            </a:pPr>
-          </a:p>
-        </c:txPr>
-        <c:crossAx val="-2068027336"/>
-        <c:crosses val="autoZero"/>
-      </c:valAx>
-    </c:plotArea>
-    <c:legend>
-      <c:legendPos val="b"/>
-      <c:overlay val="0"/>
-      <c:txPr>
-        <a:bodyPr/>
-        <a:lstStyle/>
-        <a:p>
-          <a:pPr>
-            <a:defRPr sz="1500">
-              <a:latin typeface="Lato"/>
-            </a:defRPr>
-          </a:pPr>
-        </a:p>
-      </c:txPr>
-    </c:legend>
-    <c:dispBlanksAs val="gap"/>
-  </c:chart>
-  <c:txPr>
-    <a:bodyPr/>
-    <a:lstStyle/>
-    <a:p>
-      <a:pPr>
-        <a:defRPr sz="1800"/>
-      </a:pPr>
-      <a:endParaRPr lang="en-US"/>
-    </a:p>
-  </c:txPr>
-  <c:externalData r:id="rId1">
-    <c:autoUpdate val="0"/>
-  </c:externalData>
-</c:chartSpace>
-</file>
-
-<file path=ppt/charts/chart8.xml><?xml version="1.0" encoding="utf-8"?>
-<c:chartSpace xmlns:c="http://schemas.openxmlformats.org/drawingml/2006/chart" xmlns:a="http://schemas.openxmlformats.org/drawingml/2006/main" xmlns:r="http://schemas.openxmlformats.org/officeDocument/2006/relationships">
-  <c:date1904 val="0"/>
-  <c:chart>
-    <c:autoTitleDeleted val="0"/>
-    <c:plotArea>
-      <c:barChart>
-        <c:barDir val="bar"/>
-        <c:grouping val="clustered"/>
-        <c:ser>
-          <c:idx val="0"/>
-          <c:order val="0"/>
-          <c:tx>
-            <c:strRef>
-              <c:f>Sheet1!$B$1</c:f>
-              <c:strCache>
-                <c:ptCount val="1"/>
-                <c:pt idx="0">
-                  <c:v>Adjusted R²</c:v>
-                </c:pt>
-              </c:strCache>
-            </c:strRef>
-          </c:tx>
-          <c:spPr>
-            <a:solidFill>
-              <a:srgbClr val="125449"/>
-            </a:solidFill>
-            <a:ln w="33020">
-              <a:solidFill>
-                <a:srgbClr val="125449"/>
-              </a:solidFill>
-            </a:ln>
-          </c:spPr>
-          <c:cat>
-            <c:strRef>
-              <c:f>Sheet1!$A$2:$A$3</c:f>
-              <c:strCache>
-                <c:ptCount val="2"/>
-                <c:pt idx="0">
-                  <c:v>CAPM</c:v>
-                </c:pt>
-                <c:pt idx="1">
-                  <c:v>FF3</c:v>
-                </c:pt>
-              </c:strCache>
-            </c:strRef>
-          </c:cat>
-          <c:val>
-            <c:numRef>
-              <c:f>Sheet1!$B$2:$B$3</c:f>
-              <c:numCache>
-                <c:formatCode>General</c:formatCode>
-                <c:ptCount val="2"/>
-                <c:pt idx="0">
-                  <c:v>0.7849860862</c:v>
-                </c:pt>
-                <c:pt idx="1">
-                  <c:v>0.8436523346</c:v>
-                </c:pt>
-              </c:numCache>
-            </c:numRef>
-          </c:val>
-        </c:ser>
-        <c:gapWidth val="65"/>
-        <c:axId val="-2068027336"/>
-        <c:axId val="-2113994440"/>
-      </c:barChart>
-      <c:catAx>
-        <c:axId val="-2068027336"/>
-        <c:scaling>
-          <c:orientation val="minMax"/>
-        </c:scaling>
-        <c:delete val="0"/>
-        <c:axPos val="l"/>
-        <c:majorTickMark val="out"/>
-        <c:minorTickMark val="none"/>
-        <c:tickLblPos val="nextTo"/>
-        <c:txPr>
-          <a:bodyPr/>
-          <a:lstStyle/>
-          <a:p>
-            <a:pPr>
-              <a:defRPr sz="1200">
-                <a:latin typeface="Lato"/>
-              </a:defRPr>
-            </a:pPr>
-          </a:p>
-        </c:txPr>
-        <c:crossAx val="-2113994440"/>
-        <c:crosses val="autoZero"/>
-        <c:auto val="1"/>
-        <c:lblAlgn val="ctr"/>
-        <c:lblOffset val="100"/>
-        <c:noMultiLvlLbl val="0"/>
-      </c:catAx>
-      <c:valAx>
-        <c:axId val="-2113994440"/>
-        <c:scaling>
-          <c:max val="1.0"/>
           <c:min val="0.0"/>
         </c:scaling>
         <c:delete val="0"/>
@@ -2424,7 +2926,7 @@
     <c:autoTitleDeleted val="0"/>
     <c:plotArea>
       <c:barChart>
-        <c:barDir val="bar"/>
+        <c:barDir val="col"/>
         <c:grouping val="clustered"/>
         <c:ser>
           <c:idx val="0"/>
@@ -2435,7 +2937,67 @@
               <c:strCache>
                 <c:ptCount val="1"/>
                 <c:pt idx="0">
-                  <c:v>Exposure</c:v>
+                  <c:v>Return %</c:v>
+                </c:pt>
+              </c:strCache>
+            </c:strRef>
+          </c:tx>
+          <c:spPr>
+            <a:solidFill>
+              <a:srgbClr val="125449"/>
+            </a:solidFill>
+            <a:ln w="33020">
+              <a:solidFill>
+                <a:srgbClr val="125449"/>
+              </a:solidFill>
+            </a:ln>
+          </c:spPr>
+          <c:cat>
+            <c:strRef>
+              <c:f>Sheet1!$A$2:$A$4</c:f>
+              <c:strCache>
+                <c:ptCount val="3"/>
+                <c:pt idx="0">
+                  <c:v>Sample MV</c:v>
+                </c:pt>
+                <c:pt idx="1">
+                  <c:v>Single Index</c:v>
+                </c:pt>
+                <c:pt idx="2">
+                  <c:v>Min. Variance</c:v>
+                </c:pt>
+              </c:strCache>
+            </c:strRef>
+          </c:cat>
+          <c:val>
+            <c:numRef>
+              <c:f>Sheet1!$B$2:$B$4</c:f>
+              <c:numCache>
+                <c:formatCode>General</c:formatCode>
+                <c:ptCount val="3"/>
+                <c:pt idx="0">
+                  <c:v>12.046581187371338</c:v>
+                </c:pt>
+                <c:pt idx="1">
+                  <c:v>11.905535603931195</c:v>
+                </c:pt>
+                <c:pt idx="2">
+                  <c:v>10.857185131194342</c:v>
+                </c:pt>
+              </c:numCache>
+            </c:numRef>
+          </c:val>
+        </c:ser>
+        <c:ser>
+          <c:idx val="1"/>
+          <c:order val="1"/>
+          <c:tx>
+            <c:strRef>
+              <c:f>Sheet1!$C$1</c:f>
+              <c:strCache>
+                <c:ptCount val="1"/>
+                <c:pt idx="0">
+                  <c:v>Volatility %</c:v>
                 </c:pt>
               </c:strCache>
             </c:strRef>
@@ -2456,31 +3018,31 @@
               <c:strCache>
                 <c:ptCount val="3"/>
                 <c:pt idx="0">
-                  <c:v>Market β</c:v>
+                  <c:v>Sample MV</c:v>
                 </c:pt>
                 <c:pt idx="1">
-                  <c:v>SMB</c:v>
+                  <c:v>Single Index</c:v>
                 </c:pt>
                 <c:pt idx="2">
-                  <c:v>HML</c:v>
+                  <c:v>Min. Variance</c:v>
                 </c:pt>
               </c:strCache>
             </c:strRef>
           </c:cat>
           <c:val>
             <c:numRef>
-              <c:f>Sheet1!$B$2:$B$4</c:f>
+              <c:f>Sheet1!$C$2:$C$4</c:f>
               <c:numCache>
                 <c:formatCode>General</c:formatCode>
                 <c:ptCount val="3"/>
                 <c:pt idx="0">
-                  <c:v>0.8667145258</c:v>
+                  <c:v>14.97572487681616</c:v>
                 </c:pt>
                 <c:pt idx="1">
-                  <c:v>-0.4264931863</c:v>
+                  <c:v>14.462438864444218</c:v>
                 </c:pt>
                 <c:pt idx="2">
-                  <c:v>0.01012961894</c:v>
+                  <c:v>13.147012521086127</c:v>
                 </c:pt>
               </c:numCache>
             </c:numRef>
@@ -2496,7 +3058,7 @@
           <c:orientation val="minMax"/>
         </c:scaling>
         <c:delete val="0"/>
-        <c:axPos val="l"/>
+        <c:axPos val="b"/>
         <c:majorTickMark val="out"/>
         <c:minorTickMark val="none"/>
         <c:tickLblPos val="nextTo"/>
@@ -2521,11 +3083,11 @@
       <c:valAx>
         <c:axId val="-2113994440"/>
         <c:scaling>
-          <c:max val="1.0"/>
-          <c:min val="-0.6"/>
+          <c:max val="17.0"/>
+          <c:min val="0.0"/>
         </c:scaling>
         <c:delete val="0"/>
-        <c:axPos val="b"/>
+        <c:axPos val="l"/>
         <c:majorGridlines/>
         <c:majorTickMark val="out"/>
         <c:minorTickMark val="none"/>
@@ -2545,6 +3107,21 @@
         <c:crosses val="autoZero"/>
       </c:valAx>
     </c:plotArea>
+    <c:legend>
+      <c:legendPos val="b"/>
+      <c:overlay val="0"/>
+      <c:txPr>
+        <a:bodyPr/>
+        <a:lstStyle/>
+        <a:p>
+          <a:pPr>
+            <a:defRPr sz="1500">
+              <a:latin typeface="Lato"/>
+            </a:defRPr>
+          </a:pPr>
+        </a:p>
+      </c:txPr>
+    </c:legend>
     <c:dispBlanksAs val="gap"/>
   </c:chart>
   <c:txPr>
@@ -2958,7 +3535,7 @@
           <a:lstStyle/>
           <a:p>
             <a:r>
-              <a:t>Source and model notes: Source: original case and revised mandate. Campus photograph: Tomwsulcer (Cornell University), Wikimedia Commons CC0, illustrative only; not a Kappa-owned building. Details and SHA-256 are in assets/Sources.json.</a:t>
+              <a:t>Source and model notes: Case-date $12m reconciliation: principal-matching bond cost $5,784,228; net equity $6,209,562.44; 10bp equity entry fee $6,209.56. All quantities are from archived case calculations; no photographs.</a:t>
             </a:r>
           </a:p>
         </p:txBody>
@@ -3518,7 +4095,7 @@
           <a:lstStyle/>
           <a:p>
             <a:r>
-              <a:t>Source and model notes: Group-recommended principal matching and frozen Sample MV. No trustee endorsement, LMS confirmation or individual signature is implied. Seminar-library photograph by Morshedhasan12, CC0, illustrative only. See assets/Sources.json.</a:t>
+              <a:t>Source and model notes: 2030 equity scenario sensitivity holds bond cash $564,000 at zero reinvestment: total=net equity (1+r)^8 plus residual cash. 2022-dollar $8m goal inflates at 2.3% for 8 years to $9.596m nominal. These are modeled illustrations, not return forecasts. Funding remains a group proposal; no trustee or LMS approval is implied.</a:t>
             </a:r>
           </a:p>
         </p:txBody>
@@ -3588,7 +4165,7 @@
           <a:lstStyle/>
           <a:p>
             <a:r>
-              <a:t>Source and model notes: Group-selected principal bonds: 2,400 Beta, 1,200 Gamma, 2,400 Delta; net equity 6,209,562.44; 4.7951% hurdle; 2025 cash 396k. Campus photograph: Tomwsulcer, CC0, illustrative only.</a:t>
+              <a:t>Source and model notes: Group-selected principal bonds 2,400 Beta, 1,200 Gamma, 2,400 Delta; net equity $6,209,562.44 and 4.7951% growth hurdle. Revised payments: $2.4m in 2024, $1.2m in 2025, $2.4m in 2027; the 2025 retained cash is $396k.</a:t>
             </a:r>
           </a:p>
         </p:txBody>
@@ -3798,7 +4375,7 @@
           <a:lstStyle/>
           <a:p>
             <a:r>
-              <a:t>Source and model notes: Retained principal-plan cash: 2023 132k, 2024 264k, 2025 396k, 2026 480k, 2027 564k. Seminar-library image: Morshedhasan12, Wikimedia Commons CC0; illustrative only.</a:t>
+              <a:t>Source and model notes: Selected principal-matched bond ledger: retained cash $132k end-2023, $264k end-2024, $396k end-2025, $480k end-2026, $564k end-2027. Gamma principal $1.2m meets the 2025 liability.</a:t>
             </a:r>
           </a:p>
         </p:txBody>
@@ -7345,7 +7922,7 @@
         <p:spPr>
           <a:xfrm>
             <a:off x="0" y="1920240"/>
-            <a:ext cx="12380976" cy="6099048"/>
+            <a:ext cx="11247120" cy="6099048"/>
           </a:xfrm>
           <a:prstGeom prst="rect">
             <a:avLst/>
@@ -7379,33 +7956,216 @@
           </a:p>
         </p:txBody>
       </p:sp>
-      <p:pic>
-        <p:nvPicPr>
-          <p:cNvPr id="10" name="Picture 9" descr="image.jpg"/>
-          <p:cNvPicPr>
-            <a:picLocks noChangeAspect="1"/>
-          </p:cNvPicPr>
-          <p:nvPr/>
-        </p:nvPicPr>
-        <p:blipFill>
-          <a:blip r:embed="rId2"/>
-          <a:stretch>
-            <a:fillRect/>
-          </a:stretch>
-        </p:blipFill>
-        <p:spPr>
-          <a:xfrm>
-            <a:off x="11795760" y="1380744"/>
-            <a:ext cx="5660136" cy="8147304"/>
-          </a:xfrm>
-          <a:prstGeom prst="rect">
-            <a:avLst/>
-          </a:prstGeom>
-        </p:spPr>
-      </p:pic>
+      <p:sp>
+        <p:nvSpPr>
+          <p:cNvPr id="10" name="Rounded Rectangle 9"/>
+          <p:cNvSpPr/>
+          <p:nvPr/>
+        </p:nvSpPr>
+        <p:spPr>
+          <a:xfrm>
+            <a:off x="11576304" y="1920240"/>
+            <a:ext cx="5971032" cy="6099048"/>
+          </a:xfrm>
+          <a:prstGeom prst="roundRect">
+            <a:avLst>
+              <a:gd name="adj" fmla="val 7000"/>
+            </a:avLst>
+          </a:prstGeom>
+          <a:solidFill>
+            <a:srgbClr val="EAF0E9"/>
+          </a:solidFill>
+          <a:ln>
+            <a:noFill/>
+          </a:ln>
+        </p:spPr>
+        <p:style>
+          <a:lnRef idx="1">
+            <a:schemeClr val="accent1"/>
+          </a:lnRef>
+          <a:fillRef idx="3">
+            <a:schemeClr val="accent1"/>
+          </a:fillRef>
+          <a:effectRef idx="2">
+            <a:schemeClr val="accent1"/>
+          </a:effectRef>
+          <a:fontRef idx="minor">
+            <a:schemeClr val="lt1"/>
+          </a:fontRef>
+        </p:style>
+        <p:txBody>
+          <a:bodyPr rtlCol="0" anchor="ctr"/>
+          <a:lstStyle/>
+          <a:p>
+            <a:pPr algn="ctr"/>
+          </a:p>
+        </p:txBody>
+      </p:sp>
       <p:sp>
         <p:nvSpPr>
           <p:cNvPr id="11" name="TextBox 10"/>
+          <p:cNvSpPr txBox="1"/>
+          <p:nvPr/>
+        </p:nvSpPr>
+        <p:spPr>
+          <a:xfrm>
+            <a:off x="11932920" y="2331720"/>
+            <a:ext cx="5257800" cy="548640"/>
+          </a:xfrm>
+          <a:prstGeom prst="rect">
+            <a:avLst/>
+          </a:prstGeom>
+          <a:noFill/>
+        </p:spPr>
+        <p:txBody>
+          <a:bodyPr wrap="square" anchor="ctr" lIns="36576" rIns="36576" tIns="0" bIns="0">
+            <a:spAutoFit/>
+          </a:bodyPr>
+          <a:lstStyle/>
+          <a:p>
+            <a:pPr algn="l">
+              <a:defRPr sz="2500" b="1">
+                <a:solidFill>
+                  <a:srgbClr val="125449"/>
+                </a:solidFill>
+                <a:latin typeface="Lato"/>
+              </a:defRPr>
+            </a:pPr>
+            <a:r>
+              <a:t>Where the $12m starts</a:t>
+            </a:r>
+          </a:p>
+        </p:txBody>
+      </p:sp>
+      <p:graphicFrame>
+        <p:nvGraphicFramePr>
+          <p:cNvPr id="12" name="Chart 11"/>
+          <p:cNvGraphicFramePr>
+            <a:graphicFrameLocks noGrp="1"/>
+          </p:cNvGraphicFramePr>
+          <p:nvPr/>
+        </p:nvGraphicFramePr>
+        <p:xfrm>
+          <a:off x="11951208" y="3081528"/>
+          <a:ext cx="5184648" cy="2432304"/>
+        </p:xfrm>
+        <a:graphic>
+          <a:graphicData uri="http://schemas.openxmlformats.org/drawingml/2006/chart">
+            <c:chart xmlns:c="http://schemas.openxmlformats.org/drawingml/2006/chart" r:id="rId2"/>
+          </a:graphicData>
+        </a:graphic>
+      </p:graphicFrame>
+      <p:sp>
+        <p:nvSpPr>
+          <p:cNvPr id="13" name="TextBox 12"/>
+          <p:cNvSpPr txBox="1"/>
+          <p:nvPr/>
+        </p:nvSpPr>
+        <p:spPr>
+          <a:xfrm>
+            <a:off x="11978640" y="5715000"/>
+            <a:ext cx="5276088" cy="457200"/>
+          </a:xfrm>
+          <a:prstGeom prst="rect">
+            <a:avLst/>
+          </a:prstGeom>
+          <a:noFill/>
+        </p:spPr>
+        <p:txBody>
+          <a:bodyPr wrap="square" anchor="ctr" lIns="36576" rIns="36576" tIns="0" bIns="0">
+            <a:spAutoFit/>
+          </a:bodyPr>
+          <a:lstStyle/>
+          <a:p>
+            <a:pPr algn="l">
+              <a:defRPr sz="2100" b="1">
+                <a:solidFill>
+                  <a:srgbClr val="125449"/>
+                </a:solidFill>
+                <a:latin typeface="Lato"/>
+              </a:defRPr>
+            </a:pPr>
+            <a:r>
+              <a:t>$5.784m bonds</a:t>
+            </a:r>
+          </a:p>
+        </p:txBody>
+      </p:sp>
+      <p:sp>
+        <p:nvSpPr>
+          <p:cNvPr id="14" name="TextBox 13"/>
+          <p:cNvSpPr txBox="1"/>
+          <p:nvPr/>
+        </p:nvSpPr>
+        <p:spPr>
+          <a:xfrm>
+            <a:off x="11978640" y="6300216"/>
+            <a:ext cx="5266944" cy="457200"/>
+          </a:xfrm>
+          <a:prstGeom prst="rect">
+            <a:avLst/>
+          </a:prstGeom>
+          <a:noFill/>
+        </p:spPr>
+        <p:txBody>
+          <a:bodyPr wrap="square" anchor="ctr" lIns="36576" rIns="36576" tIns="0" bIns="0">
+            <a:spAutoFit/>
+          </a:bodyPr>
+          <a:lstStyle/>
+          <a:p>
+            <a:pPr algn="l">
+              <a:defRPr sz="2100" b="1">
+                <a:solidFill>
+                  <a:srgbClr val="C28E52"/>
+                </a:solidFill>
+                <a:latin typeface="Lato"/>
+              </a:defRPr>
+            </a:pPr>
+            <a:r>
+              <a:t>$6.210m equities</a:t>
+            </a:r>
+          </a:p>
+        </p:txBody>
+      </p:sp>
+      <p:sp>
+        <p:nvSpPr>
+          <p:cNvPr id="15" name="TextBox 14"/>
+          <p:cNvSpPr txBox="1"/>
+          <p:nvPr/>
+        </p:nvSpPr>
+        <p:spPr>
+          <a:xfrm>
+            <a:off x="11987784" y="6912864"/>
+            <a:ext cx="5230368" cy="457200"/>
+          </a:xfrm>
+          <a:prstGeom prst="rect">
+            <a:avLst/>
+          </a:prstGeom>
+          <a:noFill/>
+        </p:spPr>
+        <p:txBody>
+          <a:bodyPr wrap="square" anchor="ctr" lIns="36576" rIns="36576" tIns="0" bIns="0">
+            <a:spAutoFit/>
+          </a:bodyPr>
+          <a:lstStyle/>
+          <a:p>
+            <a:pPr algn="l">
+              <a:defRPr sz="1800" b="0">
+                <a:solidFill>
+                  <a:srgbClr val="65786F"/>
+                </a:solidFill>
+                <a:latin typeface="Lato"/>
+              </a:defRPr>
+            </a:pPr>
+            <a:r>
+              <a:t>$6,210 entry fee</a:t>
+            </a:r>
+          </a:p>
+        </p:txBody>
+      </p:sp>
+      <p:sp>
+        <p:nvSpPr>
+          <p:cNvPr id="16" name="TextBox 15"/>
           <p:cNvSpPr txBox="1"/>
           <p:nvPr/>
         </p:nvSpPr>
@@ -7454,7 +8214,7 @@
       </p:sp>
       <p:sp>
         <p:nvSpPr>
-          <p:cNvPr id="12" name="TextBox 11"/>
+          <p:cNvPr id="17" name="TextBox 16"/>
           <p:cNvSpPr txBox="1"/>
           <p:nvPr/>
         </p:nvSpPr>
@@ -7503,7 +8263,7 @@
       </p:sp>
       <p:sp>
         <p:nvSpPr>
-          <p:cNvPr id="13" name="TextBox 12"/>
+          <p:cNvPr id="18" name="TextBox 17"/>
           <p:cNvSpPr txBox="1"/>
           <p:nvPr/>
         </p:nvSpPr>
@@ -13161,33 +13921,180 @@
           </a:p>
         </p:txBody>
       </p:sp>
-      <p:pic>
-        <p:nvPicPr>
-          <p:cNvPr id="9" name="Picture 8" descr="image.jpg"/>
-          <p:cNvPicPr>
-            <a:picLocks noChangeAspect="1"/>
-          </p:cNvPicPr>
-          <p:nvPr/>
-        </p:nvPicPr>
-        <p:blipFill>
-          <a:blip r:embed="rId2"/>
-          <a:stretch>
-            <a:fillRect/>
-          </a:stretch>
-        </p:blipFill>
+      <p:sp>
+        <p:nvSpPr>
+          <p:cNvPr id="9" name="Rounded Rectangle 8"/>
+          <p:cNvSpPr/>
+          <p:nvPr/>
+        </p:nvSpPr>
         <p:spPr>
           <a:xfrm>
             <a:off x="722376" y="2862072"/>
             <a:ext cx="7607808" cy="6345936"/>
           </a:xfrm>
-          <a:prstGeom prst="rect">
-            <a:avLst/>
-          </a:prstGeom>
-        </p:spPr>
-      </p:pic>
-      <p:sp>
-        <p:nvSpPr>
-          <p:cNvPr id="10" name="Rounded Rectangle 9"/>
+          <a:prstGeom prst="roundRect">
+            <a:avLst>
+              <a:gd name="adj" fmla="val 7000"/>
+            </a:avLst>
+          </a:prstGeom>
+          <a:solidFill>
+            <a:srgbClr val="FFFFFF"/>
+          </a:solidFill>
+          <a:ln>
+            <a:noFill/>
+          </a:ln>
+        </p:spPr>
+        <p:style>
+          <a:lnRef idx="1">
+            <a:schemeClr val="accent1"/>
+          </a:lnRef>
+          <a:fillRef idx="3">
+            <a:schemeClr val="accent1"/>
+          </a:fillRef>
+          <a:effectRef idx="2">
+            <a:schemeClr val="accent1"/>
+          </a:effectRef>
+          <a:fontRef idx="minor">
+            <a:schemeClr val="lt1"/>
+          </a:fontRef>
+        </p:style>
+        <p:txBody>
+          <a:bodyPr rtlCol="0" anchor="ctr"/>
+          <a:lstStyle/>
+          <a:p>
+            <a:pPr algn="ctr"/>
+          </a:p>
+        </p:txBody>
+      </p:sp>
+      <p:sp>
+        <p:nvSpPr>
+          <p:cNvPr id="10" name="TextBox 9"/>
+          <p:cNvSpPr txBox="1"/>
+          <p:nvPr/>
+        </p:nvSpPr>
+        <p:spPr>
+          <a:xfrm>
+            <a:off x="1060704" y="3218688"/>
+            <a:ext cx="6958584" cy="502920"/>
+          </a:xfrm>
+          <a:prstGeom prst="rect">
+            <a:avLst/>
+          </a:prstGeom>
+          <a:noFill/>
+        </p:spPr>
+        <p:txBody>
+          <a:bodyPr wrap="square" anchor="ctr" lIns="36576" rIns="36576" tIns="0" bIns="0">
+            <a:spAutoFit/>
+          </a:bodyPr>
+          <a:lstStyle/>
+          <a:p>
+            <a:pPr algn="l">
+              <a:defRPr sz="2200" b="1">
+                <a:solidFill>
+                  <a:srgbClr val="125449"/>
+                </a:solidFill>
+                <a:latin typeface="Lato"/>
+              </a:defRPr>
+            </a:pPr>
+            <a:r>
+              <a:t>2030 goal under equity scenarios</a:t>
+            </a:r>
+          </a:p>
+        </p:txBody>
+      </p:sp>
+      <p:graphicFrame>
+        <p:nvGraphicFramePr>
+          <p:cNvPr id="11" name="Chart 10"/>
+          <p:cNvGraphicFramePr>
+            <a:graphicFrameLocks noGrp="1"/>
+          </p:cNvGraphicFramePr>
+          <p:nvPr/>
+        </p:nvGraphicFramePr>
+        <p:xfrm>
+          <a:off x="1051560" y="3858768"/>
+          <a:ext cx="6894576" cy="4059936"/>
+        </p:xfrm>
+        <a:graphic>
+          <a:graphicData uri="http://schemas.openxmlformats.org/drawingml/2006/chart">
+            <c:chart xmlns:c="http://schemas.openxmlformats.org/drawingml/2006/chart" r:id="rId2"/>
+          </a:graphicData>
+        </a:graphic>
+      </p:graphicFrame>
+      <p:sp>
+        <p:nvSpPr>
+          <p:cNvPr id="12" name="TextBox 11"/>
+          <p:cNvSpPr txBox="1"/>
+          <p:nvPr/>
+        </p:nvSpPr>
+        <p:spPr>
+          <a:xfrm>
+            <a:off x="1115568" y="8174736"/>
+            <a:ext cx="6894576" cy="411480"/>
+          </a:xfrm>
+          <a:prstGeom prst="rect">
+            <a:avLst/>
+          </a:prstGeom>
+          <a:noFill/>
+        </p:spPr>
+        <p:txBody>
+          <a:bodyPr wrap="square" anchor="ctr" lIns="36576" rIns="36576" tIns="0" bIns="0">
+            <a:spAutoFit/>
+          </a:bodyPr>
+          <a:lstStyle/>
+          <a:p>
+            <a:pPr algn="l">
+              <a:defRPr sz="1800" b="1">
+                <a:solidFill>
+                  <a:srgbClr val="125449"/>
+                </a:solidFill>
+                <a:latin typeface="Lato"/>
+              </a:defRPr>
+            </a:pPr>
+            <a:r>
+              <a:t>Return scenarios, not forecasts</a:t>
+            </a:r>
+          </a:p>
+        </p:txBody>
+      </p:sp>
+      <p:sp>
+        <p:nvSpPr>
+          <p:cNvPr id="13" name="TextBox 12"/>
+          <p:cNvSpPr txBox="1"/>
+          <p:nvPr/>
+        </p:nvSpPr>
+        <p:spPr>
+          <a:xfrm>
+            <a:off x="1115568" y="8622792"/>
+            <a:ext cx="6812280" cy="374904"/>
+          </a:xfrm>
+          <a:prstGeom prst="rect">
+            <a:avLst/>
+          </a:prstGeom>
+          <a:noFill/>
+        </p:spPr>
+        <p:txBody>
+          <a:bodyPr wrap="square" anchor="ctr" lIns="36576" rIns="36576" tIns="0" bIns="0">
+            <a:spAutoFit/>
+          </a:bodyPr>
+          <a:lstStyle/>
+          <a:p>
+            <a:pPr algn="l">
+              <a:defRPr sz="1500" b="0">
+                <a:solidFill>
+                  <a:srgbClr val="65786F"/>
+                </a:solidFill>
+                <a:latin typeface="Lato"/>
+              </a:defRPr>
+            </a:pPr>
+            <a:r>
+              <a:t>2.3% inflation | unspent bond cash at 0%</a:t>
+            </a:r>
+          </a:p>
+        </p:txBody>
+      </p:sp>
+      <p:sp>
+        <p:nvSpPr>
+          <p:cNvPr id="14" name="Rounded Rectangle 13"/>
           <p:cNvSpPr/>
           <p:nvPr/>
         </p:nvSpPr>
@@ -13232,7 +14139,7 @@
       </p:sp>
       <p:sp>
         <p:nvSpPr>
-          <p:cNvPr id="11" name="Rounded Rectangle 10"/>
+          <p:cNvPr id="15" name="Rounded Rectangle 14"/>
           <p:cNvSpPr/>
           <p:nvPr/>
         </p:nvSpPr>
@@ -13277,7 +14184,7 @@
       </p:sp>
       <p:sp>
         <p:nvSpPr>
-          <p:cNvPr id="12" name="TextBox 11"/>
+          <p:cNvPr id="16" name="TextBox 15"/>
           <p:cNvSpPr txBox="1"/>
           <p:nvPr/>
         </p:nvSpPr>
@@ -13313,7 +14220,7 @@
       </p:sp>
       <p:sp>
         <p:nvSpPr>
-          <p:cNvPr id="13" name="TextBox 12"/>
+          <p:cNvPr id="17" name="TextBox 16"/>
           <p:cNvSpPr txBox="1"/>
           <p:nvPr/>
         </p:nvSpPr>
@@ -13349,7 +14256,7 @@
       </p:sp>
       <p:sp>
         <p:nvSpPr>
-          <p:cNvPr id="14" name="TextBox 13"/>
+          <p:cNvPr id="18" name="TextBox 17"/>
           <p:cNvSpPr txBox="1"/>
           <p:nvPr/>
         </p:nvSpPr>
@@ -13385,7 +14292,7 @@
       </p:sp>
       <p:cxnSp>
         <p:nvCxnSpPr>
-          <p:cNvPr id="15" name="Connector 14"/>
+          <p:cNvPr id="19" name="Connector 18"/>
           <p:cNvCxnSpPr/>
           <p:nvPr/>
         </p:nvCxnSpPr>
@@ -13420,7 +14327,7 @@
       </p:cxnSp>
       <p:sp>
         <p:nvSpPr>
-          <p:cNvPr id="16" name="Rounded Rectangle 15"/>
+          <p:cNvPr id="20" name="Rounded Rectangle 19"/>
           <p:cNvSpPr/>
           <p:nvPr/>
         </p:nvSpPr>
@@ -13465,7 +14372,7 @@
       </p:sp>
       <p:sp>
         <p:nvSpPr>
-          <p:cNvPr id="17" name="TextBox 16"/>
+          <p:cNvPr id="21" name="TextBox 20"/>
           <p:cNvSpPr txBox="1"/>
           <p:nvPr/>
         </p:nvSpPr>
@@ -13501,7 +14408,7 @@
       </p:sp>
       <p:sp>
         <p:nvSpPr>
-          <p:cNvPr id="18" name="TextBox 17"/>
+          <p:cNvPr id="22" name="TextBox 21"/>
           <p:cNvSpPr txBox="1"/>
           <p:nvPr/>
         </p:nvSpPr>
@@ -13537,7 +14444,7 @@
       </p:sp>
       <p:sp>
         <p:nvSpPr>
-          <p:cNvPr id="19" name="TextBox 18"/>
+          <p:cNvPr id="23" name="TextBox 22"/>
           <p:cNvSpPr txBox="1"/>
           <p:nvPr/>
         </p:nvSpPr>
@@ -13573,7 +14480,7 @@
       </p:sp>
       <p:cxnSp>
         <p:nvCxnSpPr>
-          <p:cNvPr id="20" name="Connector 19"/>
+          <p:cNvPr id="24" name="Connector 23"/>
           <p:cNvCxnSpPr/>
           <p:nvPr/>
         </p:nvCxnSpPr>
@@ -13608,7 +14515,7 @@
       </p:cxnSp>
       <p:sp>
         <p:nvSpPr>
-          <p:cNvPr id="21" name="Rounded Rectangle 20"/>
+          <p:cNvPr id="25" name="Rounded Rectangle 24"/>
           <p:cNvSpPr/>
           <p:nvPr/>
         </p:nvSpPr>
@@ -13653,7 +14560,7 @@
       </p:sp>
       <p:sp>
         <p:nvSpPr>
-          <p:cNvPr id="22" name="TextBox 21"/>
+          <p:cNvPr id="26" name="TextBox 25"/>
           <p:cNvSpPr txBox="1"/>
           <p:nvPr/>
         </p:nvSpPr>
@@ -13689,7 +14596,7 @@
       </p:sp>
       <p:sp>
         <p:nvSpPr>
-          <p:cNvPr id="23" name="TextBox 22"/>
+          <p:cNvPr id="27" name="TextBox 26"/>
           <p:cNvSpPr txBox="1"/>
           <p:nvPr/>
         </p:nvSpPr>
@@ -13725,7 +14632,7 @@
       </p:sp>
       <p:sp>
         <p:nvSpPr>
-          <p:cNvPr id="24" name="TextBox 23"/>
+          <p:cNvPr id="28" name="TextBox 27"/>
           <p:cNvSpPr txBox="1"/>
           <p:nvPr/>
         </p:nvSpPr>
@@ -13761,7 +14668,7 @@
       </p:sp>
       <p:sp>
         <p:nvSpPr>
-          <p:cNvPr id="25" name="TextBox 24"/>
+          <p:cNvPr id="29" name="TextBox 28"/>
           <p:cNvSpPr txBox="1"/>
           <p:nvPr/>
         </p:nvSpPr>
@@ -14116,33 +15023,144 @@
           </a:p>
         </p:txBody>
       </p:sp>
-      <p:pic>
-        <p:nvPicPr>
-          <p:cNvPr id="10" name="Picture 9" descr="image.jpg"/>
-          <p:cNvPicPr>
-            <a:picLocks noChangeAspect="1"/>
-          </p:cNvPicPr>
-          <p:nvPr/>
-        </p:nvPicPr>
-        <p:blipFill>
-          <a:blip r:embed="rId2"/>
-          <a:stretch>
-            <a:fillRect/>
-          </a:stretch>
-        </p:blipFill>
+      <p:sp>
+        <p:nvSpPr>
+          <p:cNvPr id="10" name="Rounded Rectangle 9"/>
+          <p:cNvSpPr/>
+          <p:nvPr/>
+        </p:nvSpPr>
         <p:spPr>
           <a:xfrm>
             <a:off x="11521440" y="2871216"/>
             <a:ext cx="6016752" cy="6318504"/>
           </a:xfrm>
-          <a:prstGeom prst="rect">
-            <a:avLst/>
-          </a:prstGeom>
-        </p:spPr>
-      </p:pic>
-      <p:sp>
-        <p:nvSpPr>
-          <p:cNvPr id="11" name="Rounded Rectangle 10"/>
+          <a:prstGeom prst="roundRect">
+            <a:avLst>
+              <a:gd name="adj" fmla="val 7000"/>
+            </a:avLst>
+          </a:prstGeom>
+          <a:solidFill>
+            <a:srgbClr val="EAF0E9"/>
+          </a:solidFill>
+          <a:ln>
+            <a:noFill/>
+          </a:ln>
+        </p:spPr>
+        <p:style>
+          <a:lnRef idx="1">
+            <a:schemeClr val="accent1"/>
+          </a:lnRef>
+          <a:fillRef idx="3">
+            <a:schemeClr val="accent1"/>
+          </a:fillRef>
+          <a:effectRef idx="2">
+            <a:schemeClr val="accent1"/>
+          </a:effectRef>
+          <a:fontRef idx="minor">
+            <a:schemeClr val="lt1"/>
+          </a:fontRef>
+        </p:style>
+        <p:txBody>
+          <a:bodyPr rtlCol="0" anchor="ctr"/>
+          <a:lstStyle/>
+          <a:p>
+            <a:pPr algn="ctr"/>
+          </a:p>
+        </p:txBody>
+      </p:sp>
+      <p:sp>
+        <p:nvSpPr>
+          <p:cNvPr id="11" name="TextBox 10"/>
+          <p:cNvSpPr txBox="1"/>
+          <p:nvPr/>
+        </p:nvSpPr>
+        <p:spPr>
+          <a:xfrm>
+            <a:off x="11878056" y="3255264"/>
+            <a:ext cx="5349240" cy="566928"/>
+          </a:xfrm>
+          <a:prstGeom prst="rect">
+            <a:avLst/>
+          </a:prstGeom>
+          <a:noFill/>
+        </p:spPr>
+        <p:txBody>
+          <a:bodyPr wrap="square" anchor="ctr" lIns="36576" rIns="36576" tIns="0" bIns="0">
+            <a:spAutoFit/>
+          </a:bodyPr>
+          <a:lstStyle/>
+          <a:p>
+            <a:pPr algn="l">
+              <a:defRPr sz="2400" b="1">
+                <a:solidFill>
+                  <a:srgbClr val="125449"/>
+                </a:solidFill>
+                <a:latin typeface="Lato"/>
+              </a:defRPr>
+            </a:pPr>
+            <a:r>
+              <a:t>Revised commitments</a:t>
+            </a:r>
+          </a:p>
+        </p:txBody>
+      </p:sp>
+      <p:graphicFrame>
+        <p:nvGraphicFramePr>
+          <p:cNvPr id="12" name="Chart 11"/>
+          <p:cNvGraphicFramePr>
+            <a:graphicFrameLocks noGrp="1"/>
+          </p:cNvGraphicFramePr>
+          <p:nvPr/>
+        </p:nvGraphicFramePr>
+        <p:xfrm>
+          <a:off x="11850624" y="4023360"/>
+          <a:ext cx="5394960" cy="3922776"/>
+        </p:xfrm>
+        <a:graphic>
+          <a:graphicData uri="http://schemas.openxmlformats.org/drawingml/2006/chart">
+            <c:chart xmlns:c="http://schemas.openxmlformats.org/drawingml/2006/chart" r:id="rId2"/>
+          </a:graphicData>
+        </a:graphic>
+      </p:graphicFrame>
+      <p:sp>
+        <p:nvSpPr>
+          <p:cNvPr id="13" name="TextBox 12"/>
+          <p:cNvSpPr txBox="1"/>
+          <p:nvPr/>
+        </p:nvSpPr>
+        <p:spPr>
+          <a:xfrm>
+            <a:off x="11914632" y="8174736"/>
+            <a:ext cx="5257800" cy="612648"/>
+          </a:xfrm>
+          <a:prstGeom prst="rect">
+            <a:avLst/>
+          </a:prstGeom>
+          <a:noFill/>
+        </p:spPr>
+        <p:txBody>
+          <a:bodyPr wrap="square" anchor="ctr" lIns="36576" rIns="36576" tIns="0" bIns="0">
+            <a:spAutoFit/>
+          </a:bodyPr>
+          <a:lstStyle/>
+          <a:p>
+            <a:pPr algn="l">
+              <a:defRPr sz="2000" b="1">
+                <a:solidFill>
+                  <a:srgbClr val="2D4038"/>
+                </a:solidFill>
+                <a:latin typeface="Lato"/>
+              </a:defRPr>
+            </a:pPr>
+            <a:r>
+              <a:t>$6.0m across three dates</a:t>
+            </a:r>
+          </a:p>
+        </p:txBody>
+      </p:sp>
+      <p:sp>
+        <p:nvSpPr>
+          <p:cNvPr id="14" name="Rounded Rectangle 13"/>
           <p:cNvSpPr/>
           <p:nvPr/>
         </p:nvSpPr>
@@ -14187,7 +15205,7 @@
       </p:sp>
       <p:sp>
         <p:nvSpPr>
-          <p:cNvPr id="12" name="TextBox 11"/>
+          <p:cNvPr id="15" name="TextBox 14"/>
           <p:cNvSpPr txBox="1"/>
           <p:nvPr/>
         </p:nvSpPr>
@@ -14223,7 +15241,7 @@
       </p:sp>
       <p:sp>
         <p:nvSpPr>
-          <p:cNvPr id="13" name="TextBox 12"/>
+          <p:cNvPr id="16" name="TextBox 15"/>
           <p:cNvSpPr txBox="1"/>
           <p:nvPr/>
         </p:nvSpPr>
@@ -14259,7 +15277,7 @@
       </p:sp>
       <p:sp>
         <p:nvSpPr>
-          <p:cNvPr id="14" name="TextBox 13"/>
+          <p:cNvPr id="17" name="TextBox 16"/>
           <p:cNvSpPr txBox="1"/>
           <p:nvPr/>
         </p:nvSpPr>
@@ -14295,7 +15313,7 @@
       </p:sp>
       <p:cxnSp>
         <p:nvCxnSpPr>
-          <p:cNvPr id="15" name="Connector 14"/>
+          <p:cNvPr id="18" name="Connector 17"/>
           <p:cNvCxnSpPr/>
           <p:nvPr/>
         </p:nvCxnSpPr>
@@ -14330,7 +15348,7 @@
       </p:cxnSp>
       <p:sp>
         <p:nvSpPr>
-          <p:cNvPr id="16" name="TextBox 15"/>
+          <p:cNvPr id="19" name="TextBox 18"/>
           <p:cNvSpPr txBox="1"/>
           <p:nvPr/>
         </p:nvSpPr>
@@ -14366,7 +15384,7 @@
       </p:sp>
       <p:sp>
         <p:nvSpPr>
-          <p:cNvPr id="17" name="TextBox 16"/>
+          <p:cNvPr id="20" name="TextBox 19"/>
           <p:cNvSpPr txBox="1"/>
           <p:nvPr/>
         </p:nvSpPr>
@@ -14402,7 +15420,7 @@
       </p:sp>
       <p:sp>
         <p:nvSpPr>
-          <p:cNvPr id="18" name="TextBox 17"/>
+          <p:cNvPr id="21" name="TextBox 20"/>
           <p:cNvSpPr txBox="1"/>
           <p:nvPr/>
         </p:nvSpPr>
@@ -14438,7 +15456,7 @@
       </p:sp>
       <p:sp>
         <p:nvSpPr>
-          <p:cNvPr id="19" name="TextBox 18"/>
+          <p:cNvPr id="22" name="TextBox 21"/>
           <p:cNvSpPr txBox="1"/>
           <p:nvPr/>
         </p:nvSpPr>
@@ -14474,7 +15492,7 @@
       </p:sp>
       <p:sp>
         <p:nvSpPr>
-          <p:cNvPr id="20" name="TextBox 19"/>
+          <p:cNvPr id="23" name="TextBox 22"/>
           <p:cNvSpPr txBox="1"/>
           <p:nvPr/>
         </p:nvSpPr>
@@ -15974,33 +16992,162 @@
           </a:p>
         </p:txBody>
       </p:sp>
-      <p:pic>
-        <p:nvPicPr>
-          <p:cNvPr id="12" name="Picture 11" descr="image.jpg"/>
-          <p:cNvPicPr>
-            <a:picLocks noChangeAspect="1"/>
-          </p:cNvPicPr>
-          <p:nvPr/>
-        </p:nvPicPr>
-        <p:blipFill>
-          <a:blip r:embed="rId3"/>
-          <a:stretch>
-            <a:fillRect/>
-          </a:stretch>
-        </p:blipFill>
+      <p:sp>
+        <p:nvSpPr>
+          <p:cNvPr id="12" name="Rounded Rectangle 11"/>
+          <p:cNvSpPr/>
+          <p:nvPr/>
+        </p:nvSpPr>
         <p:spPr>
           <a:xfrm>
             <a:off x="12435840" y="3099816"/>
             <a:ext cx="4946904" cy="2340864"/>
           </a:xfrm>
-          <a:prstGeom prst="rect">
-            <a:avLst/>
-          </a:prstGeom>
-        </p:spPr>
-      </p:pic>
+          <a:prstGeom prst="roundRect">
+            <a:avLst>
+              <a:gd name="adj" fmla="val 7000"/>
+            </a:avLst>
+          </a:prstGeom>
+          <a:solidFill>
+            <a:srgbClr val="FFFFFF"/>
+          </a:solidFill>
+          <a:ln>
+            <a:noFill/>
+          </a:ln>
+        </p:spPr>
+        <p:style>
+          <a:lnRef idx="1">
+            <a:schemeClr val="accent1"/>
+          </a:lnRef>
+          <a:fillRef idx="3">
+            <a:schemeClr val="accent1"/>
+          </a:fillRef>
+          <a:effectRef idx="2">
+            <a:schemeClr val="accent1"/>
+          </a:effectRef>
+          <a:fontRef idx="minor">
+            <a:schemeClr val="lt1"/>
+          </a:fontRef>
+        </p:style>
+        <p:txBody>
+          <a:bodyPr rtlCol="0" anchor="ctr"/>
+          <a:lstStyle/>
+          <a:p>
+            <a:pPr algn="ctr"/>
+          </a:p>
+        </p:txBody>
+      </p:sp>
       <p:sp>
         <p:nvSpPr>
           <p:cNvPr id="13" name="TextBox 12"/>
+          <p:cNvSpPr txBox="1"/>
+          <p:nvPr/>
+        </p:nvSpPr>
+        <p:spPr>
+          <a:xfrm>
+            <a:off x="12673584" y="3447288"/>
+            <a:ext cx="4462272" cy="484632"/>
+          </a:xfrm>
+          <a:prstGeom prst="rect">
+            <a:avLst/>
+          </a:prstGeom>
+          <a:noFill/>
+        </p:spPr>
+        <p:txBody>
+          <a:bodyPr wrap="square" anchor="ctr" lIns="36576" rIns="36576" tIns="0" bIns="0">
+            <a:spAutoFit/>
+          </a:bodyPr>
+          <a:lstStyle/>
+          <a:p>
+            <a:pPr algn="l">
+              <a:defRPr sz="2000" b="1">
+                <a:solidFill>
+                  <a:srgbClr val="2D4038"/>
+                </a:solidFill>
+                <a:latin typeface="Lato"/>
+              </a:defRPr>
+            </a:pPr>
+            <a:r>
+              <a:t>2025 principal maturity</a:t>
+            </a:r>
+          </a:p>
+        </p:txBody>
+      </p:sp>
+      <p:sp>
+        <p:nvSpPr>
+          <p:cNvPr id="14" name="TextBox 13"/>
+          <p:cNvSpPr txBox="1"/>
+          <p:nvPr/>
+        </p:nvSpPr>
+        <p:spPr>
+          <a:xfrm>
+            <a:off x="12646152" y="4041648"/>
+            <a:ext cx="4553712" cy="841248"/>
+          </a:xfrm>
+          <a:prstGeom prst="rect">
+            <a:avLst/>
+          </a:prstGeom>
+          <a:noFill/>
+        </p:spPr>
+        <p:txBody>
+          <a:bodyPr wrap="square" anchor="ctr" lIns="36576" rIns="36576" tIns="0" bIns="0">
+            <a:spAutoFit/>
+          </a:bodyPr>
+          <a:lstStyle/>
+          <a:p>
+            <a:pPr algn="l">
+              <a:defRPr sz="4100" b="1">
+                <a:solidFill>
+                  <a:srgbClr val="125449"/>
+                </a:solidFill>
+                <a:latin typeface="Lato"/>
+              </a:defRPr>
+            </a:pPr>
+            <a:r>
+              <a:t>$1.20m</a:t>
+            </a:r>
+          </a:p>
+        </p:txBody>
+      </p:sp>
+      <p:sp>
+        <p:nvSpPr>
+          <p:cNvPr id="15" name="TextBox 14"/>
+          <p:cNvSpPr txBox="1"/>
+          <p:nvPr/>
+        </p:nvSpPr>
+        <p:spPr>
+          <a:xfrm>
+            <a:off x="12664440" y="4837176"/>
+            <a:ext cx="4471416" cy="438912"/>
+          </a:xfrm>
+          <a:prstGeom prst="rect">
+            <a:avLst/>
+          </a:prstGeom>
+          <a:noFill/>
+        </p:spPr>
+        <p:txBody>
+          <a:bodyPr wrap="square" anchor="ctr" lIns="36576" rIns="36576" tIns="0" bIns="0">
+            <a:spAutoFit/>
+          </a:bodyPr>
+          <a:lstStyle/>
+          <a:p>
+            <a:pPr algn="l">
+              <a:defRPr sz="1500" b="0">
+                <a:solidFill>
+                  <a:srgbClr val="65786F"/>
+                </a:solidFill>
+                <a:latin typeface="Lato"/>
+              </a:defRPr>
+            </a:pPr>
+            <a:r>
+              <a:t>Gamma redemption covers the payment</a:t>
+            </a:r>
+          </a:p>
+        </p:txBody>
+      </p:sp>
+      <p:sp>
+        <p:nvSpPr>
+          <p:cNvPr id="16" name="TextBox 15"/>
           <p:cNvSpPr txBox="1"/>
           <p:nvPr/>
         </p:nvSpPr>
@@ -16036,7 +17183,7 @@
       </p:sp>
       <p:sp>
         <p:nvSpPr>
-          <p:cNvPr id="14" name="TextBox 13"/>
+          <p:cNvPr id="17" name="TextBox 16"/>
           <p:cNvSpPr txBox="1"/>
           <p:nvPr/>
         </p:nvSpPr>
@@ -16072,7 +17219,7 @@
       </p:sp>
       <p:cxnSp>
         <p:nvCxnSpPr>
-          <p:cNvPr id="15" name="Connector 14"/>
+          <p:cNvPr id="18" name="Connector 17"/>
           <p:cNvCxnSpPr/>
           <p:nvPr/>
         </p:nvCxnSpPr>
@@ -16107,7 +17254,7 @@
       </p:cxnSp>
       <p:sp>
         <p:nvSpPr>
-          <p:cNvPr id="16" name="TextBox 15"/>
+          <p:cNvPr id="19" name="TextBox 18"/>
           <p:cNvSpPr txBox="1"/>
           <p:nvPr/>
         </p:nvSpPr>

--- a/Final Submission/Presentation.pptx
+++ b/Final Submission/Presentation.pptx
@@ -3675,7 +3675,7 @@
           <a:lstStyle/>
           <a:p>
             <a:r>
-              <a:t>Source and model notes: Source-derived utility frozen 0.053328704612, reoptimized 0.053328717792, gain 1.31799698794e-08. Bars cannot communicate this tiny utility difference faithfully. A*=8.938687 is a pairwise fixed-policy comparison.</a:t>
+              <a:t>Source and model notes: Source-derived utility frozen 0.053328704612, reoptimized 0.053328717792, gain 1.31799698655e-08. Bars cannot communicate this tiny utility difference faithfully. A*=8.938687 is a pairwise fixed-policy comparison.</a:t>
             </a:r>
           </a:p>
         </p:txBody>
